--- a/presentation/EEG-HDC Final Presentation.pptx
+++ b/presentation/EEG-HDC Final Presentation.pptx
@@ -6,7 +6,7 @@
     <p:sldMasterId id="2147483660" r:id="rId2"/>
   </p:sldMasterIdLst>
   <p:notesMasterIdLst>
-    <p:notesMasterId r:id="rId52"/>
+    <p:notesMasterId r:id="rId51"/>
   </p:notesMasterIdLst>
   <p:sldIdLst>
     <p:sldId id="256" r:id="rId3"/>
@@ -24,40 +24,39 @@
     <p:sldId id="264" r:id="rId15"/>
     <p:sldId id="265" r:id="rId16"/>
     <p:sldId id="331" r:id="rId17"/>
-    <p:sldId id="332" r:id="rId18"/>
-    <p:sldId id="337" r:id="rId19"/>
-    <p:sldId id="338" r:id="rId20"/>
-    <p:sldId id="339" r:id="rId21"/>
-    <p:sldId id="340" r:id="rId22"/>
-    <p:sldId id="341" r:id="rId23"/>
-    <p:sldId id="342" r:id="rId24"/>
-    <p:sldId id="343" r:id="rId25"/>
-    <p:sldId id="344" r:id="rId26"/>
-    <p:sldId id="345" r:id="rId27"/>
-    <p:sldId id="346" r:id="rId28"/>
-    <p:sldId id="347" r:id="rId29"/>
-    <p:sldId id="348" r:id="rId30"/>
-    <p:sldId id="349" r:id="rId31"/>
-    <p:sldId id="350" r:id="rId32"/>
-    <p:sldId id="351" r:id="rId33"/>
-    <p:sldId id="352" r:id="rId34"/>
-    <p:sldId id="353" r:id="rId35"/>
-    <p:sldId id="354" r:id="rId36"/>
-    <p:sldId id="355" r:id="rId37"/>
-    <p:sldId id="356" r:id="rId38"/>
-    <p:sldId id="357" r:id="rId39"/>
-    <p:sldId id="358" r:id="rId40"/>
-    <p:sldId id="359" r:id="rId41"/>
-    <p:sldId id="360" r:id="rId42"/>
-    <p:sldId id="361" r:id="rId43"/>
-    <p:sldId id="362" r:id="rId44"/>
-    <p:sldId id="363" r:id="rId45"/>
-    <p:sldId id="364" r:id="rId46"/>
-    <p:sldId id="365" r:id="rId47"/>
-    <p:sldId id="366" r:id="rId48"/>
-    <p:sldId id="367" r:id="rId49"/>
-    <p:sldId id="368" r:id="rId50"/>
-    <p:sldId id="273" r:id="rId51"/>
+    <p:sldId id="337" r:id="rId18"/>
+    <p:sldId id="338" r:id="rId19"/>
+    <p:sldId id="339" r:id="rId20"/>
+    <p:sldId id="340" r:id="rId21"/>
+    <p:sldId id="341" r:id="rId22"/>
+    <p:sldId id="342" r:id="rId23"/>
+    <p:sldId id="343" r:id="rId24"/>
+    <p:sldId id="344" r:id="rId25"/>
+    <p:sldId id="345" r:id="rId26"/>
+    <p:sldId id="346" r:id="rId27"/>
+    <p:sldId id="347" r:id="rId28"/>
+    <p:sldId id="348" r:id="rId29"/>
+    <p:sldId id="349" r:id="rId30"/>
+    <p:sldId id="350" r:id="rId31"/>
+    <p:sldId id="351" r:id="rId32"/>
+    <p:sldId id="352" r:id="rId33"/>
+    <p:sldId id="353" r:id="rId34"/>
+    <p:sldId id="354" r:id="rId35"/>
+    <p:sldId id="355" r:id="rId36"/>
+    <p:sldId id="356" r:id="rId37"/>
+    <p:sldId id="357" r:id="rId38"/>
+    <p:sldId id="358" r:id="rId39"/>
+    <p:sldId id="359" r:id="rId40"/>
+    <p:sldId id="360" r:id="rId41"/>
+    <p:sldId id="361" r:id="rId42"/>
+    <p:sldId id="362" r:id="rId43"/>
+    <p:sldId id="363" r:id="rId44"/>
+    <p:sldId id="364" r:id="rId45"/>
+    <p:sldId id="365" r:id="rId46"/>
+    <p:sldId id="366" r:id="rId47"/>
+    <p:sldId id="367" r:id="rId48"/>
+    <p:sldId id="368" r:id="rId49"/>
+    <p:sldId id="273" r:id="rId50"/>
   </p:sldIdLst>
   <p:sldSz cx="18288000" cy="10287000"/>
   <p:notesSz cx="18288000" cy="10287000"/>
@@ -1359,7 +1358,7 @@
             <a:fld id="{CD2D96E9-8FC2-4761-8B0F-732A022FE3D0}" type="datetimeFigureOut">
               <a:rPr lang="en-IN" smtClean="0"/>
               <a:pPr/>
-              <a:t>26-10-2026</a:t>
+              <a:t>27-10-2026</a:t>
             </a:fld>
             <a:endParaRPr lang="en-IN" dirty="0"/>
           </a:p>
@@ -1651,13 +1650,6 @@
           </p:nvPr>
         </p:nvSpPr>
         <p:spPr/>
-        <p:txBody>
-          <a:bodyPr/>
-          <a:lstStyle/>
-          <a:p>
-            <a:endParaRPr lang="en-IN"/>
-          </a:p>
-        </p:txBody>
       </p:sp>
       <p:sp>
         <p:nvSpPr>
@@ -1674,19 +1666,6 @@
           <a:bodyPr/>
           <a:lstStyle/>
           <a:p>
-            <a:r>
-              <a:rPr lang="en-US" b="0" i="0" dirty="0">
-                <a:solidFill>
-                  <a:srgbClr val="BDC1C6"/>
-                </a:solidFill>
-                <a:effectLst/>
-                <a:highlight>
-                  <a:srgbClr val="1F1F1F"/>
-                </a:highlight>
-                <a:latin typeface="arial" panose="020B0604020202020204" pitchFamily="34" charset="0"/>
-              </a:rPr>
-              <a:t> </a:t>
-            </a:r>
             <a:endParaRPr lang="en-IN" dirty="0"/>
           </a:p>
         </p:txBody>
@@ -1709,7 +1688,7 @@
             <a:fld id="{651B559A-E338-4F75-A573-9861E0BAC220}" type="slidenum">
               <a:rPr lang="en-IN" smtClean="0"/>
               <a:pPr/>
-              <a:t>3</a:t>
+              <a:t>1</a:t>
             </a:fld>
             <a:endParaRPr lang="en-IN" dirty="0"/>
           </a:p>
@@ -1718,7 +1697,7 @@
     </p:spTree>
     <p:extLst>
       <p:ext uri="{BB962C8B-B14F-4D97-AF65-F5344CB8AC3E}">
-        <p14:creationId xmlns:p14="http://schemas.microsoft.com/office/powerpoint/2010/main" val="2621492100"/>
+        <p14:creationId xmlns:p14="http://schemas.microsoft.com/office/powerpoint/2010/main" val="2153064478"/>
       </p:ext>
     </p:extLst>
   </p:cSld>
@@ -1776,7 +1755,7 @@
               <a:rPr>
                 <a:latin typeface="Times New Roman"/>
               </a:rPr>
-              <a:t>We compare three models so the improvement is clear.</a:t>
+              <a:t>SMOTE means synthetic minority oversampling: create new rare-class examples by interpolating between a real example and a close neighbour. The formula is z_new = z_i + lambda times (z_neighbour minus z_i), lambda random between 0 and 1.</a:t>
             </a:r>
           </a:p>
           <a:p>
@@ -1784,7 +1763,7 @@
               <a:rPr>
                 <a:latin typeface="Times New Roman"/>
               </a:rPr>
-              <a:t>1) 1D-CNN baseline: a plain convolutional network trained from scratch, tested leave-one-patient-out (every patient is held out in turn). This is the strictest test.</a:t>
+              <a:t>We do it on the 256-number embeddings, not on the raw EEG, because mixing two raw brain signals gives signals that no brain makes.</a:t>
             </a:r>
           </a:p>
           <a:p>
@@ -1792,7 +1771,7 @@
               <a:rPr>
                 <a:latin typeface="Times New Roman"/>
               </a:rPr>
-              <a:t>2) Fine-tuned CRNN (v2): our CRNN with Phase A weights fine-tuned, plus SMOTE.</a:t>
+              <a:t>We tried 3 classifiers (MLP, Random Forest, HistGB) times 3 ratio settings: 9 combinations.</a:t>
             </a:r>
           </a:p>
           <a:p>
@@ -1800,7 +1779,7 @@
               <a:rPr>
                 <a:latin typeface="Times New Roman"/>
               </a:rPr>
-              <a:t>3) EEG-HDC v4 (proposed): two backbones, 256 numbers, SMOTE, HistGB.</a:t>
+              <a:t>The adversarial control checks whether the model is cheating by recognising the patient. We take normal EEG from each patient, label it with that patient's seizure type and test. A good model should do worse here than on real seizures; the difference is the gap.</a:t>
             </a:r>
           </a:p>
           <a:p>
@@ -1808,7 +1787,7 @@
               <a:rPr>
                 <a:latin typeface="Times New Roman"/>
               </a:rPr>
-              <a:t>Be honest about the caveat at the bottom: the baseline is judged on unseen patients, while v2 and v4 use the same event-level split, so v2 versus v4 is a fair comparison and baseline versus the others is not perfectly like for like.</a:t>
+              <a:t>The winner was chosen by a rule fixed before running the experiments: accuracy at least 0.90, positive gap on both rare classes, then best worst-class recall. This avoids picking results after seeing them.</a:t>
             </a:r>
           </a:p>
         </p:txBody>
@@ -1881,7 +1860,7 @@
               <a:rPr>
                 <a:latin typeface="Times New Roman"/>
               </a:rPr>
-              <a:t>The models are built in PyTorch and scikit-learn, with MNE and HDF5 for handling EEG files.</a:t>
+              <a:t>We compare three models so the improvement is clear.</a:t>
             </a:r>
           </a:p>
           <a:p>
@@ -1889,7 +1868,7 @@
               <a:rPr>
                 <a:latin typeface="Times New Roman"/>
               </a:rPr>
-              <a:t>We also built a web app called NeuroScan. A user uploads a raw .edf EEG file. The app cuts it into 4-second windows, runs the detector, merges flagged windows into seizure events, then classifies each event using the v4 model. It shows the 18 channels like an oscilloscope with seizures highlighted and bars for the probability of each subtype.</a:t>
+              <a:t>1) 1D-CNN baseline: a plain convolutional network trained from scratch, tested leave-one-patient-out (every patient is held out in turn). This is the strictest test.</a:t>
             </a:r>
           </a:p>
           <a:p>
@@ -1897,7 +1876,23 @@
               <a:rPr>
                 <a:latin typeface="Times New Roman"/>
               </a:rPr>
-              <a:t>Backend is Flask and the plots use Plotly.js. This shows the model can be used end to end, not just in a notebook.</a:t>
+              <a:t>2) Fine-tuned CRNN (v2): our CRNN with Phase A weights fine-tuned, plus SMOTE.</a:t>
+            </a:r>
+          </a:p>
+          <a:p>
+            <a:r>
+              <a:rPr>
+                <a:latin typeface="Times New Roman"/>
+              </a:rPr>
+              <a:t>3) EEG-HDC v4 (proposed): two backbones, 256 numbers, SMOTE, HistGB.</a:t>
+            </a:r>
+          </a:p>
+          <a:p>
+            <a:r>
+              <a:rPr>
+                <a:latin typeface="Times New Roman"/>
+              </a:rPr>
+              <a:t>Be honest about the caveat at the bottom: the baseline is judged on unseen patients, while v2 and v4 use the same event-level split, so v2 versus v4 is a fair comparison and baseline versus the others is not perfectly like for like.</a:t>
             </a:r>
           </a:p>
         </p:txBody>
@@ -1970,7 +1965,7 @@
               <a:rPr>
                 <a:latin typeface="Times New Roman"/>
               </a:rPr>
-              <a:t>Left: the top graph shows how sensitivity (seizures found), specificity (non-seizures correctly ignored) and F1 change as we move the decision threshold. The best F1 is at 0.65. The bottom graph is the ROC curve; the closer to the top-left corner, the better. Area under it (AUROC) is 0.824; 0.5 would be guessing and 1.0 perfect.</a:t>
+              <a:t>The models are built in PyTorch and scikit-learn, with MNE and HDF5 for handling EEG files.</a:t>
             </a:r>
           </a:p>
           <a:p>
@@ -1978,7 +1973,7 @@
               <a:rPr>
                 <a:latin typeface="Times New Roman"/>
               </a:rPr>
-              <a:t>Right: the plain 1D-CNN gets AUROC 0.851 and the CRNN 0.824. They are about the same; the CRNN finds more seizures (sensitivity 0.605 versus 0.525) but raises more false alarms.</a:t>
+              <a:t>We also built a web app called NeuroScan. A user uploads a raw .edf EEG file. The app cuts it into 4-second windows, runs the detector, merges flagged windows into seizure events, then classifies each event using the v4 model. It shows the 18 channels like an oscilloscope with seizures highlighted and bars for the probability of each subtype.</a:t>
             </a:r>
           </a:p>
           <a:p>
@@ -1986,7 +1981,7 @@
               <a:rPr>
                 <a:latin typeface="Times New Roman"/>
               </a:rPr>
-              <a:t>Important: these are on patients never seen in training. Note this is the corrected value from the saved results. The paper draft had a different number.</a:t>
+              <a:t>Backend is Flask and the plots use Plotly.js. This shows the model can be used end to end, not just in a notebook.</a:t>
             </a:r>
           </a:p>
         </p:txBody>
@@ -2059,7 +2054,7 @@
               <a:rPr>
                 <a:latin typeface="Times New Roman"/>
               </a:rPr>
-              <a:t>These show how learning went epoch by epoch for the CRNN (top) and the plain CNN (bottom).</a:t>
+              <a:t>Left: the top graph shows how sensitivity (seizures found), specificity (non-seizures correctly ignored) and F1 change as we move the decision threshold. The best F1 is at 0.65. The bottom graph is the ROC curve; the closer to the top-left corner, the better. Area under it (AUROC) is 0.824; 0.5 would be guessing and 1.0 perfect.</a:t>
             </a:r>
           </a:p>
           <a:p>
@@ -2067,7 +2062,7 @@
               <a:rPr>
                 <a:latin typeface="Times New Roman"/>
               </a:rPr>
-              <a:t>Left panel: training loss keeps falling, validation loss does not. That tells us the model starts to memorise training data, so we keep the best checkpoint rather than the last one.</a:t>
+              <a:t>Right: the plain 1D-CNN gets AUROC 0.851 and the CRNN 0.824. They are about the same; the CRNN finds more seizures (sensitivity 0.605 versus 0.525) but raises more false alarms.</a:t>
             </a:r>
           </a:p>
           <a:p>
@@ -2075,15 +2070,7 @@
               <a:rPr>
                 <a:latin typeface="Times New Roman"/>
               </a:rPr>
-              <a:t>Middle: validation AUROC peaks around 0.83 and stays flat. Right: sensitivity, specificity and F1 jump around because the validation patients are few.</a:t>
-            </a:r>
-          </a:p>
-          <a:p>
-            <a:r>
-              <a:rPr>
-                <a:latin typeface="Times New Roman"/>
-              </a:rPr>
-              <a:t>Takeaway: more training does not help much; the limit is the data, not the training time.</a:t>
+              <a:t>Important: these are on patients never seen in training. Note this is the corrected value from the saved results. The paper draft had a different number.</a:t>
             </a:r>
           </a:p>
         </p:txBody>
@@ -2156,7 +2143,7 @@
               <a:rPr>
                 <a:latin typeface="Times New Roman"/>
               </a:rPr>
-              <a:t>This table is the experiment where we tried three classifiers with three SMOTE settings.</a:t>
+              <a:t>These show how learning went epoch by epoch for the CRNN (top) and the plain CNN (bottom).</a:t>
             </a:r>
           </a:p>
           <a:p>
@@ -2164,7 +2151,7 @@
               <a:rPr>
                 <a:latin typeface="Times New Roman"/>
               </a:rPr>
-              <a:t>Look at the Rec. FA column: MLP and Random Forest are 0.000, they never find Focal Aware. Look at the last two columns, the control gaps: Random Forest is strongly negative, a sign it is mostly recognising the patient.</a:t>
+              <a:t>Left panel: training loss keeps falling, validation loss does not. That tells us the model starts to memorise training data, so we keep the best checkpoint rather than the last one.</a:t>
             </a:r>
           </a:p>
           <a:p>
@@ -2172,7 +2159,7 @@
               <a:rPr>
                 <a:latin typeface="Times New Roman"/>
               </a:rPr>
-              <a:t>Only the highlighted row, HistGB with 3x FA and 5x FBTC oversampling, meets all rules: accuracy 0.911, macro-F1 0.612, FA recall 0.25, FBTC recall 0.514, and positive gaps for both.</a:t>
+              <a:t>Middle: validation AUROC peaks around 0.83 and stays flat. Right: sensitivity, specificity and F1 jump around because the validation patients are few.</a:t>
             </a:r>
           </a:p>
           <a:p>
@@ -2180,7 +2167,7 @@
               <a:rPr>
                 <a:latin typeface="Times New Roman"/>
               </a:rPr>
-              <a:t>Also mention: the nearby HistGB 5x/5x has higher FBTC recall but negative FA gap, so it was rejected by our rule.</a:t>
+              <a:t>Takeaway: more training does not help much; the limit is the data, not the training time.</a:t>
             </a:r>
           </a:p>
         </p:txBody>
@@ -2253,7 +2240,7 @@
               <a:rPr>
                 <a:latin typeface="Times New Roman"/>
               </a:rPr>
-              <a:t>How to read a confusion matrix: rows are the true class, columns are what the model predicted; the diagonal is correct.</a:t>
+              <a:t>This table is the experiment where we tried three classifiers with three SMOTE settings.</a:t>
             </a:r>
           </a:p>
           <a:p>
@@ -2261,7 +2248,7 @@
               <a:rPr>
                 <a:latin typeface="Times New Roman"/>
               </a:rPr>
-              <a:t>Left (real seizures): almost everything is predicted as Focal Impaired Awareness. 1,637 FIA are right, but all 45 Focal Aware and all 124 FBTC windows are wrong.</a:t>
+              <a:t>Look at the Rec. FA column: MLP and Random Forest are 0.000, they never find Focal Aware. Look at the last two columns, the control gaps: Random Forest is strongly negative, a sign it is mostly recognising the patient.</a:t>
             </a:r>
           </a:p>
           <a:p>
@@ -2269,7 +2256,7 @@
               <a:rPr>
                 <a:latin typeface="Times New Roman"/>
               </a:rPr>
-              <a:t>Right is the control test (normal EEG with fake labels); it behaves the same way.</a:t>
+              <a:t>Only the highlighted row, HistGB with 3x FA and 5x FBTC oversampling, meets all rules: accuracy 0.911, macro-F1 0.612, FA recall 0.25, FBTC recall 0.514, and positive gaps for both.</a:t>
             </a:r>
           </a:p>
           <a:p>
@@ -2277,7 +2264,7 @@
               <a:rPr>
                 <a:latin typeface="Times New Roman"/>
               </a:rPr>
-              <a:t>Accuracy is 0.897 but only because the majority class dominates. This model has effectively learned to say FIA every time. That is exactly the problem we set out to fix.</a:t>
+              <a:t>Also mention: the nearby HistGB 5x/5x has higher FBTC recall but negative FA gap, so it was rejected by our rule.</a:t>
             </a:r>
           </a:p>
         </p:txBody>
@@ -2350,7 +2337,7 @@
               <a:rPr>
                 <a:latin typeface="Times New Roman"/>
               </a:rPr>
-              <a:t>Here we test on 550 windows. Fine-tuning helps FBTC: 17 of 37 are now correct (45.9%).</a:t>
+              <a:t>How to read a confusion matrix: rows are the true class, columns are what the model predicted; the diagonal is correct.</a:t>
             </a:r>
           </a:p>
           <a:p>
@@ -2358,7 +2345,7 @@
               <a:rPr>
                 <a:latin typeface="Times New Roman"/>
               </a:rPr>
-              <a:t>Focal Aware is still missed completely: 0 of 16.</a:t>
+              <a:t>Left (real seizures): almost everything is predicted as Focal Impaired Awareness. 1,637 FIA are right, but all 45 Focal Aware and all 124 FBTC windows are wrong.</a:t>
             </a:r>
           </a:p>
           <a:p>
@@ -2366,7 +2353,15 @@
               <a:rPr>
                 <a:latin typeface="Times New Roman"/>
               </a:rPr>
-              <a:t>Look at the control matrix on the right: FBTC is found only 8 of 45 times on the fake-labelled data, so the FBTC detection is real, not patient recognition. Good sign, but Focal Aware is still invisible to this model.</a:t>
+              <a:t>Right is the control test (normal EEG with fake labels); it behaves the same way.</a:t>
+            </a:r>
+          </a:p>
+          <a:p>
+            <a:r>
+              <a:rPr>
+                <a:latin typeface="Times New Roman"/>
+              </a:rPr>
+              <a:t>Accuracy is 0.897 but only because the majority class dominates. This model has effectively learned to say FIA every time. That is exactly the problem we set out to fix.</a:t>
             </a:r>
           </a:p>
         </p:txBody>
@@ -2439,7 +2434,7 @@
               <a:rPr>
                 <a:latin typeface="Times New Roman"/>
               </a:rPr>
-              <a:t>This is our best model, same 550 test windows.</a:t>
+              <a:t>Here we test on 550 windows. Fine-tuning helps FBTC: 17 of 37 are now correct (45.9%).</a:t>
             </a:r>
           </a:p>
           <a:p>
@@ -2447,7 +2442,7 @@
               <a:rPr>
                 <a:latin typeface="Times New Roman"/>
               </a:rPr>
-              <a:t>Focal Aware: 4 of 16 correct (25%). Focal Impaired Awareness: 478 of 497 (96.2%). FBTC: 19 of 37 (51.4%).</a:t>
+              <a:t>Focal Aware is still missed completely: 0 of 16.</a:t>
             </a:r>
           </a:p>
           <a:p>
@@ -2455,23 +2450,7 @@
               <a:rPr>
                 <a:latin typeface="Times New Roman"/>
               </a:rPr>
-              <a:t>It is the only model that finds all three types.</a:t>
-            </a:r>
-          </a:p>
-          <a:p>
-            <a:r>
-              <a:rPr>
-                <a:latin typeface="Times New Roman"/>
-              </a:rPr>
-              <a:t>Right side, the control: on fake-labelled normal EEG the model finds FA only 6 of 45 times and FBTC 20 of 45 times, lower than on real seizures, so the model is responding to real seizure patterns. The gaps are +0.117 for FA and +0.069 for FBTC.</a:t>
-            </a:r>
-          </a:p>
-          <a:p>
-            <a:r>
-              <a:rPr>
-                <a:latin typeface="Times New Roman"/>
-              </a:rPr>
-              <a:t>Be honest that 4 out of 16 is small numbers and the improvement on FA is modest but real.</a:t>
+              <a:t>Look at the control matrix on the right: FBTC is found only 8 of 45 times on the fake-labelled data, so the FBTC detection is real, not patient recognition. Good sign, but Focal Aware is still invisible to this model.</a:t>
             </a:r>
           </a:p>
         </p:txBody>
@@ -2544,7 +2523,7 @@
               <a:rPr>
                 <a:latin typeface="Times New Roman"/>
               </a:rPr>
-              <a:t>Recall means: of the windows that truly belong to a class, what fraction did we find.</a:t>
+              <a:t>This is our best model, same 550 test windows.</a:t>
             </a:r>
           </a:p>
           <a:p>
@@ -2552,7 +2531,7 @@
               <a:rPr>
                 <a:latin typeface="Times New Roman"/>
               </a:rPr>
-              <a:t>The bars show the three models side by side. All find nearly all FIA (the common class). For Focal Aware only v4 has a bar (0.25). For FBTC, v2 gets 0.46 and v4 gets 0.51; the baseline gets 0.</a:t>
+              <a:t>Focal Aware: 4 of 16 correct (25%). Focal Impaired Awareness: 478 of 497 (96.2%). FBTC: 19 of 37 (51.4%).</a:t>
             </a:r>
           </a:p>
           <a:p>
@@ -2560,7 +2539,23 @@
               <a:rPr>
                 <a:latin typeface="Times New Roman"/>
               </a:rPr>
-              <a:t>The cost of this gain is tiny: FIA recall goes from 0.99 to 0.96. We trade a little on the majority class to gain on rare classes, which is what a doctor wants.</a:t>
+              <a:t>It is the only model that finds all three types.</a:t>
+            </a:r>
+          </a:p>
+          <a:p>
+            <a:r>
+              <a:rPr>
+                <a:latin typeface="Times New Roman"/>
+              </a:rPr>
+              <a:t>Right side, the control: on fake-labelled normal EEG the model finds FA only 6 of 45 times and FBTC 20 of 45 times, lower than on real seizures, so the model is responding to real seizure patterns. The gaps are +0.117 for FA and +0.069 for FBTC.</a:t>
+            </a:r>
+          </a:p>
+          <a:p>
+            <a:r>
+              <a:rPr>
+                <a:latin typeface="Times New Roman"/>
+              </a:rPr>
+              <a:t>Be honest that 4 out of 16 is small numbers and the improvement on FA is modest but real.</a:t>
             </a:r>
           </a:p>
         </p:txBody>
@@ -2633,7 +2628,7 @@
               <a:rPr>
                 <a:latin typeface="Times New Roman"/>
               </a:rPr>
-              <a:t>Summary table of the three models. Real columns are on genuine seizures; control columns are on the fake-labelled normal EEG.</a:t>
+              <a:t>Recall means: of the windows that truly belong to a class, what fraction did we find.</a:t>
             </a:r>
           </a:p>
           <a:p>
@@ -2641,7 +2636,7 @@
               <a:rPr>
                 <a:latin typeface="Times New Roman"/>
               </a:rPr>
-              <a:t>Real accuracy is about the same (0.90 to 0.91), so accuracy alone hides the difference. Macro-F1, which averages the three classes equally, goes from 0.315 to 0.526 to 0.612.</a:t>
+              <a:t>The bars show the three models side by side. All find nearly all FIA (the common class). For Focal Aware only v4 has a bar (0.25). For FBTC, v2 gets 0.46 and v4 gets 0.51; the baseline gets 0.</a:t>
             </a:r>
           </a:p>
           <a:p>
@@ -2649,7 +2644,7 @@
               <a:rPr>
                 <a:latin typeface="Times New Roman"/>
               </a:rPr>
-              <a:t>Gap columns: v4 is the only model with positive gaps on both rare classes. v2 has a bigger FBTC gap but no Focal Aware signal at all, so it cannot be called a three-class solution.</a:t>
+              <a:t>The cost of this gain is tiny: FIA recall goes from 0.99 to 0.96. We trade a little on the majority class to gain on rare classes, which is what a doctor wants.</a:t>
             </a:r>
           </a:p>
         </p:txBody>
@@ -2679,13 +2674,7 @@
   <p:cSld>
     <p:spTree>
       <p:nvGrpSpPr>
-        <p:cNvPr id="1" name="">
-          <a:extLst>
-            <a:ext uri="{FF2B5EF4-FFF2-40B4-BE49-F238E27FC236}">
-              <a16:creationId xmlns:a16="http://schemas.microsoft.com/office/drawing/2014/main" id="{2A41686C-7A71-3CEC-2C10-2FA499D70E68}"/>
-            </a:ext>
-          </a:extLst>
-        </p:cNvPr>
+        <p:cNvPr id="1" name=""/>
         <p:cNvGrpSpPr/>
         <p:nvPr/>
       </p:nvGrpSpPr>
@@ -2699,13 +2688,7 @@
       </p:grpSpPr>
       <p:sp>
         <p:nvSpPr>
-          <p:cNvPr id="2" name="Slide Image Placeholder 1">
-            <a:extLst>
-              <a:ext uri="{FF2B5EF4-FFF2-40B4-BE49-F238E27FC236}">
-                <a16:creationId xmlns:a16="http://schemas.microsoft.com/office/drawing/2014/main" id="{42EBF7C2-FCD8-0A67-B8A5-B547830BDCA5}"/>
-              </a:ext>
-            </a:extLst>
-          </p:cNvPr>
+          <p:cNvPr id="2" name="Slide Image Placeholder 1"/>
           <p:cNvSpPr>
             <a:spLocks noGrp="1" noRot="1" noChangeAspect="1"/>
           </p:cNvSpPr>
@@ -2724,13 +2707,7 @@
       </p:sp>
       <p:sp>
         <p:nvSpPr>
-          <p:cNvPr id="3" name="Notes Placeholder 2">
-            <a:extLst>
-              <a:ext uri="{FF2B5EF4-FFF2-40B4-BE49-F238E27FC236}">
-                <a16:creationId xmlns:a16="http://schemas.microsoft.com/office/drawing/2014/main" id="{187762C0-E27A-1E9B-0EBC-2FF1DCE99DE9}"/>
-              </a:ext>
-            </a:extLst>
-          </p:cNvPr>
+          <p:cNvPr id="3" name="Notes Placeholder 2"/>
           <p:cNvSpPr>
             <a:spLocks noGrp="1"/>
           </p:cNvSpPr>
@@ -2762,13 +2739,7 @@
       </p:sp>
       <p:sp>
         <p:nvSpPr>
-          <p:cNvPr id="4" name="Slide Number Placeholder 3">
-            <a:extLst>
-              <a:ext uri="{FF2B5EF4-FFF2-40B4-BE49-F238E27FC236}">
-                <a16:creationId xmlns:a16="http://schemas.microsoft.com/office/drawing/2014/main" id="{D3895A32-7A02-3549-F799-7F83289EBCB1}"/>
-              </a:ext>
-            </a:extLst>
-          </p:cNvPr>
+          <p:cNvPr id="4" name="Slide Number Placeholder 3"/>
           <p:cNvSpPr>
             <a:spLocks noGrp="1"/>
           </p:cNvSpPr>
@@ -2784,7 +2755,7 @@
             <a:fld id="{651B559A-E338-4F75-A573-9861E0BAC220}" type="slidenum">
               <a:rPr lang="en-IN" smtClean="0"/>
               <a:pPr/>
-              <a:t>16</a:t>
+              <a:t>3</a:t>
             </a:fld>
             <a:endParaRPr lang="en-IN" dirty="0"/>
           </a:p>
@@ -2793,7 +2764,7 @@
     </p:spTree>
     <p:extLst>
       <p:ext uri="{BB962C8B-B14F-4D97-AF65-F5344CB8AC3E}">
-        <p14:creationId xmlns:p14="http://schemas.microsoft.com/office/powerpoint/2010/main" val="2471180547"/>
+        <p14:creationId xmlns:p14="http://schemas.microsoft.com/office/powerpoint/2010/main" val="2621492100"/>
       </p:ext>
     </p:extLst>
   </p:cSld>
@@ -2851,7 +2822,7 @@
               <a:rPr>
                 <a:latin typeface="Times New Roman"/>
               </a:rPr>
-              <a:t>Gap equals recall on real seizures minus recall on the control. Positive is good.</a:t>
+              <a:t>Summary table of the three models. Real columns are on genuine seizures; control columns are on the fake-labelled normal EEG.</a:t>
             </a:r>
           </a:p>
           <a:p>
@@ -2859,7 +2830,7 @@
               <a:rPr>
                 <a:latin typeface="Times New Roman"/>
               </a:rPr>
-              <a:t>Random Forest is negative on both (minus 0.49 and minus 0.20): it did better on fake-labelled normal EEG than on real seizures, meaning it was recognising patients.</a:t>
+              <a:t>Real accuracy is about the same (0.90 to 0.91), so accuracy alone hides the difference. Macro-F1, which averages the three classes equally, goes from 0.315 to 0.526 to 0.612.</a:t>
             </a:r>
           </a:p>
           <a:p>
@@ -2867,15 +2838,7 @@
               <a:rPr>
                 <a:latin typeface="Times New Roman"/>
               </a:rPr>
-              <a:t>MLP has gap zero on Focal Aware simply because it never predicts that class.</a:t>
-            </a:r>
-          </a:p>
-          <a:p>
-            <a:r>
-              <a:rPr>
-                <a:latin typeface="Times New Roman"/>
-              </a:rPr>
-              <a:t>HistGB, our model, is positive on both. This chart is our evidence that the final model is not cheating.</a:t>
+              <a:t>Gap columns: v4 is the only model with positive gaps on both rare classes. v2 has a bigger FBTC gap but no Focal Aware signal at all, so it cannot be called a three-class solution.</a:t>
             </a:r>
           </a:p>
         </p:txBody>
@@ -2948,7 +2911,7 @@
               <a:rPr>
                 <a:latin typeface="Times New Roman"/>
               </a:rPr>
-              <a:t>This shows how the idea developed. Grey bars are accuracy, red bars are macro-F1.</a:t>
+              <a:t>Gap equals recall on real seizures minus recall on the control. Positive is good.</a:t>
             </a:r>
           </a:p>
           <a:p>
@@ -2956,7 +2919,7 @@
               <a:rPr>
                 <a:latin typeface="Times New Roman"/>
               </a:rPr>
-              <a:t>Baseline: accuracy 0.90, macro-F1 0.32. v1 (SMOTE on embeddings): finds Focal Aware (13 of 16) but no FBTC. v2 (fine-tuned): finds FBTC but loses FA. v3 (frozen detector only, SVM): finds FA but accuracy collapses to 0.57. v4 (both backbones): best macro-F1, 0.612, with accuracy 0.91.</a:t>
+              <a:t>Random Forest is negative on both (minus 0.49 and minus 0.20): it did better on fake-labelled normal EEG than on real seizures, meaning it was recognising patients.</a:t>
             </a:r>
           </a:p>
           <a:p>
@@ -2964,7 +2927,15 @@
               <a:rPr>
                 <a:latin typeface="Times New Roman"/>
               </a:rPr>
-              <a:t>Message: each version fixed one weakness and exposed another; combining the two views solved both.</a:t>
+              <a:t>MLP has gap zero on Focal Aware simply because it never predicts that class.</a:t>
+            </a:r>
+          </a:p>
+          <a:p>
+            <a:r>
+              <a:rPr>
+                <a:latin typeface="Times New Roman"/>
+              </a:rPr>
+              <a:t>HistGB, our model, is positive on both. This chart is our evidence that the final model is not cheating.</a:t>
             </a:r>
           </a:p>
         </p:txBody>
@@ -3037,7 +3008,7 @@
               <a:rPr>
                 <a:latin typeface="Times New Roman"/>
               </a:rPr>
-              <a:t>This is an earlier test of the full detect-then-classify pipeline using the two plain CNNs, to check that chaining the stages works.</a:t>
+              <a:t>This shows how the idea developed. Grey bars are accuracy, red bars are macro-F1.</a:t>
             </a:r>
           </a:p>
           <a:p>
@@ -3045,7 +3016,7 @@
               <a:rPr>
                 <a:latin typeface="Times New Roman"/>
               </a:rPr>
-              <a:t>Strict means only the 2 patients that neither stage saw in training: everything was correct, but that is only 4 events, so it is not statistically strong.</a:t>
+              <a:t>Baseline: accuracy 0.90, macro-F1 0.32. v1 (SMOTE on embeddings): finds Focal Aware (13 of 16) but no FBTC. v2 (fine-tuned): finds FBTC but loses FA. v3 (frozen detector only, SVM): finds FA but accuracy collapses to 0.57. v4 (both backbones): best macro-F1, 0.612, with accuracy 0.91.</a:t>
             </a:r>
           </a:p>
           <a:p>
@@ -3053,15 +3024,7 @@
               <a:rPr>
                 <a:latin typeface="Times New Roman"/>
               </a:rPr>
-              <a:t>Broad uses all 13 patients (46 events): 95.7% of seizures detected, 74.4% of those correctly classified, so 69.6% correct end to end. This number is optimistic for the detection part because most patients were in its training data.</a:t>
-            </a:r>
-          </a:p>
-          <a:p>
-            <a:r>
-              <a:rPr>
-                <a:latin typeface="Times New Roman"/>
-              </a:rPr>
-              <a:t>It shows the two-stage design works in principle.</a:t>
+              <a:t>Message: each version fixed one weakness and exposed another; combining the two views solved both.</a:t>
             </a:r>
           </a:p>
         </p:txBody>
@@ -3134,7 +3097,7 @@
               <a:rPr>
                 <a:latin typeface="Times New Roman"/>
               </a:rPr>
-              <a:t>Be upfront about limits.</a:t>
+              <a:t>This is an earlier test of the full detect-then-classify pipeline using the two plain CNNs, to check that chaining the stages works.</a:t>
             </a:r>
           </a:p>
           <a:p>
@@ -3142,7 +3105,7 @@
               <a:rPr>
                 <a:latin typeface="Times New Roman"/>
               </a:rPr>
-              <a:t>Data: Focal Aware and FBTC come from one patient each; our FA test has 16 windows, so 4 correct is a small sample.</a:t>
+              <a:t>Strict means only the 2 patients that neither stage saw in training: everything was correct, but that is only 4 events, so it is not statistically strong.</a:t>
             </a:r>
           </a:p>
           <a:p>
@@ -3150,7 +3113,7 @@
               <a:rPr>
                 <a:latin typeface="Times New Roman"/>
               </a:rPr>
-              <a:t>Evaluation: v2 and v4 split by seizure event, so the same patient appears in both training and testing. That is easier than testing on brand-new patients.</a:t>
+              <a:t>Broad uses all 13 patients (46 events): 95.7% of seizures detected, 74.4% of those correctly classified, so 69.6% correct end to end. This number is optimistic for the detection part because most patients were in its training data.</a:t>
             </a:r>
           </a:p>
           <a:p>
@@ -3158,23 +3121,7 @@
               <a:rPr>
                 <a:latin typeface="Times New Roman"/>
               </a:rPr>
-              <a:t>Detection is moderate (AUROC 0.824) and works window by window without smoothing.</a:t>
-            </a:r>
-          </a:p>
-          <a:p>
-            <a:r>
-              <a:rPr>
-                <a:latin typeface="Times New Roman"/>
-              </a:rPr>
-              <a:t>Clinically, 25% and 51% recall are not sufficient yet. Only three focal subtypes are covered.</a:t>
-            </a:r>
-          </a:p>
-          <a:p>
-            <a:r>
-              <a:rPr>
-                <a:latin typeface="Times New Roman"/>
-              </a:rPr>
-              <a:t>Future: add more patients and datasets (for example TUSZ), evaluate on unseen patients, add rarer seizure types, smooth predictions over time and deploy in real time.</a:t>
+              <a:t>It shows the two-stage design works in principle.</a:t>
             </a:r>
           </a:p>
         </p:txBody>
@@ -3247,7 +3194,7 @@
               <a:rPr>
                 <a:latin typeface="Times New Roman"/>
               </a:rPr>
-              <a:t>To wrap up. We built EEG-HDC v4, a two-stage system: detect seizures, then classify the type.</a:t>
+              <a:t>Be upfront about limits.</a:t>
             </a:r>
           </a:p>
           <a:p>
@@ -3255,7 +3202,7 @@
               <a:rPr>
                 <a:latin typeface="Times New Roman"/>
               </a:rPr>
-              <a:t>The new ideas: use two backbones (one frozen, one fine-tuned) and join their outputs into 256 numbers; balance rare classes with SMOTE in that feature space; verify with an adversarial control that the model is not just recognising patients.</a:t>
+              <a:t>Data: Focal Aware and FBTC come from one patient each; our FA test has 16 windows, so 4 correct is a small sample.</a:t>
             </a:r>
           </a:p>
           <a:p>
@@ -3263,7 +3210,7 @@
               <a:rPr>
                 <a:latin typeface="Times New Roman"/>
               </a:rPr>
-              <a:t>Results: accuracy 0.911 and macro-F1 0.612, up from 0.315 for the baseline, with recall of 25% for Focal Aware, 96.2% for FIA and 51.4% for FBTC, and it is the only model that finds all three.</a:t>
+              <a:t>Evaluation: v2 and v4 split by seizure event, so the same patient appears in both training and testing. That is easier than testing on brand-new patients.</a:t>
             </a:r>
           </a:p>
           <a:p>
@@ -3271,7 +3218,23 @@
               <a:rPr>
                 <a:latin typeface="Times New Roman"/>
               </a:rPr>
-              <a:t>It is a solid step, limited mainly by the amount of labelled data.</a:t>
+              <a:t>Detection is moderate (AUROC 0.824) and works window by window without smoothing.</a:t>
+            </a:r>
+          </a:p>
+          <a:p>
+            <a:r>
+              <a:rPr>
+                <a:latin typeface="Times New Roman"/>
+              </a:rPr>
+              <a:t>Clinically, 25% and 51% recall are not sufficient yet. Only three focal subtypes are covered.</a:t>
+            </a:r>
+          </a:p>
+          <a:p>
+            <a:r>
+              <a:rPr>
+                <a:latin typeface="Times New Roman"/>
+              </a:rPr>
+              <a:t>Future: add more patients and datasets (for example TUSZ), evaluate on unseen patients, add rarer seizure types, smooth predictions over time and deploy in real time.</a:t>
             </a:r>
           </a:p>
         </p:txBody>
@@ -3344,7 +3307,31 @@
               <a:rPr>
                 <a:latin typeface="Times New Roman"/>
               </a:rPr>
-              <a:t>References in IEEE format. They include the 45 papers from the literature survey, plus the datasets (Siena and CHB-MIT), the ILAE seizure classification, ChronoNet and the shortcut-learning paper that our methodology builds on. No need to read these out.</a:t>
+              <a:t>To wrap up. We built EEG-HDC v4, a two-stage system: detect seizures, then classify the type.</a:t>
+            </a:r>
+          </a:p>
+          <a:p>
+            <a:r>
+              <a:rPr>
+                <a:latin typeface="Times New Roman"/>
+              </a:rPr>
+              <a:t>The new ideas: use two backbones (one frozen, one fine-tuned) and join their outputs into 256 numbers; balance rare classes with SMOTE in that feature space; verify with an adversarial control that the model is not just recognising patients.</a:t>
+            </a:r>
+          </a:p>
+          <a:p>
+            <a:r>
+              <a:rPr>
+                <a:latin typeface="Times New Roman"/>
+              </a:rPr>
+              <a:t>Results: accuracy 0.911 and macro-F1 0.612, up from 0.315 for the baseline, with recall of 25% for Focal Aware, 96.2% for FIA and 51.4% for FBTC, and it is the only model that finds all three.</a:t>
+            </a:r>
+          </a:p>
+          <a:p>
+            <a:r>
+              <a:rPr>
+                <a:latin typeface="Times New Roman"/>
+              </a:rPr>
+              <a:t>It is a solid step, limited mainly by the amount of labelled data.</a:t>
             </a:r>
           </a:p>
         </p:txBody>
@@ -3685,7 +3672,7 @@
             <a:spLocks noGrp="1" noRot="1" noChangeAspect="1"/>
           </p:cNvSpPr>
           <p:nvPr>
-            <p:ph type="sldImg" idx="2"/>
+            <p:ph type="sldImg"/>
           </p:nvPr>
         </p:nvSpPr>
         <p:spPr/>
@@ -3697,7 +3684,7 @@
             <a:spLocks noGrp="1"/>
           </p:cNvSpPr>
           <p:nvPr>
-            <p:ph type="body" sz="quarter" idx="3"/>
+            <p:ph type="body" idx="1"/>
           </p:nvPr>
         </p:nvSpPr>
         <p:spPr/>
@@ -3705,36 +3692,7 @@
           <a:bodyPr/>
           <a:lstStyle/>
           <a:p>
-            <a:r>
-              <a:rPr>
-                <a:latin typeface="Times New Roman"/>
-              </a:rPr>
-              <a:t>Our system works in two stages, like a doctor's workflow. First comes data preparation: we take raw EEG from two public datasets (CHB-MIT and Siena), put them in the same 18-channel layout, clean them and cut them into short windows.</a:t>
-            </a:r>
-          </a:p>
-          <a:p>
-            <a:r>
-              <a:rPr>
-                <a:latin typeface="Times New Roman"/>
-              </a:rPr>
-              <a:t>Stage 1 asks one simple question: is this window a seizure or not? We use a CRNN (a neural network with three parts: conv layers, an LSTM and attention) to get a seizure probability, and a threshold of 0.65 to turn it into yes/no.</a:t>
-            </a:r>
-          </a:p>
-          <a:p>
-            <a:r>
-              <a:rPr>
-                <a:latin typeface="Times New Roman"/>
-              </a:rPr>
-              <a:t>Only the windows flagged as seizure go to Stage 2. Stage 2 asks: which type? We use two copies of the network, one frozen and one fine-tuned, join their outputs into 256 numbers, balance the rare classes with SMOTE and let a HistGB classifier choose between Focal Aware, Focal Impaired Awareness and FBTC.</a:t>
-            </a:r>
-          </a:p>
-          <a:p>
-            <a:r>
-              <a:rPr>
-                <a:latin typeface="Times New Roman"/>
-              </a:rPr>
-              <a:t>Key message: detect first, then classify.</a:t>
-            </a:r>
+            <a:endParaRPr lang="en-IN" dirty="0"/>
           </a:p>
         </p:txBody>
       </p:sp>
@@ -3749,8 +3707,25 @@
           </p:nvPr>
         </p:nvSpPr>
         <p:spPr/>
+        <p:txBody>
+          <a:bodyPr/>
+          <a:lstStyle/>
+          <a:p>
+            <a:fld id="{651B559A-E338-4F75-A573-9861E0BAC220}" type="slidenum">
+              <a:rPr lang="en-IN" smtClean="0"/>
+              <a:pPr/>
+              <a:t>15</a:t>
+            </a:fld>
+            <a:endParaRPr lang="en-IN" dirty="0"/>
+          </a:p>
+        </p:txBody>
       </p:sp>
     </p:spTree>
+    <p:extLst>
+      <p:ext uri="{BB962C8B-B14F-4D97-AF65-F5344CB8AC3E}">
+        <p14:creationId xmlns:p14="http://schemas.microsoft.com/office/powerpoint/2010/main" val="1571009748"/>
+      </p:ext>
+    </p:extLst>
   </p:cSld>
   <p:clrMapOvr>
     <a:masterClrMapping/>
@@ -4123,6 +4098,79 @@
 </p:notes>
 </file>
 
+<file path=ppt/notesSlides/notesSlide35.xml><?xml version="1.0" encoding="utf-8"?>
+<p:notes xmlns:a="http://schemas.openxmlformats.org/drawingml/2006/main" xmlns:r="http://schemas.openxmlformats.org/officeDocument/2006/relationships" xmlns:p="http://schemas.openxmlformats.org/presentationml/2006/main">
+  <p:cSld>
+    <p:spTree>
+      <p:nvGrpSpPr>
+        <p:cNvPr id="1" name=""/>
+        <p:cNvGrpSpPr/>
+        <p:nvPr/>
+      </p:nvGrpSpPr>
+      <p:grpSpPr>
+        <a:xfrm>
+          <a:off x="0" y="0"/>
+          <a:ext cx="0" cy="0"/>
+          <a:chOff x="0" y="0"/>
+          <a:chExt cx="0" cy="0"/>
+        </a:xfrm>
+      </p:grpSpPr>
+      <p:sp>
+        <p:nvSpPr>
+          <p:cNvPr id="2" name="Slide Image Placeholder 1"/>
+          <p:cNvSpPr>
+            <a:spLocks noGrp="1" noRot="1" noChangeAspect="1"/>
+          </p:cNvSpPr>
+          <p:nvPr>
+            <p:ph type="sldImg" idx="2"/>
+          </p:nvPr>
+        </p:nvSpPr>
+        <p:spPr/>
+      </p:sp>
+      <p:sp>
+        <p:nvSpPr>
+          <p:cNvPr id="3" name="Notes Placeholder 2"/>
+          <p:cNvSpPr>
+            <a:spLocks noGrp="1"/>
+          </p:cNvSpPr>
+          <p:nvPr>
+            <p:ph type="body" sz="quarter" idx="3"/>
+          </p:nvPr>
+        </p:nvSpPr>
+        <p:spPr/>
+        <p:txBody>
+          <a:bodyPr/>
+          <a:lstStyle/>
+          <a:p>
+            <a:r>
+              <a:rPr>
+                <a:latin typeface="Times New Roman"/>
+              </a:rPr>
+              <a:t>References in IEEE format. They include the 45 papers from the literature survey, plus the datasets (Siena and CHB-MIT), the ILAE seizure classification, ChronoNet and the shortcut-learning paper that our methodology builds on. No need to read these out.</a:t>
+            </a:r>
+          </a:p>
+        </p:txBody>
+      </p:sp>
+      <p:sp>
+        <p:nvSpPr>
+          <p:cNvPr id="4" name="Slide Number Placeholder 3"/>
+          <p:cNvSpPr>
+            <a:spLocks noGrp="1"/>
+          </p:cNvSpPr>
+          <p:nvPr>
+            <p:ph type="sldNum" sz="quarter" idx="5"/>
+          </p:nvPr>
+        </p:nvSpPr>
+        <p:spPr/>
+      </p:sp>
+    </p:spTree>
+  </p:cSld>
+  <p:clrMapOvr>
+    <a:masterClrMapping/>
+  </p:clrMapOvr>
+</p:notes>
+</file>
+
 <file path=ppt/notesSlides/notesSlide4.xml><?xml version="1.0" encoding="utf-8"?>
 <p:notes xmlns:a="http://schemas.openxmlformats.org/drawingml/2006/main" xmlns:r="http://schemas.openxmlformats.org/officeDocument/2006/relationships" xmlns:p="http://schemas.openxmlformats.org/presentationml/2006/main">
   <p:cSld>
@@ -4171,7 +4219,7 @@
               <a:rPr>
                 <a:latin typeface="Times New Roman"/>
               </a:rPr>
-              <a:t>We use two public EEG datasets from PhysioNet. CHB-MIT has 24 children and only says seizure or not. Siena has 14 adults (13 usable) and, importantly, gives the seizure type, so subtype learning can only use Siena.</a:t>
+              <a:t>Our system works in two stages, like a doctor's workflow. First comes data preparation: we take raw EEG from two public datasets (CHB-MIT and Siena), put them in the same 18-channel layout, clean them and cut them into short windows.</a:t>
             </a:r>
           </a:p>
           <a:p>
@@ -4179,7 +4227,7 @@
               <a:rPr>
                 <a:latin typeface="Times New Roman"/>
               </a:rPr>
-              <a:t>Stage 1 uses both datasets: 928,154 windows of 4 seconds. Stage 2 uses Siena seizure windows only: 1,824 windows of 10 seconds.</a:t>
+              <a:t>Stage 1 asks one simple question: is this window a seizure or not? We use a CRNN (a neural network with three parts: conv layers, an LSTM and attention) to get a seizure probability, and a threshold of 0.65 to turn it into yes/no.</a:t>
             </a:r>
           </a:p>
           <a:p>
@@ -4187,7 +4235,7 @@
               <a:rPr>
                 <a:latin typeface="Times New Roman"/>
               </a:rPr>
-              <a:t>Point out the imbalance: 11 of 13 patients have Focal Impaired Awareness; Focal Aware and FBTC each come from just one patient. That is why this problem is hard.</a:t>
+              <a:t>Only the windows flagged as seizure go to Stage 2. Stage 2 asks: which type? We use two copies of the network, one frozen and one fine-tuned, join their outputs into 256 numbers, balance the rare classes with SMOTE and let a HistGB classifier choose between Focal Aware, Focal Impaired Awareness and FBTC.</a:t>
             </a:r>
           </a:p>
           <a:p>
@@ -4195,7 +4243,7 @@
               <a:rPr>
                 <a:latin typeface="Times New Roman"/>
               </a:rPr>
-              <a:t>The test set for subtype has 550 windows: 16 FA, 497 FIA and 37 FBTC.</a:t>
+              <a:t>Key message: detect first, then classify.</a:t>
             </a:r>
           </a:p>
         </p:txBody>
@@ -4268,7 +4316,7 @@
               <a:rPr>
                 <a:latin typeface="Times New Roman"/>
               </a:rPr>
-              <a:t>Raw EEG from different hospitals is messy and different, so we standardise it.</a:t>
+              <a:t>We use two public EEG datasets from PhysioNet. CHB-MIT has 24 children and only says seizure or not. Siena has 14 adults (13 usable) and, importantly, gives the seizure type, so subtype learning can only use Siena.</a:t>
             </a:r>
           </a:p>
           <a:p>
@@ -4276,7 +4324,7 @@
               <a:rPr>
                 <a:latin typeface="Times New Roman"/>
               </a:rPr>
-              <a:t>Montage: both datasets are converted to the same 18-channel layout (the double-banana, each channel is the voltage difference between two neighbouring electrodes) in a fixed order.</a:t>
+              <a:t>Stage 1 uses both datasets: 928,154 windows of 4 seconds. Stage 2 uses Siena seizure windows only: 1,824 windows of 10 seconds.</a:t>
             </a:r>
           </a:p>
           <a:p>
@@ -4284,7 +4332,7 @@
               <a:rPr>
                 <a:latin typeface="Times New Roman"/>
               </a:rPr>
-              <a:t>Filtering: remove power-line hum (60 Hz for CHB-MIT, 50 Hz for Siena), then keep only 0.5 to 45 Hz, where brain activity lives. We use a zero-phase filter so the timing of the seizure is not shifted.</a:t>
+              <a:t>Point out the imbalance: 11 of 13 patients have Focal Impaired Awareness; Focal Aware and FBTC each come from just one patient. That is why this problem is hard.</a:t>
             </a:r>
           </a:p>
           <a:p>
@@ -4292,23 +4340,7 @@
               <a:rPr>
                 <a:latin typeface="Times New Roman"/>
               </a:rPr>
-              <a:t>Resampling: Siena is 512 Hz, we bring it to 256 Hz.</a:t>
-            </a:r>
-          </a:p>
-          <a:p>
-            <a:r>
-              <a:rPr>
-                <a:latin typeface="Times New Roman"/>
-              </a:rPr>
-              <a:t>Windowing: Stage 1 uses 4-second windows; seizure windows overlap more (1 s stride) to get extra seizure examples. Stage 2 uses 10-second windows.</a:t>
-            </a:r>
-          </a:p>
-          <a:p>
-            <a:r>
-              <a:rPr>
-                <a:latin typeface="Times New Roman"/>
-              </a:rPr>
-              <a:t>Artifact rejection: we remove windows with absurdly large amplitudes (movement, loose electrodes). We calibrated this threshold on the data because a fixed 500 microvolt cutoff would have deleted real seizures.</a:t>
+              <a:t>The test set for subtype has 550 windows: 16 FA, 497 FIA and 37 FBTC.</a:t>
             </a:r>
           </a:p>
         </p:txBody>
@@ -4381,7 +4413,7 @@
               <a:rPr>
                 <a:latin typeface="Times New Roman"/>
               </a:rPr>
-              <a:t>This is the core network, used for both detection and subtype. Read the table top to bottom.</a:t>
+              <a:t>Raw EEG from different hospitals is messy and different, so we standardise it.</a:t>
             </a:r>
           </a:p>
           <a:p>
@@ -4389,7 +4421,7 @@
               <a:rPr>
                 <a:latin typeface="Times New Roman"/>
               </a:rPr>
-              <a:t>Four conv blocks slide filters along the signal to detect shapes. The first filter is wide (63 samples) to catch slow waves; later ones are narrow to catch sharp spikes. Each block halves the length, so the signal ends up 16 times shorter but richer (32, 64, 128, 128 feature channels).</a:t>
+              <a:t>Montage: both datasets are converted to the same 18-channel layout (the double-banana, each channel is the voltage difference between two neighbouring electrodes) in a fixed order.</a:t>
             </a:r>
           </a:p>
           <a:p>
@@ -4397,7 +4429,7 @@
               <a:rPr>
                 <a:latin typeface="Times New Roman"/>
               </a:rPr>
-              <a:t>The Bi-LSTM reads the shortened sequence forwards and backwards so it understands the order of events.</a:t>
+              <a:t>Filtering: remove power-line hum (60 Hz for CHB-MIT, 50 Hz for Siena), then keep only 0.5 to 45 Hz, where brain activity lives. We use a zero-phase filter so the timing of the seizure is not shifted.</a:t>
             </a:r>
           </a:p>
           <a:p>
@@ -4405,7 +4437,7 @@
               <a:rPr>
                 <a:latin typeface="Times New Roman"/>
               </a:rPr>
-              <a:t>Attention pooling gives every time step an importance score and takes a weighted average, producing one 128-number summary called the embedding.</a:t>
+              <a:t>Resampling: Siena is 512 Hz, we bring it to 256 Hz.</a:t>
             </a:r>
           </a:p>
           <a:p>
@@ -4413,7 +4445,15 @@
               <a:rPr>
                 <a:latin typeface="Times New Roman"/>
               </a:rPr>
-              <a:t>445,697 adjustable numbers (weights) in total. Because of attention pooling the network works for different window lengths, so the same design is used for 4 s and 10 s windows.</a:t>
+              <a:t>Windowing: Stage 1 uses 4-second windows; seizure windows overlap more (1 s stride) to get extra seizure examples. Stage 2 uses 10-second windows.</a:t>
+            </a:r>
+          </a:p>
+          <a:p>
+            <a:r>
+              <a:rPr>
+                <a:latin typeface="Times New Roman"/>
+              </a:rPr>
+              <a:t>Artifact rejection: we remove windows with absurdly large amplitudes (movement, loose electrodes). We calibrated this threshold on the data because a fixed 500 microvolt cutoff would have deleted real seizures.</a:t>
             </a:r>
           </a:p>
         </p:txBody>
@@ -4486,7 +4526,7 @@
               <a:rPr>
                 <a:latin typeface="Times New Roman"/>
               </a:rPr>
-              <a:t>Training happens in phases.</a:t>
+              <a:t>This is the core network, used for both detection and subtype. Read the table top to bottom.</a:t>
             </a:r>
           </a:p>
           <a:p>
@@ -4494,7 +4534,7 @@
               <a:rPr>
                 <a:latin typeface="Times New Roman"/>
               </a:rPr>
-              <a:t>Phase A: train the network to detect seizures using all 928,154 windows. It learns general seizure patterns.</a:t>
+              <a:t>Four conv blocks slide filters along the signal to detect shapes. The first filter is wide (63 samples) to catch slow waves; later ones are narrow to catch sharp spikes. Each block halves the length, so the signal ends up 16 times shorter but richer (32, 64, 128, 128 feature channels).</a:t>
             </a:r>
           </a:p>
           <a:p>
@@ -4502,7 +4542,7 @@
               <a:rPr>
                 <a:latin typeface="Times New Roman"/>
               </a:rPr>
-              <a:t>Phase B: copy that network and keep training it on subtype labels. First two conv blocks are locked (frozen), the rest adjust. This is transfer learning: start from knowledge, not from zero.</a:t>
+              <a:t>The Bi-LSTM reads the shortened sequence forwards and backwards so it understands the order of events.</a:t>
             </a:r>
           </a:p>
           <a:p>
@@ -4510,7 +4550,7 @@
               <a:rPr>
                 <a:latin typeface="Times New Roman"/>
               </a:rPr>
-              <a:t>The problem: the Phase A network is good at Focal Aware but cannot separate FIA from FBTC; the Phase B network separates FBTC but lost the Focal Aware ability because it saw only a few FA examples.</a:t>
+              <a:t>Attention pooling gives every time step an importance score and takes a weighted average, producing one 128-number summary called the embedding.</a:t>
             </a:r>
           </a:p>
           <a:p>
@@ -4518,7 +4558,7 @@
               <a:rPr>
                 <a:latin typeface="Times New Roman"/>
               </a:rPr>
-              <a:t>Solution: keep both, frozen, and stick their 128-number outputs together into 256 numbers. The formula z = [e_frozen || e_fine-tuned] just means concatenate. The final classifier now sees both experts' views.</a:t>
+              <a:t>445,697 adjustable numbers (weights) in total. Because of attention pooling the network works for different window lengths, so the same design is used for 4 s and 10 s windows.</a:t>
             </a:r>
           </a:p>
         </p:txBody>
@@ -4591,7 +4631,7 @@
               <a:rPr>
                 <a:latin typeface="Times New Roman"/>
               </a:rPr>
-              <a:t>This is the actual dataflow of the final model, top to bottom.</a:t>
+              <a:t>Training happens in phases.</a:t>
             </a:r>
           </a:p>
           <a:p>
@@ -4599,7 +4639,7 @@
               <a:rPr>
                 <a:latin typeface="Times New Roman"/>
               </a:rPr>
-              <a:t>An 18-channel EEG window enters two copies of the CRNN. The left copy is frozen from Phase A, the right one is the fine-tuned version. Each outputs 128 numbers.</a:t>
+              <a:t>Phase A: train the network to detect seizures using all 928,154 windows. It learns general seizure patterns.</a:t>
             </a:r>
           </a:p>
           <a:p>
@@ -4607,7 +4647,7 @@
               <a:rPr>
                 <a:latin typeface="Times New Roman"/>
               </a:rPr>
-              <a:t>They are concatenated into 256 numbers. On the training set only, SMOTE adds synthetic examples: Focal Aware goes from 29 to 87 and FBTC from 87 to 435. Test data is never touched.</a:t>
+              <a:t>Phase B: copy that network and keep training it on subtype labels. First two conv blocks are locked (frozen), the rest adjust. This is transfer learning: start from knowledge, not from zero.</a:t>
             </a:r>
           </a:p>
           <a:p>
@@ -4615,7 +4655,7 @@
               <a:rPr>
                 <a:latin typeface="Times New Roman"/>
               </a:rPr>
-              <a:t>A HistGradientBoosting classifier (200 small trees, depth 4, learning rate 0.08) is trained on these. At prediction time it outputs three probabilities and we pick the highest.</a:t>
+              <a:t>The problem: the Phase A network is good at Focal Aware but cannot separate FIA from FBTC; the Phase B network separates FBTC but lost the Focal Aware ability because it saw only a few FA examples.</a:t>
             </a:r>
           </a:p>
           <a:p>
@@ -4623,7 +4663,7 @@
               <a:rPr>
                 <a:latin typeface="Times New Roman"/>
               </a:rPr>
-              <a:t>The box at the bottom of the picture shows the final numbers: accuracy 0.911 and macro-F1 0.612.</a:t>
+              <a:t>Solution: keep both, frozen, and stick their 128-number outputs together into 256 numbers. The formula z = [e_frozen || e_fine-tuned] just means concatenate. The final classifier now sees both experts' views.</a:t>
             </a:r>
           </a:p>
         </p:txBody>
@@ -4696,7 +4736,7 @@
               <a:rPr>
                 <a:latin typeface="Times New Roman"/>
               </a:rPr>
-              <a:t>SMOTE means synthetic minority oversampling: create new rare-class examples by interpolating between a real example and a close neighbour. The formula is z_new = z_i + lambda times (z_neighbour minus z_i), lambda random between 0 and 1.</a:t>
+              <a:t>This is the actual dataflow of the final model, top to bottom.</a:t>
             </a:r>
           </a:p>
           <a:p>
@@ -4704,7 +4744,7 @@
               <a:rPr>
                 <a:latin typeface="Times New Roman"/>
               </a:rPr>
-              <a:t>We do it on the 256-number embeddings, not on the raw EEG, because mixing two raw brain signals gives signals that no brain makes.</a:t>
+              <a:t>An 18-channel EEG window enters two copies of the CRNN. The left copy is frozen from Phase A, the right one is the fine-tuned version. Each outputs 128 numbers.</a:t>
             </a:r>
           </a:p>
           <a:p>
@@ -4712,7 +4752,7 @@
               <a:rPr>
                 <a:latin typeface="Times New Roman"/>
               </a:rPr>
-              <a:t>We tried 3 classifiers (MLP, Random Forest, HistGB) times 3 ratio settings: 9 combinations.</a:t>
+              <a:t>They are concatenated into 256 numbers. On the training set only, SMOTE adds synthetic examples: Focal Aware goes from 29 to 87 and FBTC from 87 to 435. Test data is never touched.</a:t>
             </a:r>
           </a:p>
           <a:p>
@@ -4720,7 +4760,7 @@
               <a:rPr>
                 <a:latin typeface="Times New Roman"/>
               </a:rPr>
-              <a:t>The adversarial control checks whether the model is cheating by recognising the patient. We take normal EEG from each patient, label it with that patient's seizure type and test. A good model should do worse here than on real seizures; the difference is the gap.</a:t>
+              <a:t>A HistGradientBoosting classifier (200 small trees, depth 4, learning rate 0.08) is trained on these. At prediction time it outputs three probabilities and we pick the highest.</a:t>
             </a:r>
           </a:p>
           <a:p>
@@ -4728,7 +4768,7 @@
               <a:rPr>
                 <a:latin typeface="Times New Roman"/>
               </a:rPr>
-              <a:t>The winner was chosen by a rule fixed before running the experiments: accuracy at least 0.90, positive gap on both rare classes, then best worst-class recall. This avoids picking results after seeing them.</a:t>
+              <a:t>The box at the bottom of the picture shows the final numbers: accuracy 0.911 and macro-F1 0.612.</a:t>
             </a:r>
           </a:p>
         </p:txBody>
@@ -4884,7 +4924,7 @@
           <a:p>
             <a:fld id="{D8716489-D712-42FD-A5CE-C6172C8BA296}" type="datetime3">
               <a:rPr lang="en-US" smtClean="0"/>
-              <a:t>26 October 2026</a:t>
+              <a:t>27 October 2026</a:t>
             </a:fld>
             <a:endParaRPr lang="en-US" dirty="0"/>
           </a:p>
@@ -5054,7 +5094,7 @@
           <a:p>
             <a:fld id="{C92194F1-0AB8-4BE9-A439-7E46A5759AB1}" type="datetime3">
               <a:rPr lang="en-US" smtClean="0"/>
-              <a:t>26 October 2026</a:t>
+              <a:t>27 October 2026</a:t>
             </a:fld>
             <a:endParaRPr lang="en-US" dirty="0"/>
           </a:p>
@@ -5234,7 +5274,7 @@
           <a:p>
             <a:fld id="{5C5CEAA3-BB41-4C03-BC4D-15B9C422D377}" type="datetime3">
               <a:rPr lang="en-US" smtClean="0"/>
-              <a:t>26 October 2026</a:t>
+              <a:t>27 October 2026</a:t>
             </a:fld>
             <a:endParaRPr lang="en-US" dirty="0"/>
           </a:p>
@@ -5426,7 +5466,7 @@
           <a:p>
             <a:fld id="{21392398-1DF7-4A72-9249-49FFF57890A2}" type="datetime3">
               <a:rPr lang="en-US" smtClean="0"/>
-              <a:t>26 October 2026</a:t>
+              <a:t>27 October 2026</a:t>
             </a:fld>
             <a:endParaRPr lang="en-US" dirty="0"/>
           </a:p>
@@ -5601,7 +5641,7 @@
           <a:p>
             <a:fld id="{EF73536B-0AF0-43FC-9687-A3A6CCFB2121}" type="datetime3">
               <a:rPr lang="en-US" smtClean="0"/>
-              <a:t>26 October 2026</a:t>
+              <a:t>27 October 2026</a:t>
             </a:fld>
             <a:endParaRPr lang="en-US" dirty="0"/>
           </a:p>
@@ -5852,7 +5892,7 @@
           <a:p>
             <a:fld id="{026EF65B-1CD3-4C27-85C4-98B625C36928}" type="datetime3">
               <a:rPr lang="en-US" smtClean="0"/>
-              <a:t>26 October 2026</a:t>
+              <a:t>27 October 2026</a:t>
             </a:fld>
             <a:endParaRPr lang="en-US" dirty="0"/>
           </a:p>
@@ -6089,7 +6129,7 @@
           <a:p>
             <a:fld id="{5DAE16DC-6745-42F5-9E6E-F85302676B44}" type="datetime3">
               <a:rPr lang="en-US" smtClean="0"/>
-              <a:t>26 October 2026</a:t>
+              <a:t>27 October 2026</a:t>
             </a:fld>
             <a:endParaRPr lang="en-US" dirty="0"/>
           </a:p>
@@ -6461,7 +6501,7 @@
           <a:p>
             <a:fld id="{2BA6EC28-665F-4900-92F2-570BE0AB62F1}" type="datetime3">
               <a:rPr lang="en-US" smtClean="0"/>
-              <a:t>26 October 2026</a:t>
+              <a:t>27 October 2026</a:t>
             </a:fld>
             <a:endParaRPr lang="en-US" dirty="0"/>
           </a:p>
@@ -6584,7 +6624,7 @@
           <a:p>
             <a:fld id="{41E607A8-E8D3-43FC-A598-1EA1EA9E84C3}" type="datetime3">
               <a:rPr lang="en-US" smtClean="0"/>
-              <a:t>26 October 2026</a:t>
+              <a:t>27 October 2026</a:t>
             </a:fld>
             <a:endParaRPr lang="en-US" dirty="0"/>
           </a:p>
@@ -6684,7 +6724,7 @@
           <a:p>
             <a:fld id="{2F94297E-87B1-45DD-85FA-F98211548008}" type="datetime3">
               <a:rPr lang="en-US" smtClean="0"/>
-              <a:t>26 October 2026</a:t>
+              <a:t>27 October 2026</a:t>
             </a:fld>
             <a:endParaRPr lang="en-US" dirty="0"/>
           </a:p>
@@ -6966,7 +7006,7 @@
           <a:p>
             <a:fld id="{04FE95E9-EC26-4467-80D4-1B9C86B4C053}" type="datetime3">
               <a:rPr lang="en-US" smtClean="0"/>
-              <a:t>26 October 2026</a:t>
+              <a:t>27 October 2026</a:t>
             </a:fld>
             <a:endParaRPr lang="en-US" dirty="0"/>
           </a:p>
@@ -7141,7 +7181,7 @@
           <a:p>
             <a:fld id="{D876002D-46B2-464C-84A5-D232A4E74A4F}" type="datetime3">
               <a:rPr lang="en-US" smtClean="0"/>
-              <a:t>26 October 2026</a:t>
+              <a:t>27 October 2026</a:t>
             </a:fld>
             <a:endParaRPr lang="en-US" dirty="0"/>
           </a:p>
@@ -7394,7 +7434,7 @@
           <a:p>
             <a:fld id="{2F873728-DFB1-4D64-9358-D87D7108B63C}" type="datetime3">
               <a:rPr lang="en-US" smtClean="0"/>
-              <a:t>26 October 2026</a:t>
+              <a:t>27 October 2026</a:t>
             </a:fld>
             <a:endParaRPr lang="en-US" dirty="0"/>
           </a:p>
@@ -7569,7 +7609,7 @@
           <a:p>
             <a:fld id="{78F88F4A-D1DD-4E46-B569-6CCF79D28816}" type="datetime3">
               <a:rPr lang="en-US" smtClean="0"/>
-              <a:t>26 October 2026</a:t>
+              <a:t>27 October 2026</a:t>
             </a:fld>
             <a:endParaRPr lang="en-US" dirty="0"/>
           </a:p>
@@ -7754,7 +7794,7 @@
           <a:p>
             <a:fld id="{7A1733EF-CC8A-4780-B318-8862E19F0355}" type="datetime3">
               <a:rPr lang="en-US" smtClean="0"/>
-              <a:t>26 October 2026</a:t>
+              <a:t>27 October 2026</a:t>
             </a:fld>
             <a:endParaRPr lang="en-US" dirty="0"/>
           </a:p>
@@ -8005,7 +8045,7 @@
           <a:p>
             <a:fld id="{9A08F8AF-8985-4F65-B349-6C141653713C}" type="datetime3">
               <a:rPr lang="en-US" smtClean="0"/>
-              <a:t>26 October 2026</a:t>
+              <a:t>27 October 2026</a:t>
             </a:fld>
             <a:endParaRPr lang="en-US" dirty="0"/>
           </a:p>
@@ -8237,7 +8277,7 @@
           <a:p>
             <a:fld id="{9CBC9EED-9FD4-4385-9E08-A4A9DD895483}" type="datetime3">
               <a:rPr lang="en-US" smtClean="0"/>
-              <a:t>26 October 2026</a:t>
+              <a:t>27 October 2026</a:t>
             </a:fld>
             <a:endParaRPr lang="en-US" dirty="0"/>
           </a:p>
@@ -8604,7 +8644,7 @@
           <a:p>
             <a:fld id="{0BC80E91-64E4-45E6-9423-9C321850AA40}" type="datetime3">
               <a:rPr lang="en-US" smtClean="0"/>
-              <a:t>26 October 2026</a:t>
+              <a:t>27 October 2026</a:t>
             </a:fld>
             <a:endParaRPr lang="en-US" dirty="0"/>
           </a:p>
@@ -8722,7 +8762,7 @@
           <a:p>
             <a:fld id="{F0517C59-F215-49B6-BB5E-D29A2E5E5132}" type="datetime3">
               <a:rPr lang="en-US" smtClean="0"/>
-              <a:t>26 October 2026</a:t>
+              <a:t>27 October 2026</a:t>
             </a:fld>
             <a:endParaRPr lang="en-US" dirty="0"/>
           </a:p>
@@ -8817,7 +8857,7 @@
           <a:p>
             <a:fld id="{6F7EA1C9-1125-4D1C-AFA8-2DD04CC465F7}" type="datetime3">
               <a:rPr lang="en-US" smtClean="0"/>
-              <a:t>26 October 2026</a:t>
+              <a:t>27 October 2026</a:t>
             </a:fld>
             <a:endParaRPr lang="en-US" dirty="0"/>
           </a:p>
@@ -9094,7 +9134,7 @@
           <a:p>
             <a:fld id="{AD71C455-CAEA-4C73-997E-A67663698C56}" type="datetime3">
               <a:rPr lang="en-US" smtClean="0"/>
-              <a:t>26 October 2026</a:t>
+              <a:t>27 October 2026</a:t>
             </a:fld>
             <a:endParaRPr lang="en-US" dirty="0"/>
           </a:p>
@@ -9347,7 +9387,7 @@
           <a:p>
             <a:fld id="{50C1E071-8CD4-432A-9114-2008217081A4}" type="datetime3">
               <a:rPr lang="en-US" smtClean="0"/>
-              <a:t>26 October 2026</a:t>
+              <a:t>27 October 2026</a:t>
             </a:fld>
             <a:endParaRPr lang="en-US" dirty="0"/>
           </a:p>
@@ -9560,7 +9600,7 @@
           <a:p>
             <a:fld id="{32E69BA7-71E3-4D1F-8F91-3683761D03CA}" type="datetime3">
               <a:rPr lang="en-US" smtClean="0"/>
-              <a:t>26 October 2026</a:t>
+              <a:t>27 October 2026</a:t>
             </a:fld>
             <a:endParaRPr lang="en-US" dirty="0"/>
           </a:p>
@@ -10101,7 +10141,7 @@
           <a:p>
             <a:fld id="{FB155EB5-80B1-423B-B8A7-6502C7E46C6A}" type="datetime3">
               <a:rPr lang="en-US" smtClean="0"/>
-              <a:t>26 October 2026</a:t>
+              <a:t>27 October 2026</a:t>
             </a:fld>
             <a:endParaRPr lang="en-US" dirty="0"/>
           </a:p>
@@ -10519,7 +10559,7 @@
           <p:nvPr/>
         </p:nvPicPr>
         <p:blipFill>
-          <a:blip r:embed="rId2" cstate="print"/>
+          <a:blip r:embed="rId3" cstate="print"/>
           <a:stretch>
             <a:fillRect/>
           </a:stretch>
@@ -10541,7 +10581,7 @@
           <p:nvPr/>
         </p:nvPicPr>
         <p:blipFill>
-          <a:blip r:embed="rId3" cstate="print"/>
+          <a:blip r:embed="rId4" cstate="print"/>
           <a:stretch>
             <a:fillRect/>
           </a:stretch>
@@ -10731,7 +10771,7 @@
                 <a:latin typeface="Times New Roman" panose="02020603050405020304" pitchFamily="18" charset="0"/>
                 <a:cs typeface="Times New Roman" panose="02020603050405020304" pitchFamily="18" charset="0"/>
               </a:rPr>
-              <a:t>26 October 2026</a:t>
+              <a:t>27 October 2026</a:t>
             </a:fld>
             <a:endParaRPr lang="en-US" dirty="0">
               <a:latin typeface="Times New Roman" panose="02020603050405020304" pitchFamily="18" charset="0"/>
@@ -11497,7 +11537,7 @@
         </p:nvSpPr>
         <p:spPr>
           <a:xfrm>
-            <a:off x="3418580" y="9240944"/>
+            <a:off x="3418579" y="9059219"/>
             <a:ext cx="11450839" cy="507447"/>
           </a:xfrm>
           <a:prstGeom prst="rect">
@@ -11793,7 +11833,7 @@
         </p:nvSpPr>
         <p:spPr>
           <a:xfrm>
-            <a:off x="6057900" y="9715500"/>
+            <a:off x="6057899" y="9512077"/>
             <a:ext cx="6172200" cy="649323"/>
           </a:xfrm>
         </p:spPr>
@@ -11802,7 +11842,10 @@
           <a:lstStyle/>
           <a:p>
             <a:r>
-              <a:rPr lang="en-IN" dirty="0"/>
+              <a:rPr lang="en-IN" dirty="0">
+                <a:latin typeface="Times New Roman" panose="02020603050405020304" pitchFamily="18" charset="0"/>
+                <a:cs typeface="Times New Roman" panose="02020603050405020304" pitchFamily="18" charset="0"/>
+              </a:rPr>
               <a:t>Dept of CSE</a:t>
             </a:r>
           </a:p>
@@ -16046,10 +16089,16 @@
           <a:lstStyle/>
           <a:p>
             <a:fld id="{2F94297E-87B1-45DD-85FA-F98211548008}" type="datetime3">
-              <a:rPr lang="en-US" smtClean="0"/>
-              <a:t>26 October 2026</a:t>
+              <a:rPr lang="en-US" smtClean="0">
+                <a:latin typeface="Times New Roman" panose="02020603050405020304" pitchFamily="18" charset="0"/>
+                <a:cs typeface="Times New Roman" panose="02020603050405020304" pitchFamily="18" charset="0"/>
+              </a:rPr>
+              <a:t>27 October 2026</a:t>
             </a:fld>
-            <a:endParaRPr lang="en-US" dirty="0"/>
+            <a:endParaRPr lang="en-US" dirty="0">
+              <a:latin typeface="Times New Roman" panose="02020603050405020304" pitchFamily="18" charset="0"/>
+              <a:cs typeface="Times New Roman" panose="02020603050405020304" pitchFamily="18" charset="0"/>
+            </a:endParaRPr>
           </a:p>
         </p:txBody>
       </p:sp>
@@ -16075,7 +16124,10 @@
           <a:lstStyle/>
           <a:p>
             <a:r>
-              <a:rPr lang="en-IN" dirty="0"/>
+              <a:rPr lang="en-IN" dirty="0">
+                <a:latin typeface="Times New Roman" panose="02020603050405020304" pitchFamily="18" charset="0"/>
+                <a:cs typeface="Times New Roman" panose="02020603050405020304" pitchFamily="18" charset="0"/>
+              </a:rPr>
               <a:t>Dept. of CSE</a:t>
             </a:r>
           </a:p>
@@ -16103,11 +16155,17 @@
           <a:lstStyle/>
           <a:p>
             <a:fld id="{B6F15528-21DE-4FAA-801E-634DDDAF4B2B}" type="slidenum">
-              <a:rPr lang="en-IN" smtClean="0"/>
+              <a:rPr lang="en-IN" smtClean="0">
+                <a:latin typeface="Times New Roman" panose="02020603050405020304" pitchFamily="18" charset="0"/>
+                <a:cs typeface="Times New Roman" panose="02020603050405020304" pitchFamily="18" charset="0"/>
+              </a:rPr>
               <a:pPr/>
               <a:t>15</a:t>
             </a:fld>
-            <a:endParaRPr lang="en-IN" dirty="0"/>
+            <a:endParaRPr lang="en-IN" dirty="0">
+              <a:latin typeface="Times New Roman" panose="02020603050405020304" pitchFamily="18" charset="0"/>
+              <a:cs typeface="Times New Roman" panose="02020603050405020304" pitchFamily="18" charset="0"/>
+            </a:endParaRPr>
           </a:p>
         </p:txBody>
       </p:sp>
@@ -16196,22 +16254,22 @@
           <p:nvPr/>
         </p:nvPicPr>
         <p:blipFill>
-          <a:blip r:embed="rId2">
+          <a:blip r:embed="rId3">
             <a:extLst>
               <a:ext uri="{28A0092B-C50C-407E-A947-70E740481C1C}">
                 <a14:useLocalDpi xmlns:a14="http://schemas.microsoft.com/office/drawing/2010/main" val="0"/>
               </a:ext>
             </a:extLst>
           </a:blip>
-          <a:srcRect t="3332" b="4331"/>
+          <a:srcRect t="3332" b="2983"/>
           <a:stretch>
             <a:fillRect/>
           </a:stretch>
         </p:blipFill>
         <p:spPr>
           <a:xfrm>
-            <a:off x="4953000" y="1257300"/>
-            <a:ext cx="8192433" cy="8411651"/>
+            <a:off x="4953001" y="1257300"/>
+            <a:ext cx="7962900" cy="8295286"/>
           </a:xfrm>
           <a:prstGeom prst="rect">
             <a:avLst/>
@@ -16236,272 +16294,6 @@
   <p:cSld>
     <p:spTree>
       <p:nvGrpSpPr>
-        <p:cNvPr id="1" name="">
-          <a:extLst>
-            <a:ext uri="{FF2B5EF4-FFF2-40B4-BE49-F238E27FC236}">
-              <a16:creationId xmlns:a16="http://schemas.microsoft.com/office/drawing/2014/main" id="{6F725798-EDB8-B707-7C57-82D9BB7E38F5}"/>
-            </a:ext>
-          </a:extLst>
-        </p:cNvPr>
-        <p:cNvGrpSpPr/>
-        <p:nvPr/>
-      </p:nvGrpSpPr>
-      <p:grpSpPr>
-        <a:xfrm>
-          <a:off x="0" y="0"/>
-          <a:ext cx="0" cy="0"/>
-          <a:chOff x="0" y="0"/>
-          <a:chExt cx="0" cy="0"/>
-        </a:xfrm>
-      </p:grpSpPr>
-      <p:sp>
-        <p:nvSpPr>
-          <p:cNvPr id="13" name="Subtitle 12">
-            <a:extLst>
-              <a:ext uri="{FF2B5EF4-FFF2-40B4-BE49-F238E27FC236}">
-                <a16:creationId xmlns:a16="http://schemas.microsoft.com/office/drawing/2014/main" id="{18B7466B-C9DC-4257-060D-705ECDD41453}"/>
-              </a:ext>
-            </a:extLst>
-          </p:cNvPr>
-          <p:cNvSpPr>
-            <a:spLocks noGrp="1"/>
-          </p:cNvSpPr>
-          <p:nvPr>
-            <p:ph type="subTitle" idx="1"/>
-          </p:nvPr>
-        </p:nvSpPr>
-        <p:spPr>
-          <a:xfrm>
-            <a:off x="2057400" y="803406"/>
-            <a:ext cx="13373099" cy="1295400"/>
-          </a:xfrm>
-        </p:spPr>
-        <p:txBody>
-          <a:bodyPr>
-            <a:normAutofit/>
-          </a:bodyPr>
-          <a:lstStyle/>
-          <a:p>
-            <a:r>
-              <a:rPr lang="en-IN" sz="8000" b="1" dirty="0">
-                <a:latin typeface="Times New Roman" panose="02020603050405020304" pitchFamily="18" charset="0"/>
-                <a:cs typeface="Times New Roman" panose="02020603050405020304" pitchFamily="18" charset="0"/>
-              </a:rPr>
-              <a:t>Expected Outcomes </a:t>
-            </a:r>
-            <a:endParaRPr lang="en-IN" sz="8000" i="1" dirty="0">
-              <a:latin typeface="Times New Roman" panose="02020603050405020304" pitchFamily="18" charset="0"/>
-              <a:cs typeface="Times New Roman" panose="02020603050405020304" pitchFamily="18" charset="0"/>
-            </a:endParaRPr>
-          </a:p>
-        </p:txBody>
-      </p:sp>
-      <p:sp>
-        <p:nvSpPr>
-          <p:cNvPr id="3" name="Date Placeholder 2">
-            <a:extLst>
-              <a:ext uri="{FF2B5EF4-FFF2-40B4-BE49-F238E27FC236}">
-                <a16:creationId xmlns:a16="http://schemas.microsoft.com/office/drawing/2014/main" id="{F408469E-4869-3963-35B1-A4CB05700A23}"/>
-              </a:ext>
-            </a:extLst>
-          </p:cNvPr>
-          <p:cNvSpPr>
-            <a:spLocks noGrp="1"/>
-          </p:cNvSpPr>
-          <p:nvPr>
-            <p:ph type="dt" sz="half" idx="10"/>
-          </p:nvPr>
-        </p:nvSpPr>
-        <p:spPr/>
-        <p:txBody>
-          <a:bodyPr/>
-          <a:lstStyle/>
-          <a:p>
-            <a:fld id="{329A0061-5C20-4BFA-8D13-4B871A15E322}" type="datetime3">
-              <a:rPr lang="en-US" smtClean="0">
-                <a:latin typeface="Times New Roman" panose="02020603050405020304" pitchFamily="18" charset="0"/>
-                <a:cs typeface="Times New Roman" panose="02020603050405020304" pitchFamily="18" charset="0"/>
-              </a:rPr>
-              <a:t>26 October 2026</a:t>
-            </a:fld>
-            <a:endParaRPr lang="en-US" dirty="0">
-              <a:latin typeface="Times New Roman" panose="02020603050405020304" pitchFamily="18" charset="0"/>
-              <a:cs typeface="Times New Roman" panose="02020603050405020304" pitchFamily="18" charset="0"/>
-            </a:endParaRPr>
-          </a:p>
-        </p:txBody>
-      </p:sp>
-      <p:sp>
-        <p:nvSpPr>
-          <p:cNvPr id="7" name="Footer Placeholder 6">
-            <a:extLst>
-              <a:ext uri="{FF2B5EF4-FFF2-40B4-BE49-F238E27FC236}">
-                <a16:creationId xmlns:a16="http://schemas.microsoft.com/office/drawing/2014/main" id="{39F03182-9E6C-3B06-981A-94ED2CB13FEC}"/>
-              </a:ext>
-            </a:extLst>
-          </p:cNvPr>
-          <p:cNvSpPr>
-            <a:spLocks noGrp="1"/>
-          </p:cNvSpPr>
-          <p:nvPr>
-            <p:ph type="ftr" sz="quarter" idx="11"/>
-          </p:nvPr>
-        </p:nvSpPr>
-        <p:spPr/>
-        <p:txBody>
-          <a:bodyPr/>
-          <a:lstStyle/>
-          <a:p>
-            <a:r>
-              <a:rPr lang="en-IN" dirty="0">
-                <a:latin typeface="Times New Roman" panose="02020603050405020304" pitchFamily="18" charset="0"/>
-                <a:cs typeface="Times New Roman" panose="02020603050405020304" pitchFamily="18" charset="0"/>
-              </a:rPr>
-              <a:t>Dept of CSE </a:t>
-            </a:r>
-          </a:p>
-        </p:txBody>
-      </p:sp>
-      <p:sp>
-        <p:nvSpPr>
-          <p:cNvPr id="8" name="Slide Number Placeholder 7">
-            <a:extLst>
-              <a:ext uri="{FF2B5EF4-FFF2-40B4-BE49-F238E27FC236}">
-                <a16:creationId xmlns:a16="http://schemas.microsoft.com/office/drawing/2014/main" id="{7CBD49B1-1739-5A2C-1307-31D78C86E243}"/>
-              </a:ext>
-            </a:extLst>
-          </p:cNvPr>
-          <p:cNvSpPr>
-            <a:spLocks noGrp="1"/>
-          </p:cNvSpPr>
-          <p:nvPr>
-            <p:ph type="sldNum" sz="quarter" idx="12"/>
-          </p:nvPr>
-        </p:nvSpPr>
-        <p:spPr/>
-        <p:txBody>
-          <a:bodyPr/>
-          <a:lstStyle/>
-          <a:p>
-            <a:fld id="{B6F15528-21DE-4FAA-801E-634DDDAF4B2B}" type="slidenum">
-              <a:rPr lang="en-IN" smtClean="0">
-                <a:latin typeface="Times New Roman" panose="02020603050405020304" pitchFamily="18" charset="0"/>
-                <a:cs typeface="Times New Roman" panose="02020603050405020304" pitchFamily="18" charset="0"/>
-              </a:rPr>
-              <a:pPr/>
-              <a:t>16</a:t>
-            </a:fld>
-            <a:endParaRPr lang="en-IN" dirty="0">
-              <a:latin typeface="Times New Roman" panose="02020603050405020304" pitchFamily="18" charset="0"/>
-              <a:cs typeface="Times New Roman" panose="02020603050405020304" pitchFamily="18" charset="0"/>
-            </a:endParaRPr>
-          </a:p>
-        </p:txBody>
-      </p:sp>
-      <p:sp>
-        <p:nvSpPr>
-          <p:cNvPr id="2" name="TextBox 1">
-            <a:extLst>
-              <a:ext uri="{FF2B5EF4-FFF2-40B4-BE49-F238E27FC236}">
-                <a16:creationId xmlns:a16="http://schemas.microsoft.com/office/drawing/2014/main" id="{99169561-7000-AAFD-69E4-A77662C88D57}"/>
-              </a:ext>
-            </a:extLst>
-          </p:cNvPr>
-          <p:cNvSpPr txBox="1"/>
-          <p:nvPr/>
-        </p:nvSpPr>
-        <p:spPr>
-          <a:xfrm>
-            <a:off x="1257300" y="2247900"/>
-            <a:ext cx="15773400" cy="6845913"/>
-          </a:xfrm>
-          <a:prstGeom prst="rect">
-            <a:avLst/>
-          </a:prstGeom>
-          <a:noFill/>
-        </p:spPr>
-        <p:txBody>
-          <a:bodyPr wrap="square" rtlCol="0">
-            <a:spAutoFit/>
-          </a:bodyPr>
-          <a:lstStyle/>
-          <a:p>
-            <a:pPr marL="571500" marR="100330" indent="-571500" algn="just">
-              <a:lnSpc>
-                <a:spcPct val="150000"/>
-              </a:lnSpc>
-              <a:spcAft>
-                <a:spcPts val="800"/>
-              </a:spcAft>
-              <a:buFont typeface="Arial" panose="020B0604020202020204" pitchFamily="34" charset="0"/>
-              <a:buChar char="•"/>
-            </a:pPr>
-            <a:r>
-              <a:rPr lang="en-IN" sz="3600" dirty="0">
-                <a:latin typeface="Times New Roman" panose="02020603050405020304" pitchFamily="18" charset="0"/>
-                <a:cs typeface="Times New Roman" panose="02020603050405020304" pitchFamily="18" charset="0"/>
-              </a:rPr>
-              <a:t>A standardized and pre-processed EEG dataset with cleaned, filtered, normalized, and segmented seizure recordings suitable for deep learning analysis. </a:t>
-            </a:r>
-          </a:p>
-          <a:p>
-            <a:pPr marL="571500" marR="100330" indent="-571500" algn="just">
-              <a:lnSpc>
-                <a:spcPct val="150000"/>
-              </a:lnSpc>
-              <a:spcAft>
-                <a:spcPts val="800"/>
-              </a:spcAft>
-              <a:buFont typeface="Arial" panose="020B0604020202020204" pitchFamily="34" charset="0"/>
-              <a:buChar char="•"/>
-            </a:pPr>
-            <a:r>
-              <a:rPr lang="en-IN" sz="3600" dirty="0">
-                <a:latin typeface="Times New Roman" panose="02020603050405020304" pitchFamily="18" charset="0"/>
-                <a:cs typeface="Times New Roman" panose="02020603050405020304" pitchFamily="18" charset="0"/>
-              </a:rPr>
-              <a:t>A functional hierarchical deep learning framework capable of performing seizure detection followed by seizure subtype classification using transfer learning. </a:t>
-            </a:r>
-          </a:p>
-          <a:p>
-            <a:pPr marL="571500" marR="100330" indent="-571500" algn="just">
-              <a:lnSpc>
-                <a:spcPct val="150000"/>
-              </a:lnSpc>
-              <a:spcAft>
-                <a:spcPts val="800"/>
-              </a:spcAft>
-              <a:buFont typeface="Arial" panose="020B0604020202020204" pitchFamily="34" charset="0"/>
-              <a:buChar char="•"/>
-            </a:pPr>
-            <a:r>
-              <a:rPr lang="en-IN" sz="3600" dirty="0">
-                <a:latin typeface="Times New Roman" panose="02020603050405020304" pitchFamily="18" charset="0"/>
-                <a:cs typeface="Times New Roman" panose="02020603050405020304" pitchFamily="18" charset="0"/>
-              </a:rPr>
-              <a:t>An evaluated automated multi-class seizure classification system with validated performance metrics (e.g., accuracy, precision, recall, F1-score) using subject wise cross validation. </a:t>
-            </a:r>
-          </a:p>
-        </p:txBody>
-      </p:sp>
-    </p:spTree>
-    <p:extLst>
-      <p:ext uri="{BB962C8B-B14F-4D97-AF65-F5344CB8AC3E}">
-        <p14:creationId xmlns:p14="http://schemas.microsoft.com/office/powerpoint/2010/main" val="4276864905"/>
-      </p:ext>
-    </p:extLst>
-  </p:cSld>
-  <p:clrMapOvr>
-    <a:masterClrMapping/>
-  </p:clrMapOvr>
-</p:sld>
-</file>
-
-<file path=ppt/slides/slide17.xml><?xml version="1.0" encoding="utf-8"?>
-<p:sld xmlns:a="http://schemas.openxmlformats.org/drawingml/2006/main" xmlns:r="http://schemas.openxmlformats.org/officeDocument/2006/relationships" xmlns:p="http://schemas.openxmlformats.org/presentationml/2006/main">
-  <p:cSld>
-    <p:spTree>
-      <p:nvGrpSpPr>
         <p:cNvPr id="1" name=""/>
         <p:cNvGrpSpPr/>
         <p:nvPr/>
@@ -16534,7 +16326,7 @@
                 <a:latin typeface="Times New Roman" panose="02020603050405020304" pitchFamily="18" charset="0"/>
                 <a:cs typeface="Times New Roman" panose="02020603050405020304" pitchFamily="18" charset="0"/>
               </a:rPr>
-              <a:t>26 October 2026</a:t>
+              <a:t>27 October 2026</a:t>
             </a:fld>
             <a:endParaRPr lang="en-US" dirty="0">
               <a:latin typeface="Times New Roman" panose="02020603050405020304" pitchFamily="18" charset="0"/>
@@ -16589,7 +16381,7 @@
                 <a:cs typeface="Times New Roman" panose="02020603050405020304" pitchFamily="18" charset="0"/>
               </a:rPr>
               <a:pPr/>
-              <a:t>17</a:t>
+              <a:t>16</a:t>
             </a:fld>
             <a:endParaRPr lang="en-IN" dirty="0">
               <a:latin typeface="Times New Roman" panose="02020603050405020304" pitchFamily="18" charset="0"/>
@@ -18087,7 +17879,7 @@
 </p:sld>
 </file>
 
-<file path=ppt/slides/slide18.xml><?xml version="1.0" encoding="utf-8"?>
+<file path=ppt/slides/slide17.xml><?xml version="1.0" encoding="utf-8"?>
 <p:sld xmlns:a="http://schemas.openxmlformats.org/drawingml/2006/main" xmlns:r="http://schemas.openxmlformats.org/officeDocument/2006/relationships" xmlns:p="http://schemas.openxmlformats.org/presentationml/2006/main">
   <p:cSld>
     <p:spTree>
@@ -18124,7 +17916,7 @@
                 <a:latin typeface="Times New Roman" panose="02020603050405020304" pitchFamily="18" charset="0"/>
                 <a:cs typeface="Times New Roman" panose="02020603050405020304" pitchFamily="18" charset="0"/>
               </a:rPr>
-              <a:t>26 October 2026</a:t>
+              <a:t>27 October 2026</a:t>
             </a:fld>
             <a:endParaRPr lang="en-US" dirty="0">
               <a:latin typeface="Times New Roman" panose="02020603050405020304" pitchFamily="18" charset="0"/>
@@ -18179,7 +17971,7 @@
                 <a:cs typeface="Times New Roman" panose="02020603050405020304" pitchFamily="18" charset="0"/>
               </a:rPr>
               <a:pPr/>
-              <a:t>18</a:t>
+              <a:t>17</a:t>
             </a:fld>
             <a:endParaRPr lang="en-IN" dirty="0">
               <a:latin typeface="Times New Roman" panose="02020603050405020304" pitchFamily="18" charset="0"/>
@@ -19174,6 +18966,418 @@
 </p:sld>
 </file>
 
+<file path=ppt/slides/slide18.xml><?xml version="1.0" encoding="utf-8"?>
+<p:sld xmlns:a="http://schemas.openxmlformats.org/drawingml/2006/main" xmlns:r="http://schemas.openxmlformats.org/officeDocument/2006/relationships" xmlns:p="http://schemas.openxmlformats.org/presentationml/2006/main">
+  <p:cSld>
+    <p:spTree>
+      <p:nvGrpSpPr>
+        <p:cNvPr id="1" name=""/>
+        <p:cNvGrpSpPr/>
+        <p:nvPr/>
+      </p:nvGrpSpPr>
+      <p:grpSpPr>
+        <a:xfrm>
+          <a:off x="0" y="0"/>
+          <a:ext cx="0" cy="0"/>
+          <a:chOff x="0" y="0"/>
+          <a:chExt cx="0" cy="0"/>
+        </a:xfrm>
+      </p:grpSpPr>
+      <p:sp>
+        <p:nvSpPr>
+          <p:cNvPr id="3" name="Date Placeholder 2"/>
+          <p:cNvSpPr>
+            <a:spLocks noGrp="1"/>
+          </p:cNvSpPr>
+          <p:nvPr>
+            <p:ph type="dt" sz="half" idx="10"/>
+          </p:nvPr>
+        </p:nvSpPr>
+        <p:spPr/>
+        <p:txBody>
+          <a:bodyPr/>
+          <a:lstStyle/>
+          <a:p>
+            <a:fld id="{79B7A7E6-0BB5-4562-B4D8-B2D95118667A}" type="datetime3">
+              <a:rPr lang="en-US" smtClean="0">
+                <a:latin typeface="Times New Roman" panose="02020603050405020304" pitchFamily="18" charset="0"/>
+                <a:cs typeface="Times New Roman" panose="02020603050405020304" pitchFamily="18" charset="0"/>
+              </a:rPr>
+              <a:t>27 October 2026</a:t>
+            </a:fld>
+            <a:endParaRPr lang="en-US" dirty="0">
+              <a:latin typeface="Times New Roman" panose="02020603050405020304" pitchFamily="18" charset="0"/>
+              <a:cs typeface="Times New Roman" panose="02020603050405020304" pitchFamily="18" charset="0"/>
+            </a:endParaRPr>
+          </a:p>
+        </p:txBody>
+      </p:sp>
+      <p:sp>
+        <p:nvSpPr>
+          <p:cNvPr id="7" name="Footer Placeholder 6"/>
+          <p:cNvSpPr>
+            <a:spLocks noGrp="1"/>
+          </p:cNvSpPr>
+          <p:nvPr>
+            <p:ph type="ftr" sz="quarter" idx="11"/>
+          </p:nvPr>
+        </p:nvSpPr>
+        <p:spPr/>
+        <p:txBody>
+          <a:bodyPr/>
+          <a:lstStyle/>
+          <a:p>
+            <a:r>
+              <a:rPr lang="en-IN" dirty="0">
+                <a:latin typeface="Times New Roman" panose="02020603050405020304" pitchFamily="18" charset="0"/>
+                <a:cs typeface="Times New Roman" panose="02020603050405020304" pitchFamily="18" charset="0"/>
+              </a:rPr>
+              <a:t>Dept of CSE </a:t>
+            </a:r>
+          </a:p>
+        </p:txBody>
+      </p:sp>
+      <p:sp>
+        <p:nvSpPr>
+          <p:cNvPr id="8" name="Slide Number Placeholder 7"/>
+          <p:cNvSpPr>
+            <a:spLocks noGrp="1"/>
+          </p:cNvSpPr>
+          <p:nvPr>
+            <p:ph type="sldNum" sz="quarter" idx="12"/>
+          </p:nvPr>
+        </p:nvSpPr>
+        <p:spPr/>
+        <p:txBody>
+          <a:bodyPr/>
+          <a:lstStyle/>
+          <a:p>
+            <a:fld id="{B6F15528-21DE-4FAA-801E-634DDDAF4B2B}" type="slidenum">
+              <a:rPr lang="en-IN" smtClean="0">
+                <a:latin typeface="Times New Roman" panose="02020603050405020304" pitchFamily="18" charset="0"/>
+                <a:cs typeface="Times New Roman" panose="02020603050405020304" pitchFamily="18" charset="0"/>
+              </a:rPr>
+              <a:pPr/>
+              <a:t>18</a:t>
+            </a:fld>
+            <a:endParaRPr lang="en-IN" dirty="0">
+              <a:latin typeface="Times New Roman" panose="02020603050405020304" pitchFamily="18" charset="0"/>
+              <a:cs typeface="Times New Roman" panose="02020603050405020304" pitchFamily="18" charset="0"/>
+            </a:endParaRPr>
+          </a:p>
+        </p:txBody>
+      </p:sp>
+      <p:sp>
+        <p:nvSpPr>
+          <p:cNvPr id="9" name="TextBox 8"/>
+          <p:cNvSpPr txBox="1"/>
+          <p:nvPr/>
+        </p:nvSpPr>
+        <p:spPr>
+          <a:xfrm>
+            <a:off x="508000" y="230000"/>
+            <a:ext cx="17272000" cy="1100000"/>
+          </a:xfrm>
+          <a:prstGeom prst="rect">
+            <a:avLst/>
+          </a:prstGeom>
+          <a:noFill/>
+        </p:spPr>
+        <p:txBody>
+          <a:bodyPr wrap="square">
+            <a:spAutoFit/>
+          </a:bodyPr>
+          <a:lstStyle/>
+          <a:p>
+            <a:pPr algn="ctr"/>
+            <a:r>
+              <a:rPr sz="6000" b="1" i="0">
+                <a:solidFill>
+                  <a:srgbClr val="1A1A1A"/>
+                </a:solidFill>
+                <a:latin typeface="Times New Roman"/>
+                <a:cs typeface="Times New Roman"/>
+              </a:rPr>
+              <a:t>Preprocessing Pipeline</a:t>
+            </a:r>
+          </a:p>
+        </p:txBody>
+      </p:sp>
+      <p:sp>
+        <p:nvSpPr>
+          <p:cNvPr id="10" name="TextBox 9"/>
+          <p:cNvSpPr txBox="1"/>
+          <p:nvPr/>
+        </p:nvSpPr>
+        <p:spPr>
+          <a:xfrm>
+            <a:off x="1257300" y="1399221"/>
+            <a:ext cx="15773400" cy="8088496"/>
+          </a:xfrm>
+          <a:prstGeom prst="rect">
+            <a:avLst/>
+          </a:prstGeom>
+          <a:noFill/>
+        </p:spPr>
+        <p:txBody>
+          <a:bodyPr wrap="square">
+            <a:spAutoFit/>
+          </a:bodyPr>
+          <a:lstStyle/>
+          <a:p>
+            <a:pPr marL="571500" indent="-571500">
+              <a:lnSpc>
+                <a:spcPct val="150000"/>
+              </a:lnSpc>
+              <a:spcAft>
+                <a:spcPts val="600"/>
+              </a:spcAft>
+              <a:buFont typeface="Arial"/>
+              <a:buChar char="•"/>
+            </a:pPr>
+            <a:r>
+              <a:rPr sz="3000" b="1" i="0" dirty="0">
+                <a:solidFill>
+                  <a:srgbClr val="1A1A1A"/>
+                </a:solidFill>
+                <a:latin typeface="Times New Roman"/>
+                <a:cs typeface="Times New Roman"/>
+              </a:rPr>
+              <a:t>Montage harmonization: </a:t>
+            </a:r>
+            <a:r>
+              <a:rPr sz="3000" b="0" i="0" dirty="0">
+                <a:solidFill>
+                  <a:srgbClr val="1A1A1A"/>
+                </a:solidFill>
+                <a:latin typeface="Times New Roman"/>
+                <a:cs typeface="Times New Roman"/>
+              </a:rPr>
+              <a:t>Both datasets mapped to an 18-channel longitudinal bipolar (double-banana) montage in a fixed anatomical order.</a:t>
+            </a:r>
+          </a:p>
+          <a:p>
+            <a:pPr marL="571500" indent="-571500">
+              <a:lnSpc>
+                <a:spcPct val="150000"/>
+              </a:lnSpc>
+              <a:spcAft>
+                <a:spcPts val="600"/>
+              </a:spcAft>
+              <a:buFont typeface="Arial"/>
+              <a:buChar char="•"/>
+            </a:pPr>
+            <a:r>
+              <a:rPr sz="3000" b="1" i="0" dirty="0">
+                <a:solidFill>
+                  <a:srgbClr val="1A1A1A"/>
+                </a:solidFill>
+                <a:latin typeface="Times New Roman"/>
+                <a:cs typeface="Times New Roman"/>
+              </a:rPr>
+              <a:t>Filtering: </a:t>
+            </a:r>
+            <a:r>
+              <a:rPr sz="3000" b="0" i="0" dirty="0">
+                <a:solidFill>
+                  <a:srgbClr val="1A1A1A"/>
+                </a:solidFill>
+                <a:latin typeface="Times New Roman"/>
+                <a:cs typeface="Times New Roman"/>
+              </a:rPr>
+              <a:t>Notch filter (60 Hz CHB-MIT / 50 Hz Siena), then 0.5–45 Hz zero-phase FIR bandpass, so that seizure-onset timing is not shifted.</a:t>
+            </a:r>
+          </a:p>
+          <a:p>
+            <a:pPr marL="571500" indent="-571500">
+              <a:lnSpc>
+                <a:spcPct val="150000"/>
+              </a:lnSpc>
+              <a:spcAft>
+                <a:spcPts val="600"/>
+              </a:spcAft>
+              <a:buFont typeface="Arial"/>
+              <a:buChar char="•"/>
+            </a:pPr>
+            <a:r>
+              <a:rPr sz="3000" b="1" i="0" dirty="0">
+                <a:solidFill>
+                  <a:srgbClr val="1A1A1A"/>
+                </a:solidFill>
+                <a:latin typeface="Times New Roman"/>
+                <a:cs typeface="Times New Roman"/>
+              </a:rPr>
+              <a:t>Resampling: </a:t>
+            </a:r>
+            <a:r>
+              <a:rPr sz="3000" b="0" i="0" dirty="0">
+                <a:solidFill>
+                  <a:srgbClr val="1A1A1A"/>
+                </a:solidFill>
+                <a:latin typeface="Times New Roman"/>
+                <a:cs typeface="Times New Roman"/>
+              </a:rPr>
+              <a:t>Siena (512 Hz) </a:t>
+            </a:r>
+            <a:r>
+              <a:rPr sz="3000" b="0" i="0" dirty="0" err="1">
+                <a:solidFill>
+                  <a:srgbClr val="1A1A1A"/>
+                </a:solidFill>
+                <a:latin typeface="Times New Roman"/>
+                <a:cs typeface="Times New Roman"/>
+              </a:rPr>
+              <a:t>downsampled</a:t>
+            </a:r>
+            <a:r>
+              <a:rPr sz="3000" b="0" i="0" dirty="0">
+                <a:solidFill>
+                  <a:srgbClr val="1A1A1A"/>
+                </a:solidFill>
+                <a:latin typeface="Times New Roman"/>
+                <a:cs typeface="Times New Roman"/>
+              </a:rPr>
+              <a:t> to 256 Hz, applied last.</a:t>
+            </a:r>
+          </a:p>
+          <a:p>
+            <a:pPr marL="571500" indent="-571500">
+              <a:lnSpc>
+                <a:spcPct val="150000"/>
+              </a:lnSpc>
+              <a:spcAft>
+                <a:spcPts val="600"/>
+              </a:spcAft>
+              <a:buFont typeface="Arial"/>
+              <a:buChar char="•"/>
+            </a:pPr>
+            <a:r>
+              <a:rPr sz="3000" b="1" i="0" dirty="0">
+                <a:solidFill>
+                  <a:srgbClr val="1A1A1A"/>
+                </a:solidFill>
+                <a:latin typeface="Times New Roman"/>
+                <a:cs typeface="Times New Roman"/>
+              </a:rPr>
+              <a:t>Stage 1 windows: </a:t>
+            </a:r>
+            <a:r>
+              <a:rPr sz="3000" b="0" i="0" dirty="0">
+                <a:solidFill>
+                  <a:srgbClr val="1A1A1A"/>
+                </a:solidFill>
+                <a:latin typeface="Times New Roman"/>
+                <a:cs typeface="Times New Roman"/>
+              </a:rPr>
+              <a:t>4 s; background stride 4 s, seizure stride 1 s; label = seizure if ≥ 50 % overlap; ±5 min around seizures excluded from the normal class.</a:t>
+            </a:r>
+          </a:p>
+          <a:p>
+            <a:pPr marL="571500" indent="-571500">
+              <a:lnSpc>
+                <a:spcPct val="150000"/>
+              </a:lnSpc>
+              <a:spcAft>
+                <a:spcPts val="600"/>
+              </a:spcAft>
+              <a:buFont typeface="Arial"/>
+              <a:buChar char="•"/>
+            </a:pPr>
+            <a:r>
+              <a:rPr sz="3000" b="1" i="0" dirty="0">
+                <a:solidFill>
+                  <a:srgbClr val="1A1A1A"/>
+                </a:solidFill>
+                <a:latin typeface="Times New Roman"/>
+                <a:cs typeface="Times New Roman"/>
+              </a:rPr>
+              <a:t>Stage 2 windows: </a:t>
+            </a:r>
+            <a:r>
+              <a:rPr sz="3000" b="0" i="0" dirty="0">
+                <a:solidFill>
+                  <a:srgbClr val="1A1A1A"/>
+                </a:solidFill>
+                <a:latin typeface="Times New Roman"/>
+                <a:cs typeface="Times New Roman"/>
+              </a:rPr>
+              <a:t>10 s with 2 s stride, Siena seizure events only.</a:t>
+            </a:r>
+          </a:p>
+          <a:p>
+            <a:pPr marL="571500" indent="-571500">
+              <a:lnSpc>
+                <a:spcPct val="150000"/>
+              </a:lnSpc>
+              <a:spcAft>
+                <a:spcPts val="600"/>
+              </a:spcAft>
+              <a:buFont typeface="Arial"/>
+              <a:buChar char="•"/>
+            </a:pPr>
+            <a:r>
+              <a:rPr sz="3000" b="1" i="0" dirty="0">
+                <a:solidFill>
+                  <a:srgbClr val="1A1A1A"/>
+                </a:solidFill>
+                <a:latin typeface="Times New Roman"/>
+                <a:cs typeface="Times New Roman"/>
+              </a:rPr>
+              <a:t>Artifact rejection: </a:t>
+            </a:r>
+            <a:r>
+              <a:rPr sz="3000" b="0" i="0" dirty="0">
+                <a:solidFill>
+                  <a:srgbClr val="1A1A1A"/>
+                </a:solidFill>
+                <a:latin typeface="Times New Roman"/>
+                <a:cs typeface="Times New Roman"/>
+              </a:rPr>
+              <a:t>Peak-to-peak threshold calibrated on the data (a fixed 500 µV cutoff would have discarded real seizures).</a:t>
+            </a:r>
+          </a:p>
+          <a:p>
+            <a:pPr marL="571500" indent="-571500">
+              <a:lnSpc>
+                <a:spcPct val="150000"/>
+              </a:lnSpc>
+              <a:spcAft>
+                <a:spcPts val="600"/>
+              </a:spcAft>
+              <a:buFont typeface="Arial"/>
+              <a:buChar char="•"/>
+            </a:pPr>
+            <a:r>
+              <a:rPr sz="3000" b="1" i="0" dirty="0">
+                <a:solidFill>
+                  <a:srgbClr val="1A1A1A"/>
+                </a:solidFill>
+                <a:latin typeface="Times New Roman"/>
+                <a:cs typeface="Times New Roman"/>
+              </a:rPr>
+              <a:t>Normalization: </a:t>
+            </a:r>
+            <a:r>
+              <a:rPr sz="3000" b="0" i="0" dirty="0">
+                <a:solidFill>
+                  <a:srgbClr val="1A1A1A"/>
+                </a:solidFill>
+                <a:latin typeface="Times New Roman"/>
+                <a:cs typeface="Times New Roman"/>
+              </a:rPr>
+              <a:t>Per-channel z-score at training time.</a:t>
+            </a:r>
+          </a:p>
+        </p:txBody>
+      </p:sp>
+    </p:spTree>
+  </p:cSld>
+  <p:clrMapOvr>
+    <a:masterClrMapping/>
+  </p:clrMapOvr>
+</p:sld>
+</file>
+
 <file path=ppt/slides/slide19.xml><?xml version="1.0" encoding="utf-8"?>
 <p:sld xmlns:a="http://schemas.openxmlformats.org/drawingml/2006/main" xmlns:r="http://schemas.openxmlformats.org/officeDocument/2006/relationships" xmlns:p="http://schemas.openxmlformats.org/presentationml/2006/main">
   <p:cSld>
@@ -19211,7 +19415,7 @@
                 <a:latin typeface="Times New Roman" panose="02020603050405020304" pitchFamily="18" charset="0"/>
                 <a:cs typeface="Times New Roman" panose="02020603050405020304" pitchFamily="18" charset="0"/>
               </a:rPr>
-              <a:t>26 October 2026</a:t>
+              <a:t>27 October 2026</a:t>
             </a:fld>
             <a:endParaRPr lang="en-US" dirty="0">
               <a:latin typeface="Times New Roman" panose="02020603050405020304" pitchFamily="18" charset="0"/>
@@ -19306,876 +19510,6 @@
                 <a:latin typeface="Times New Roman"/>
                 <a:cs typeface="Times New Roman"/>
               </a:rPr>
-              <a:t>Preprocessing Pipeline</a:t>
-            </a:r>
-          </a:p>
-        </p:txBody>
-      </p:sp>
-      <p:sp>
-        <p:nvSpPr>
-          <p:cNvPr id="10" name="TextBox 9"/>
-          <p:cNvSpPr txBox="1"/>
-          <p:nvPr/>
-        </p:nvSpPr>
-        <p:spPr>
-          <a:xfrm>
-            <a:off x="1257300" y="1750000"/>
-            <a:ext cx="15773400" cy="7400000"/>
-          </a:xfrm>
-          <a:prstGeom prst="rect">
-            <a:avLst/>
-          </a:prstGeom>
-          <a:noFill/>
-        </p:spPr>
-        <p:txBody>
-          <a:bodyPr wrap="square">
-            <a:spAutoFit/>
-          </a:bodyPr>
-          <a:lstStyle/>
-          <a:p>
-            <a:pPr marL="571500" indent="-571500">
-              <a:lnSpc>
-                <a:spcPct val="112000"/>
-              </a:lnSpc>
-              <a:spcAft>
-                <a:spcPts val="600"/>
-              </a:spcAft>
-              <a:buFont typeface="Arial"/>
-              <a:buChar char="•"/>
-            </a:pPr>
-            <a:r>
-              <a:rPr sz="3000" b="1" i="0">
-                <a:solidFill>
-                  <a:srgbClr val="1A1A1A"/>
-                </a:solidFill>
-                <a:latin typeface="Times New Roman"/>
-                <a:cs typeface="Times New Roman"/>
-              </a:rPr>
-              <a:t>Montage harmonization: </a:t>
-            </a:r>
-            <a:r>
-              <a:rPr sz="3000" b="0" i="0">
-                <a:solidFill>
-                  <a:srgbClr val="1A1A1A"/>
-                </a:solidFill>
-                <a:latin typeface="Times New Roman"/>
-                <a:cs typeface="Times New Roman"/>
-              </a:rPr>
-              <a:t>Both datasets mapped to an 18-channel longitudinal bipolar (double-banana) montage in a fixed anatomical order.</a:t>
-            </a:r>
-          </a:p>
-          <a:p>
-            <a:pPr marL="571500" indent="-571500">
-              <a:lnSpc>
-                <a:spcPct val="112000"/>
-              </a:lnSpc>
-              <a:spcAft>
-                <a:spcPts val="600"/>
-              </a:spcAft>
-              <a:buFont typeface="Arial"/>
-              <a:buChar char="•"/>
-            </a:pPr>
-            <a:r>
-              <a:rPr sz="3000" b="1" i="0">
-                <a:solidFill>
-                  <a:srgbClr val="1A1A1A"/>
-                </a:solidFill>
-                <a:latin typeface="Times New Roman"/>
-                <a:cs typeface="Times New Roman"/>
-              </a:rPr>
-              <a:t>Filtering: </a:t>
-            </a:r>
-            <a:r>
-              <a:rPr sz="3000" b="0" i="0">
-                <a:solidFill>
-                  <a:srgbClr val="1A1A1A"/>
-                </a:solidFill>
-                <a:latin typeface="Times New Roman"/>
-                <a:cs typeface="Times New Roman"/>
-              </a:rPr>
-              <a:t>Notch filter (60 Hz CHB-MIT / 50 Hz Siena), then 0.5–45 Hz zero-phase FIR bandpass, so that seizure-onset timing is not shifted.</a:t>
-            </a:r>
-          </a:p>
-          <a:p>
-            <a:pPr marL="571500" indent="-571500">
-              <a:lnSpc>
-                <a:spcPct val="112000"/>
-              </a:lnSpc>
-              <a:spcAft>
-                <a:spcPts val="600"/>
-              </a:spcAft>
-              <a:buFont typeface="Arial"/>
-              <a:buChar char="•"/>
-            </a:pPr>
-            <a:r>
-              <a:rPr sz="3000" b="1" i="0">
-                <a:solidFill>
-                  <a:srgbClr val="1A1A1A"/>
-                </a:solidFill>
-                <a:latin typeface="Times New Roman"/>
-                <a:cs typeface="Times New Roman"/>
-              </a:rPr>
-              <a:t>Resampling: </a:t>
-            </a:r>
-            <a:r>
-              <a:rPr sz="3000" b="0" i="0">
-                <a:solidFill>
-                  <a:srgbClr val="1A1A1A"/>
-                </a:solidFill>
-                <a:latin typeface="Times New Roman"/>
-                <a:cs typeface="Times New Roman"/>
-              </a:rPr>
-              <a:t>Siena (512 Hz) downsampled to 256 Hz, applied last.</a:t>
-            </a:r>
-          </a:p>
-          <a:p>
-            <a:pPr marL="571500" indent="-571500">
-              <a:lnSpc>
-                <a:spcPct val="112000"/>
-              </a:lnSpc>
-              <a:spcAft>
-                <a:spcPts val="600"/>
-              </a:spcAft>
-              <a:buFont typeface="Arial"/>
-              <a:buChar char="•"/>
-            </a:pPr>
-            <a:r>
-              <a:rPr sz="3000" b="1" i="0">
-                <a:solidFill>
-                  <a:srgbClr val="1A1A1A"/>
-                </a:solidFill>
-                <a:latin typeface="Times New Roman"/>
-                <a:cs typeface="Times New Roman"/>
-              </a:rPr>
-              <a:t>Stage 1 windows: </a:t>
-            </a:r>
-            <a:r>
-              <a:rPr sz="3000" b="0" i="0">
-                <a:solidFill>
-                  <a:srgbClr val="1A1A1A"/>
-                </a:solidFill>
-                <a:latin typeface="Times New Roman"/>
-                <a:cs typeface="Times New Roman"/>
-              </a:rPr>
-              <a:t>4 s; background stride 4 s, seizure stride 1 s; label = seizure if ≥ 50 % overlap; ±5 min around seizures excluded from the normal class.</a:t>
-            </a:r>
-          </a:p>
-          <a:p>
-            <a:pPr marL="571500" indent="-571500">
-              <a:lnSpc>
-                <a:spcPct val="112000"/>
-              </a:lnSpc>
-              <a:spcAft>
-                <a:spcPts val="600"/>
-              </a:spcAft>
-              <a:buFont typeface="Arial"/>
-              <a:buChar char="•"/>
-            </a:pPr>
-            <a:r>
-              <a:rPr sz="3000" b="1" i="0">
-                <a:solidFill>
-                  <a:srgbClr val="1A1A1A"/>
-                </a:solidFill>
-                <a:latin typeface="Times New Roman"/>
-                <a:cs typeface="Times New Roman"/>
-              </a:rPr>
-              <a:t>Stage 2 windows: </a:t>
-            </a:r>
-            <a:r>
-              <a:rPr sz="3000" b="0" i="0">
-                <a:solidFill>
-                  <a:srgbClr val="1A1A1A"/>
-                </a:solidFill>
-                <a:latin typeface="Times New Roman"/>
-                <a:cs typeface="Times New Roman"/>
-              </a:rPr>
-              <a:t>10 s with 2 s stride, Siena seizure events only.</a:t>
-            </a:r>
-          </a:p>
-          <a:p>
-            <a:pPr marL="571500" indent="-571500">
-              <a:lnSpc>
-                <a:spcPct val="112000"/>
-              </a:lnSpc>
-              <a:spcAft>
-                <a:spcPts val="600"/>
-              </a:spcAft>
-              <a:buFont typeface="Arial"/>
-              <a:buChar char="•"/>
-            </a:pPr>
-            <a:r>
-              <a:rPr sz="3000" b="1" i="0">
-                <a:solidFill>
-                  <a:srgbClr val="1A1A1A"/>
-                </a:solidFill>
-                <a:latin typeface="Times New Roman"/>
-                <a:cs typeface="Times New Roman"/>
-              </a:rPr>
-              <a:t>Artifact rejection: </a:t>
-            </a:r>
-            <a:r>
-              <a:rPr sz="3000" b="0" i="0">
-                <a:solidFill>
-                  <a:srgbClr val="1A1A1A"/>
-                </a:solidFill>
-                <a:latin typeface="Times New Roman"/>
-                <a:cs typeface="Times New Roman"/>
-              </a:rPr>
-              <a:t>Peak-to-peak threshold calibrated on the data (a fixed 500 µV cutoff would have discarded real seizures).</a:t>
-            </a:r>
-          </a:p>
-          <a:p>
-            <a:pPr marL="571500" indent="-571500">
-              <a:lnSpc>
-                <a:spcPct val="112000"/>
-              </a:lnSpc>
-              <a:spcAft>
-                <a:spcPts val="600"/>
-              </a:spcAft>
-              <a:buFont typeface="Arial"/>
-              <a:buChar char="•"/>
-            </a:pPr>
-            <a:r>
-              <a:rPr sz="3000" b="1" i="0">
-                <a:solidFill>
-                  <a:srgbClr val="1A1A1A"/>
-                </a:solidFill>
-                <a:latin typeface="Times New Roman"/>
-                <a:cs typeface="Times New Roman"/>
-              </a:rPr>
-              <a:t>Normalization: </a:t>
-            </a:r>
-            <a:r>
-              <a:rPr sz="3000" b="0" i="0">
-                <a:solidFill>
-                  <a:srgbClr val="1A1A1A"/>
-                </a:solidFill>
-                <a:latin typeface="Times New Roman"/>
-                <a:cs typeface="Times New Roman"/>
-              </a:rPr>
-              <a:t>Per-channel z-score at training time.</a:t>
-            </a:r>
-          </a:p>
-        </p:txBody>
-      </p:sp>
-    </p:spTree>
-  </p:cSld>
-  <p:clrMapOvr>
-    <a:masterClrMapping/>
-  </p:clrMapOvr>
-</p:sld>
-</file>
-
-<file path=ppt/slides/slide2.xml><?xml version="1.0" encoding="utf-8"?>
-<p:sld xmlns:a="http://schemas.openxmlformats.org/drawingml/2006/main" xmlns:r="http://schemas.openxmlformats.org/officeDocument/2006/relationships" xmlns:p="http://schemas.openxmlformats.org/presentationml/2006/main" showMasterSp="0">
-  <p:cSld>
-    <p:spTree>
-      <p:nvGrpSpPr>
-        <p:cNvPr id="1" name=""/>
-        <p:cNvGrpSpPr/>
-        <p:nvPr/>
-      </p:nvGrpSpPr>
-      <p:grpSpPr>
-        <a:xfrm>
-          <a:off x="0" y="0"/>
-          <a:ext cx="0" cy="0"/>
-          <a:chOff x="0" y="0"/>
-          <a:chExt cx="0" cy="0"/>
-        </a:xfrm>
-      </p:grpSpPr>
-      <p:sp>
-        <p:nvSpPr>
-          <p:cNvPr id="5" name="object 5"/>
-          <p:cNvSpPr txBox="1">
-            <a:spLocks noGrp="1"/>
-          </p:cNvSpPr>
-          <p:nvPr>
-            <p:ph type="title"/>
-          </p:nvPr>
-        </p:nvSpPr>
-        <p:spPr>
-          <a:xfrm>
-            <a:off x="4648200" y="-17505"/>
-            <a:ext cx="7899400" cy="1243930"/>
-          </a:xfrm>
-          <a:prstGeom prst="rect">
-            <a:avLst/>
-          </a:prstGeom>
-        </p:spPr>
-        <p:txBody>
-          <a:bodyPr vert="horz" wrap="square" lIns="0" tIns="12700" rIns="0" bIns="0" rtlCol="0">
-            <a:spAutoFit/>
-          </a:bodyPr>
-          <a:lstStyle/>
-          <a:p>
-            <a:pPr marL="12700" algn="ctr">
-              <a:lnSpc>
-                <a:spcPct val="100000"/>
-              </a:lnSpc>
-              <a:spcBef>
-                <a:spcPts val="100"/>
-              </a:spcBef>
-            </a:pPr>
-            <a:r>
-              <a:rPr lang="en-US" sz="8000" b="1" dirty="0">
-                <a:solidFill>
-                  <a:schemeClr val="bg2">
-                    <a:lumMod val="10000"/>
-                  </a:schemeClr>
-                </a:solidFill>
-                <a:latin typeface="Times New Roman" panose="02020603050405020304" pitchFamily="18" charset="0"/>
-                <a:cs typeface="Times New Roman" panose="02020603050405020304" pitchFamily="18" charset="0"/>
-              </a:rPr>
-              <a:t>Contents</a:t>
-            </a:r>
-            <a:endParaRPr sz="8000" dirty="0">
-              <a:latin typeface="Times New Roman" panose="02020603050405020304" pitchFamily="18" charset="0"/>
-              <a:cs typeface="Times New Roman" panose="02020603050405020304" pitchFamily="18" charset="0"/>
-            </a:endParaRPr>
-          </a:p>
-        </p:txBody>
-      </p:sp>
-      <p:sp>
-        <p:nvSpPr>
-          <p:cNvPr id="3" name="Date Placeholder 2"/>
-          <p:cNvSpPr>
-            <a:spLocks noGrp="1"/>
-          </p:cNvSpPr>
-          <p:nvPr>
-            <p:ph type="dt" sz="half" idx="10"/>
-          </p:nvPr>
-        </p:nvSpPr>
-        <p:spPr/>
-        <p:txBody>
-          <a:bodyPr/>
-          <a:lstStyle/>
-          <a:p>
-            <a:fld id="{31CB55A0-882F-4DF6-AC3D-AF8B081A5704}" type="datetime3">
-              <a:rPr lang="en-US" smtClean="0">
-                <a:latin typeface="Times New Roman" panose="02020603050405020304" pitchFamily="18" charset="0"/>
-                <a:cs typeface="Times New Roman" panose="02020603050405020304" pitchFamily="18" charset="0"/>
-              </a:rPr>
-              <a:t>26 October 2026</a:t>
-            </a:fld>
-            <a:endParaRPr lang="en-US" dirty="0">
-              <a:latin typeface="Times New Roman" panose="02020603050405020304" pitchFamily="18" charset="0"/>
-              <a:cs typeface="Times New Roman" panose="02020603050405020304" pitchFamily="18" charset="0"/>
-            </a:endParaRPr>
-          </a:p>
-        </p:txBody>
-      </p:sp>
-      <p:sp>
-        <p:nvSpPr>
-          <p:cNvPr id="8" name="Footer Placeholder 7"/>
-          <p:cNvSpPr>
-            <a:spLocks noGrp="1"/>
-          </p:cNvSpPr>
-          <p:nvPr>
-            <p:ph type="ftr" sz="quarter" idx="11"/>
-          </p:nvPr>
-        </p:nvSpPr>
-        <p:spPr/>
-        <p:txBody>
-          <a:bodyPr/>
-          <a:lstStyle/>
-          <a:p>
-            <a:r>
-              <a:rPr lang="en-IN" dirty="0">
-                <a:latin typeface="Times New Roman" panose="02020603050405020304" pitchFamily="18" charset="0"/>
-                <a:cs typeface="Times New Roman" panose="02020603050405020304" pitchFamily="18" charset="0"/>
-              </a:rPr>
-              <a:t>Dept of CSE</a:t>
-            </a:r>
-          </a:p>
-        </p:txBody>
-      </p:sp>
-      <p:sp>
-        <p:nvSpPr>
-          <p:cNvPr id="10" name="Slide Number Placeholder 9"/>
-          <p:cNvSpPr>
-            <a:spLocks noGrp="1"/>
-          </p:cNvSpPr>
-          <p:nvPr>
-            <p:ph type="sldNum" sz="quarter" idx="12"/>
-          </p:nvPr>
-        </p:nvSpPr>
-        <p:spPr/>
-        <p:txBody>
-          <a:bodyPr/>
-          <a:lstStyle/>
-          <a:p>
-            <a:fld id="{B6F15528-21DE-4FAA-801E-634DDDAF4B2B}" type="slidenum">
-              <a:rPr lang="en-IN" smtClean="0">
-                <a:latin typeface="Times New Roman" panose="02020603050405020304" pitchFamily="18" charset="0"/>
-                <a:cs typeface="Times New Roman" panose="02020603050405020304" pitchFamily="18" charset="0"/>
-              </a:rPr>
-              <a:pPr/>
-              <a:t>2</a:t>
-            </a:fld>
-            <a:endParaRPr lang="en-IN" dirty="0">
-              <a:latin typeface="Times New Roman" panose="02020603050405020304" pitchFamily="18" charset="0"/>
-              <a:cs typeface="Times New Roman" panose="02020603050405020304" pitchFamily="18" charset="0"/>
-            </a:endParaRPr>
-          </a:p>
-        </p:txBody>
-      </p:sp>
-      <p:sp>
-        <p:nvSpPr>
-          <p:cNvPr id="9" name="object 9"/>
-          <p:cNvSpPr txBox="1"/>
-          <p:nvPr/>
-        </p:nvSpPr>
-        <p:spPr>
-          <a:xfrm>
-            <a:off x="1143000" y="1500000"/>
-            <a:ext cx="15429230" cy="7702430"/>
-          </a:xfrm>
-          <a:prstGeom prst="rect">
-            <a:avLst/>
-          </a:prstGeom>
-        </p:spPr>
-        <p:txBody>
-          <a:bodyPr vert="horz" wrap="square" lIns="0" tIns="12700" rIns="0" bIns="0" rtlCol="0">
-            <a:spAutoFit/>
-          </a:bodyPr>
-          <a:lstStyle/>
-          <a:p>
-            <a:pPr marL="685800" indent="-685800">
-              <a:lnSpc>
-                <a:spcPct val="150000"/>
-              </a:lnSpc>
-              <a:buFont typeface="+mj-lt"/>
-              <a:buAutoNum type="arabicPeriod"/>
-              <a:tabLst>
-                <a:tab pos="14800000" algn="r"/>
-              </a:tabLst>
-            </a:pPr>
-            <a:r>
-              <a:rPr lang="en-US" sz="2400" b="1" dirty="0">
-                <a:latin typeface="Times New Roman" panose="02020603050405020304" pitchFamily="18" charset="0"/>
-                <a:cs typeface="Times New Roman" panose="02020603050405020304" pitchFamily="18" charset="0"/>
-              </a:rPr>
-              <a:t>Introduction	3</a:t>
-            </a:r>
-          </a:p>
-          <a:p>
-            <a:pPr marL="685800" indent="-685800">
-              <a:lnSpc>
-                <a:spcPct val="150000"/>
-              </a:lnSpc>
-              <a:buFont typeface="+mj-lt"/>
-              <a:buAutoNum type="arabicPeriod"/>
-              <a:tabLst>
-                <a:tab pos="14800000" algn="r"/>
-              </a:tabLst>
-            </a:pPr>
-            <a:r>
-              <a:rPr lang="en-US" sz="2400" b="1" dirty="0">
-                <a:latin typeface="Times New Roman" panose="02020603050405020304" pitchFamily="18" charset="0"/>
-                <a:cs typeface="Times New Roman" panose="02020603050405020304" pitchFamily="18" charset="0"/>
-              </a:rPr>
-              <a:t>Problem Statement	4</a:t>
-            </a:r>
-          </a:p>
-          <a:p>
-            <a:pPr marL="685800" indent="-685800">
-              <a:lnSpc>
-                <a:spcPct val="150000"/>
-              </a:lnSpc>
-              <a:buFont typeface="+mj-lt"/>
-              <a:buAutoNum type="arabicPeriod"/>
-              <a:tabLst>
-                <a:tab pos="14800000" algn="r"/>
-              </a:tabLst>
-            </a:pPr>
-            <a:r>
-              <a:rPr lang="en-US" sz="2400" b="1" dirty="0">
-                <a:latin typeface="Times New Roman" panose="02020603050405020304" pitchFamily="18" charset="0"/>
-                <a:cs typeface="Times New Roman" panose="02020603050405020304" pitchFamily="18" charset="0"/>
-              </a:rPr>
-              <a:t>Objectives	5</a:t>
-            </a:r>
-          </a:p>
-          <a:p>
-            <a:pPr marL="685800" indent="-685800">
-              <a:lnSpc>
-                <a:spcPct val="150000"/>
-              </a:lnSpc>
-              <a:buFont typeface="+mj-lt"/>
-              <a:buAutoNum type="arabicPeriod"/>
-              <a:tabLst>
-                <a:tab pos="14800000" algn="r"/>
-              </a:tabLst>
-            </a:pPr>
-            <a:r>
-              <a:rPr lang="en-US" sz="2400" b="1" dirty="0">
-                <a:latin typeface="Times New Roman" panose="02020603050405020304" pitchFamily="18" charset="0"/>
-                <a:cs typeface="Times New Roman" panose="02020603050405020304" pitchFamily="18" charset="0"/>
-              </a:rPr>
-              <a:t>Literature Survey	6–14</a:t>
-            </a:r>
-          </a:p>
-          <a:p>
-            <a:pPr marL="685800" indent="-685800">
-              <a:lnSpc>
-                <a:spcPct val="150000"/>
-              </a:lnSpc>
-              <a:buFont typeface="+mj-lt"/>
-              <a:buAutoNum type="arabicPeriod"/>
-              <a:tabLst>
-                <a:tab pos="14800000" algn="r"/>
-              </a:tabLst>
-            </a:pPr>
-            <a:r>
-              <a:rPr lang="en-US" sz="2400" b="1" dirty="0">
-                <a:latin typeface="Times New Roman" panose="02020603050405020304" pitchFamily="18" charset="0"/>
-                <a:cs typeface="Times New Roman" panose="02020603050405020304" pitchFamily="18" charset="0"/>
-              </a:rPr>
-              <a:t>Architecture Diagram	15</a:t>
-            </a:r>
-          </a:p>
-          <a:p>
-            <a:pPr marL="685800" indent="-685800">
-              <a:lnSpc>
-                <a:spcPct val="150000"/>
-              </a:lnSpc>
-              <a:buFont typeface="+mj-lt"/>
-              <a:buAutoNum type="arabicPeriod"/>
-              <a:tabLst>
-                <a:tab pos="14800000" algn="r"/>
-              </a:tabLst>
-            </a:pPr>
-            <a:r>
-              <a:rPr lang="en-US" sz="2400" b="1" dirty="0">
-                <a:latin typeface="Times New Roman" panose="02020603050405020304" pitchFamily="18" charset="0"/>
-                <a:cs typeface="Times New Roman" panose="02020603050405020304" pitchFamily="18" charset="0"/>
-              </a:rPr>
-              <a:t>Expected Outcomes	16</a:t>
-            </a:r>
-          </a:p>
-          <a:p>
-            <a:pPr marL="685800" indent="-685800">
-              <a:lnSpc>
-                <a:spcPct val="150000"/>
-              </a:lnSpc>
-              <a:buFont typeface="+mj-lt"/>
-              <a:buAutoNum type="arabicPeriod"/>
-              <a:tabLst>
-                <a:tab pos="14800000" algn="r"/>
-              </a:tabLst>
-            </a:pPr>
-            <a:r>
-              <a:rPr lang="en-US" sz="2400" b="1" dirty="0">
-                <a:latin typeface="Times New Roman" panose="02020603050405020304" pitchFamily="18" charset="0"/>
-                <a:cs typeface="Times New Roman" panose="02020603050405020304" pitchFamily="18" charset="0"/>
-              </a:rPr>
-              <a:t>System Architecture	17</a:t>
-            </a:r>
-          </a:p>
-          <a:p>
-            <a:pPr marL="685800" indent="-685800">
-              <a:lnSpc>
-                <a:spcPct val="150000"/>
-              </a:lnSpc>
-              <a:buFont typeface="+mj-lt"/>
-              <a:buAutoNum type="arabicPeriod"/>
-              <a:tabLst>
-                <a:tab pos="14800000" algn="r"/>
-              </a:tabLst>
-            </a:pPr>
-            <a:r>
-              <a:rPr lang="en-US" sz="2400" b="1" dirty="0">
-                <a:latin typeface="Times New Roman" panose="02020603050405020304" pitchFamily="18" charset="0"/>
-                <a:cs typeface="Times New Roman" panose="02020603050405020304" pitchFamily="18" charset="0"/>
-              </a:rPr>
-              <a:t>Datasets &amp; Preprocessing	18–19</a:t>
-            </a:r>
-          </a:p>
-          <a:p>
-            <a:pPr marL="685800" indent="-685800">
-              <a:lnSpc>
-                <a:spcPct val="150000"/>
-              </a:lnSpc>
-              <a:buFont typeface="+mj-lt"/>
-              <a:buAutoNum type="arabicPeriod"/>
-              <a:tabLst>
-                <a:tab pos="14800000" algn="r"/>
-              </a:tabLst>
-            </a:pPr>
-            <a:r>
-              <a:rPr lang="en-US" sz="2400" b="1" dirty="0">
-                <a:latin typeface="Times New Roman" panose="02020603050405020304" pitchFamily="18" charset="0"/>
-                <a:cs typeface="Times New Roman" panose="02020603050405020304" pitchFamily="18" charset="0"/>
-              </a:rPr>
-              <a:t>Model Design (CRNN, Training, Dual-Embedding, SMOTE)	20–23</a:t>
-            </a:r>
-          </a:p>
-          <a:p>
-            <a:pPr marL="685800" indent="-685800">
-              <a:lnSpc>
-                <a:spcPct val="150000"/>
-              </a:lnSpc>
-              <a:buFont typeface="+mj-lt"/>
-              <a:buAutoNum type="arabicPeriod"/>
-              <a:tabLst>
-                <a:tab pos="14800000" algn="r"/>
-              </a:tabLst>
-            </a:pPr>
-            <a:r>
-              <a:rPr lang="en-US" sz="2400" b="1" dirty="0">
-                <a:latin typeface="Times New Roman" panose="02020603050405020304" pitchFamily="18" charset="0"/>
-                <a:cs typeface="Times New Roman" panose="02020603050405020304" pitchFamily="18" charset="0"/>
-              </a:rPr>
-              <a:t>Models Compared &amp; Implementation	24–25</a:t>
-            </a:r>
-          </a:p>
-          <a:p>
-            <a:pPr marL="685800" indent="-685800">
-              <a:lnSpc>
-                <a:spcPct val="150000"/>
-              </a:lnSpc>
-              <a:buFont typeface="+mj-lt"/>
-              <a:buAutoNum type="arabicPeriod"/>
-              <a:tabLst>
-                <a:tab pos="14800000" algn="r"/>
-              </a:tabLst>
-            </a:pPr>
-            <a:r>
-              <a:rPr lang="en-US" sz="2400" b="1" dirty="0">
-                <a:latin typeface="Times New Roman" panose="02020603050405020304" pitchFamily="18" charset="0"/>
-                <a:cs typeface="Times New Roman" panose="02020603050405020304" pitchFamily="18" charset="0"/>
-              </a:rPr>
-              <a:t>Results &amp; Comparisons	26–36</a:t>
-            </a:r>
-          </a:p>
-          <a:p>
-            <a:pPr marL="685800" indent="-685800">
-              <a:lnSpc>
-                <a:spcPct val="150000"/>
-              </a:lnSpc>
-              <a:buFont typeface="+mj-lt"/>
-              <a:buAutoNum type="arabicPeriod"/>
-              <a:tabLst>
-                <a:tab pos="14800000" algn="r"/>
-              </a:tabLst>
-            </a:pPr>
-            <a:r>
-              <a:rPr lang="en-US" sz="2400" b="1" dirty="0">
-                <a:latin typeface="Times New Roman" panose="02020603050405020304" pitchFamily="18" charset="0"/>
-                <a:cs typeface="Times New Roman" panose="02020603050405020304" pitchFamily="18" charset="0"/>
-              </a:rPr>
-              <a:t>Limitations &amp; Future Enhancements	37</a:t>
-            </a:r>
-          </a:p>
-          <a:p>
-            <a:pPr marL="685800" indent="-685800">
-              <a:lnSpc>
-                <a:spcPct val="150000"/>
-              </a:lnSpc>
-              <a:buFont typeface="+mj-lt"/>
-              <a:buAutoNum type="arabicPeriod"/>
-              <a:tabLst>
-                <a:tab pos="14800000" algn="r"/>
-              </a:tabLst>
-            </a:pPr>
-            <a:r>
-              <a:rPr lang="en-US" sz="2400" b="1" dirty="0">
-                <a:latin typeface="Times New Roman" panose="02020603050405020304" pitchFamily="18" charset="0"/>
-                <a:cs typeface="Times New Roman" panose="02020603050405020304" pitchFamily="18" charset="0"/>
-              </a:rPr>
-              <a:t>Conclusion	38</a:t>
-            </a:r>
-          </a:p>
-          <a:p>
-            <a:pPr marL="685800" indent="-685800">
-              <a:lnSpc>
-                <a:spcPct val="150000"/>
-              </a:lnSpc>
-              <a:buFont typeface="+mj-lt"/>
-              <a:buAutoNum type="arabicPeriod"/>
-              <a:tabLst>
-                <a:tab pos="14800000" algn="r"/>
-              </a:tabLst>
-            </a:pPr>
-            <a:r>
-              <a:rPr lang="en-US" sz="2400" b="1" dirty="0">
-                <a:latin typeface="Times New Roman" panose="02020603050405020304" pitchFamily="18" charset="0"/>
-                <a:cs typeface="Times New Roman" panose="02020603050405020304" pitchFamily="18" charset="0"/>
-              </a:rPr>
-              <a:t>References	39–48</a:t>
-            </a:r>
-          </a:p>
-        </p:txBody>
-      </p:sp>
-      <p:sp>
-        <p:nvSpPr>
-          <p:cNvPr id="4" name="Text Box 3"/>
-          <p:cNvSpPr txBox="1"/>
-          <p:nvPr/>
-        </p:nvSpPr>
-        <p:spPr>
-          <a:xfrm>
-            <a:off x="1591310" y="4784725"/>
-            <a:ext cx="184731" cy="369332"/>
-          </a:xfrm>
-          <a:prstGeom prst="rect">
-            <a:avLst/>
-          </a:prstGeom>
-          <a:noFill/>
-        </p:spPr>
-        <p:txBody>
-          <a:bodyPr wrap="none" rtlCol="0">
-            <a:spAutoFit/>
-          </a:bodyPr>
-          <a:lstStyle/>
-          <a:p>
-            <a:endParaRPr lang="en-US">
-              <a:latin typeface="Times New Roman" panose="02020603050405020304" pitchFamily="18" charset="0"/>
-              <a:cs typeface="Times New Roman" panose="02020603050405020304" pitchFamily="18" charset="0"/>
-            </a:endParaRPr>
-          </a:p>
-        </p:txBody>
-      </p:sp>
-    </p:spTree>
-  </p:cSld>
-  <p:clrMapOvr>
-    <a:masterClrMapping/>
-  </p:clrMapOvr>
-</p:sld>
-</file>
-
-<file path=ppt/slides/slide20.xml><?xml version="1.0" encoding="utf-8"?>
-<p:sld xmlns:a="http://schemas.openxmlformats.org/drawingml/2006/main" xmlns:r="http://schemas.openxmlformats.org/officeDocument/2006/relationships" xmlns:p="http://schemas.openxmlformats.org/presentationml/2006/main">
-  <p:cSld>
-    <p:spTree>
-      <p:nvGrpSpPr>
-        <p:cNvPr id="1" name=""/>
-        <p:cNvGrpSpPr/>
-        <p:nvPr/>
-      </p:nvGrpSpPr>
-      <p:grpSpPr>
-        <a:xfrm>
-          <a:off x="0" y="0"/>
-          <a:ext cx="0" cy="0"/>
-          <a:chOff x="0" y="0"/>
-          <a:chExt cx="0" cy="0"/>
-        </a:xfrm>
-      </p:grpSpPr>
-      <p:sp>
-        <p:nvSpPr>
-          <p:cNvPr id="3" name="Date Placeholder 2"/>
-          <p:cNvSpPr>
-            <a:spLocks noGrp="1"/>
-          </p:cNvSpPr>
-          <p:nvPr>
-            <p:ph type="dt" sz="half" idx="10"/>
-          </p:nvPr>
-        </p:nvSpPr>
-        <p:spPr/>
-        <p:txBody>
-          <a:bodyPr/>
-          <a:lstStyle/>
-          <a:p>
-            <a:fld id="{79B7A7E6-0BB5-4562-B4D8-B2D95118667A}" type="datetime3">
-              <a:rPr lang="en-US" smtClean="0">
-                <a:latin typeface="Times New Roman" panose="02020603050405020304" pitchFamily="18" charset="0"/>
-                <a:cs typeface="Times New Roman" panose="02020603050405020304" pitchFamily="18" charset="0"/>
-              </a:rPr>
-              <a:t>26 October 2026</a:t>
-            </a:fld>
-            <a:endParaRPr lang="en-US" dirty="0">
-              <a:latin typeface="Times New Roman" panose="02020603050405020304" pitchFamily="18" charset="0"/>
-              <a:cs typeface="Times New Roman" panose="02020603050405020304" pitchFamily="18" charset="0"/>
-            </a:endParaRPr>
-          </a:p>
-        </p:txBody>
-      </p:sp>
-      <p:sp>
-        <p:nvSpPr>
-          <p:cNvPr id="7" name="Footer Placeholder 6"/>
-          <p:cNvSpPr>
-            <a:spLocks noGrp="1"/>
-          </p:cNvSpPr>
-          <p:nvPr>
-            <p:ph type="ftr" sz="quarter" idx="11"/>
-          </p:nvPr>
-        </p:nvSpPr>
-        <p:spPr/>
-        <p:txBody>
-          <a:bodyPr/>
-          <a:lstStyle/>
-          <a:p>
-            <a:r>
-              <a:rPr lang="en-IN" dirty="0">
-                <a:latin typeface="Times New Roman" panose="02020603050405020304" pitchFamily="18" charset="0"/>
-                <a:cs typeface="Times New Roman" panose="02020603050405020304" pitchFamily="18" charset="0"/>
-              </a:rPr>
-              <a:t>Dept of CSE </a:t>
-            </a:r>
-          </a:p>
-        </p:txBody>
-      </p:sp>
-      <p:sp>
-        <p:nvSpPr>
-          <p:cNvPr id="8" name="Slide Number Placeholder 7"/>
-          <p:cNvSpPr>
-            <a:spLocks noGrp="1"/>
-          </p:cNvSpPr>
-          <p:nvPr>
-            <p:ph type="sldNum" sz="quarter" idx="12"/>
-          </p:nvPr>
-        </p:nvSpPr>
-        <p:spPr/>
-        <p:txBody>
-          <a:bodyPr/>
-          <a:lstStyle/>
-          <a:p>
-            <a:fld id="{B6F15528-21DE-4FAA-801E-634DDDAF4B2B}" type="slidenum">
-              <a:rPr lang="en-IN" smtClean="0">
-                <a:latin typeface="Times New Roman" panose="02020603050405020304" pitchFamily="18" charset="0"/>
-                <a:cs typeface="Times New Roman" panose="02020603050405020304" pitchFamily="18" charset="0"/>
-              </a:rPr>
-              <a:pPr/>
-              <a:t>20</a:t>
-            </a:fld>
-            <a:endParaRPr lang="en-IN" dirty="0">
-              <a:latin typeface="Times New Roman" panose="02020603050405020304" pitchFamily="18" charset="0"/>
-              <a:cs typeface="Times New Roman" panose="02020603050405020304" pitchFamily="18" charset="0"/>
-            </a:endParaRPr>
-          </a:p>
-        </p:txBody>
-      </p:sp>
-      <p:sp>
-        <p:nvSpPr>
-          <p:cNvPr id="9" name="TextBox 8"/>
-          <p:cNvSpPr txBox="1"/>
-          <p:nvPr/>
-        </p:nvSpPr>
-        <p:spPr>
-          <a:xfrm>
-            <a:off x="508000" y="230000"/>
-            <a:ext cx="17272000" cy="1100000"/>
-          </a:xfrm>
-          <a:prstGeom prst="rect">
-            <a:avLst/>
-          </a:prstGeom>
-          <a:noFill/>
-        </p:spPr>
-        <p:txBody>
-          <a:bodyPr wrap="square">
-            <a:spAutoFit/>
-          </a:bodyPr>
-          <a:lstStyle/>
-          <a:p>
-            <a:pPr algn="ctr"/>
-            <a:r>
-              <a:rPr sz="6000" b="1" i="0">
-                <a:solidFill>
-                  <a:srgbClr val="1A1A1A"/>
-                </a:solidFill>
-                <a:latin typeface="Times New Roman"/>
-                <a:cs typeface="Times New Roman"/>
-              </a:rPr>
               <a:t>CRNN Backbone</a:t>
             </a:r>
           </a:p>
@@ -20187,10 +19521,16 @@
           <p:cNvGraphicFramePr>
             <a:graphicFrameLocks noGrp="1"/>
           </p:cNvGraphicFramePr>
-          <p:nvPr/>
+          <p:nvPr>
+            <p:extLst>
+              <p:ext uri="{D42A27DB-BD31-4B8C-83A1-F6EECF244321}">
+                <p14:modId xmlns:p14="http://schemas.microsoft.com/office/powerpoint/2010/main" val="1298848728"/>
+              </p:ext>
+            </p:extLst>
+          </p:nvPr>
         </p:nvGraphicFramePr>
         <p:xfrm>
-          <a:off x="1257300" y="1650000"/>
+          <a:off x="4344000" y="1642156"/>
           <a:ext cx="9599999" cy="4962000"/>
         </p:xfrm>
         <a:graphic>
@@ -20326,7 +19666,7 @@
                     <a:p>
                       <a:pPr algn="ctr"/>
                       <a:r>
-                        <a:rPr sz="2200" b="1" i="0">
+                        <a:rPr sz="2200" b="1" i="0" dirty="0">
                           <a:solidFill>
                             <a:srgbClr val="1A1A1A"/>
                           </a:solidFill>
@@ -21232,7 +20572,7 @@
                     <a:p>
                       <a:pPr algn="ctr"/>
                       <a:r>
-                        <a:rPr sz="2200" b="0" i="0">
+                        <a:rPr sz="2200" b="0" i="0" dirty="0">
                           <a:solidFill>
                             <a:srgbClr val="1A1A1A"/>
                           </a:solidFill>
@@ -21291,8 +20631,8 @@
         </p:nvSpPr>
         <p:spPr>
           <a:xfrm>
-            <a:off x="11200000" y="1650000"/>
-            <a:ext cx="5900000" cy="7400000"/>
+            <a:off x="1188000" y="6916312"/>
+            <a:ext cx="15842700" cy="2658677"/>
           </a:xfrm>
           <a:prstGeom prst="rect">
             <a:avLst/>
@@ -21394,42 +20734,6 @@
           </a:p>
         </p:txBody>
       </p:sp>
-      <p:sp>
-        <p:nvSpPr>
-          <p:cNvPr id="12" name="TextBox 11"/>
-          <p:cNvSpPr txBox="1"/>
-          <p:nvPr/>
-        </p:nvSpPr>
-        <p:spPr>
-          <a:xfrm>
-            <a:off x="1257300" y="7000000"/>
-            <a:ext cx="15773400" cy="600000"/>
-          </a:xfrm>
-          <a:prstGeom prst="rect">
-            <a:avLst/>
-          </a:prstGeom>
-          <a:noFill/>
-        </p:spPr>
-        <p:txBody>
-          <a:bodyPr wrap="square">
-            <a:spAutoFit/>
-          </a:bodyPr>
-          <a:lstStyle/>
-          <a:p>
-            <a:pPr algn="ctr"/>
-            <a:r>
-              <a:rPr sz="2600" b="0" i="1">
-                <a:solidFill>
-                  <a:srgbClr val="1A1A1A"/>
-                </a:solidFill>
-                <a:latin typeface="Times New Roman"/>
-                <a:cs typeface="Times New Roman"/>
-              </a:rPr>
-              <a:t>Detection head: focal loss (γ = 2), balanced sampling, Adam with ReduceLROnPlateau, 25 epochs.</a:t>
-            </a:r>
-          </a:p>
-        </p:txBody>
-      </p:sp>
     </p:spTree>
   </p:cSld>
   <p:clrMapOvr>
@@ -21438,7 +20742,466 @@
 </p:sld>
 </file>
 
-<file path=ppt/slides/slide21.xml><?xml version="1.0" encoding="utf-8"?>
+<file path=ppt/slides/slide2.xml><?xml version="1.0" encoding="utf-8"?>
+<p:sld xmlns:a="http://schemas.openxmlformats.org/drawingml/2006/main" xmlns:r="http://schemas.openxmlformats.org/officeDocument/2006/relationships" xmlns:p="http://schemas.openxmlformats.org/presentationml/2006/main" showMasterSp="0">
+  <p:cSld>
+    <p:spTree>
+      <p:nvGrpSpPr>
+        <p:cNvPr id="1" name=""/>
+        <p:cNvGrpSpPr/>
+        <p:nvPr/>
+      </p:nvGrpSpPr>
+      <p:grpSpPr>
+        <a:xfrm>
+          <a:off x="0" y="0"/>
+          <a:ext cx="0" cy="0"/>
+          <a:chOff x="0" y="0"/>
+          <a:chExt cx="0" cy="0"/>
+        </a:xfrm>
+      </p:grpSpPr>
+      <p:sp>
+        <p:nvSpPr>
+          <p:cNvPr id="5" name="object 5"/>
+          <p:cNvSpPr txBox="1">
+            <a:spLocks noGrp="1"/>
+          </p:cNvSpPr>
+          <p:nvPr>
+            <p:ph type="title"/>
+          </p:nvPr>
+        </p:nvSpPr>
+        <p:spPr>
+          <a:xfrm>
+            <a:off x="4648200" y="-17505"/>
+            <a:ext cx="7899400" cy="1243930"/>
+          </a:xfrm>
+          <a:prstGeom prst="rect">
+            <a:avLst/>
+          </a:prstGeom>
+        </p:spPr>
+        <p:txBody>
+          <a:bodyPr vert="horz" wrap="square" lIns="0" tIns="12700" rIns="0" bIns="0" rtlCol="0">
+            <a:spAutoFit/>
+          </a:bodyPr>
+          <a:lstStyle/>
+          <a:p>
+            <a:pPr marL="12700" algn="ctr">
+              <a:lnSpc>
+                <a:spcPct val="100000"/>
+              </a:lnSpc>
+              <a:spcBef>
+                <a:spcPts val="100"/>
+              </a:spcBef>
+            </a:pPr>
+            <a:r>
+              <a:rPr lang="en-US" sz="8000" b="1" dirty="0">
+                <a:solidFill>
+                  <a:schemeClr val="bg2">
+                    <a:lumMod val="10000"/>
+                  </a:schemeClr>
+                </a:solidFill>
+                <a:latin typeface="Times New Roman" panose="02020603050405020304" pitchFamily="18" charset="0"/>
+                <a:cs typeface="Times New Roman" panose="02020603050405020304" pitchFamily="18" charset="0"/>
+              </a:rPr>
+              <a:t>Contents</a:t>
+            </a:r>
+            <a:endParaRPr sz="8000" dirty="0">
+              <a:latin typeface="Times New Roman" panose="02020603050405020304" pitchFamily="18" charset="0"/>
+              <a:cs typeface="Times New Roman" panose="02020603050405020304" pitchFamily="18" charset="0"/>
+            </a:endParaRPr>
+          </a:p>
+        </p:txBody>
+      </p:sp>
+      <p:sp>
+        <p:nvSpPr>
+          <p:cNvPr id="3" name="Date Placeholder 2"/>
+          <p:cNvSpPr>
+            <a:spLocks noGrp="1"/>
+          </p:cNvSpPr>
+          <p:nvPr>
+            <p:ph type="dt" sz="half" idx="10"/>
+          </p:nvPr>
+        </p:nvSpPr>
+        <p:spPr/>
+        <p:txBody>
+          <a:bodyPr/>
+          <a:lstStyle/>
+          <a:p>
+            <a:fld id="{31CB55A0-882F-4DF6-AC3D-AF8B081A5704}" type="datetime3">
+              <a:rPr lang="en-US" smtClean="0">
+                <a:latin typeface="Times New Roman" panose="02020603050405020304" pitchFamily="18" charset="0"/>
+                <a:cs typeface="Times New Roman" panose="02020603050405020304" pitchFamily="18" charset="0"/>
+              </a:rPr>
+              <a:t>27 October 2026</a:t>
+            </a:fld>
+            <a:endParaRPr lang="en-US" dirty="0">
+              <a:latin typeface="Times New Roman" panose="02020603050405020304" pitchFamily="18" charset="0"/>
+              <a:cs typeface="Times New Roman" panose="02020603050405020304" pitchFamily="18" charset="0"/>
+            </a:endParaRPr>
+          </a:p>
+        </p:txBody>
+      </p:sp>
+      <p:sp>
+        <p:nvSpPr>
+          <p:cNvPr id="8" name="Footer Placeholder 7"/>
+          <p:cNvSpPr>
+            <a:spLocks noGrp="1"/>
+          </p:cNvSpPr>
+          <p:nvPr>
+            <p:ph type="ftr" sz="quarter" idx="11"/>
+          </p:nvPr>
+        </p:nvSpPr>
+        <p:spPr/>
+        <p:txBody>
+          <a:bodyPr/>
+          <a:lstStyle/>
+          <a:p>
+            <a:r>
+              <a:rPr lang="en-IN" dirty="0">
+                <a:latin typeface="Times New Roman" panose="02020603050405020304" pitchFamily="18" charset="0"/>
+                <a:cs typeface="Times New Roman" panose="02020603050405020304" pitchFamily="18" charset="0"/>
+              </a:rPr>
+              <a:t>Dept of CSE</a:t>
+            </a:r>
+          </a:p>
+        </p:txBody>
+      </p:sp>
+      <p:sp>
+        <p:nvSpPr>
+          <p:cNvPr id="10" name="Slide Number Placeholder 9"/>
+          <p:cNvSpPr>
+            <a:spLocks noGrp="1"/>
+          </p:cNvSpPr>
+          <p:nvPr>
+            <p:ph type="sldNum" sz="quarter" idx="12"/>
+          </p:nvPr>
+        </p:nvSpPr>
+        <p:spPr/>
+        <p:txBody>
+          <a:bodyPr/>
+          <a:lstStyle/>
+          <a:p>
+            <a:fld id="{B6F15528-21DE-4FAA-801E-634DDDAF4B2B}" type="slidenum">
+              <a:rPr lang="en-IN" smtClean="0">
+                <a:latin typeface="Times New Roman" panose="02020603050405020304" pitchFamily="18" charset="0"/>
+                <a:cs typeface="Times New Roman" panose="02020603050405020304" pitchFamily="18" charset="0"/>
+              </a:rPr>
+              <a:pPr/>
+              <a:t>2</a:t>
+            </a:fld>
+            <a:endParaRPr lang="en-IN" dirty="0">
+              <a:latin typeface="Times New Roman" panose="02020603050405020304" pitchFamily="18" charset="0"/>
+              <a:cs typeface="Times New Roman" panose="02020603050405020304" pitchFamily="18" charset="0"/>
+            </a:endParaRPr>
+          </a:p>
+        </p:txBody>
+      </p:sp>
+      <p:sp>
+        <p:nvSpPr>
+          <p:cNvPr id="9" name="object 9"/>
+          <p:cNvSpPr txBox="1"/>
+          <p:nvPr/>
+        </p:nvSpPr>
+        <p:spPr>
+          <a:xfrm>
+            <a:off x="1143000" y="1500000"/>
+            <a:ext cx="15429230" cy="7148432"/>
+          </a:xfrm>
+          <a:prstGeom prst="rect">
+            <a:avLst/>
+          </a:prstGeom>
+        </p:spPr>
+        <p:txBody>
+          <a:bodyPr vert="horz" wrap="square" lIns="0" tIns="12700" rIns="0" bIns="0" rtlCol="0">
+            <a:spAutoFit/>
+          </a:bodyPr>
+          <a:lstStyle/>
+          <a:p>
+            <a:pPr marL="685800" indent="-685800">
+              <a:lnSpc>
+                <a:spcPct val="150000"/>
+              </a:lnSpc>
+              <a:buFont typeface="+mj-lt"/>
+              <a:buAutoNum type="arabicPeriod"/>
+              <a:tabLst>
+                <a:tab pos="14800000" algn="r"/>
+              </a:tabLst>
+            </a:pPr>
+            <a:r>
+              <a:rPr lang="en-US" sz="2400" b="1" dirty="0">
+                <a:latin typeface="Times New Roman" panose="02020603050405020304" pitchFamily="18" charset="0"/>
+                <a:cs typeface="Times New Roman" panose="02020603050405020304" pitchFamily="18" charset="0"/>
+              </a:rPr>
+              <a:t>Introduction	3</a:t>
+            </a:r>
+          </a:p>
+          <a:p>
+            <a:pPr marL="685800" indent="-685800">
+              <a:lnSpc>
+                <a:spcPct val="150000"/>
+              </a:lnSpc>
+              <a:buFont typeface="+mj-lt"/>
+              <a:buAutoNum type="arabicPeriod"/>
+              <a:tabLst>
+                <a:tab pos="14800000" algn="r"/>
+              </a:tabLst>
+            </a:pPr>
+            <a:r>
+              <a:rPr lang="en-US" sz="2400" b="1" dirty="0">
+                <a:latin typeface="Times New Roman" panose="02020603050405020304" pitchFamily="18" charset="0"/>
+                <a:cs typeface="Times New Roman" panose="02020603050405020304" pitchFamily="18" charset="0"/>
+              </a:rPr>
+              <a:t>Problem Statement	4</a:t>
+            </a:r>
+          </a:p>
+          <a:p>
+            <a:pPr marL="685800" indent="-685800">
+              <a:lnSpc>
+                <a:spcPct val="150000"/>
+              </a:lnSpc>
+              <a:buFont typeface="+mj-lt"/>
+              <a:buAutoNum type="arabicPeriod"/>
+              <a:tabLst>
+                <a:tab pos="14800000" algn="r"/>
+              </a:tabLst>
+            </a:pPr>
+            <a:r>
+              <a:rPr lang="en-US" sz="2400" b="1" dirty="0">
+                <a:latin typeface="Times New Roman" panose="02020603050405020304" pitchFamily="18" charset="0"/>
+                <a:cs typeface="Times New Roman" panose="02020603050405020304" pitchFamily="18" charset="0"/>
+              </a:rPr>
+              <a:t>Objectives	5</a:t>
+            </a:r>
+          </a:p>
+          <a:p>
+            <a:pPr marL="685800" indent="-685800">
+              <a:lnSpc>
+                <a:spcPct val="150000"/>
+              </a:lnSpc>
+              <a:buFont typeface="+mj-lt"/>
+              <a:buAutoNum type="arabicPeriod"/>
+              <a:tabLst>
+                <a:tab pos="14800000" algn="r"/>
+              </a:tabLst>
+            </a:pPr>
+            <a:r>
+              <a:rPr lang="en-US" sz="2400" b="1" dirty="0">
+                <a:latin typeface="Times New Roman" panose="02020603050405020304" pitchFamily="18" charset="0"/>
+                <a:cs typeface="Times New Roman" panose="02020603050405020304" pitchFamily="18" charset="0"/>
+              </a:rPr>
+              <a:t>Literature Survey	6–14</a:t>
+            </a:r>
+          </a:p>
+          <a:p>
+            <a:pPr marL="685800" indent="-685800">
+              <a:lnSpc>
+                <a:spcPct val="150000"/>
+              </a:lnSpc>
+              <a:buFont typeface="+mj-lt"/>
+              <a:buAutoNum type="arabicPeriod"/>
+              <a:tabLst>
+                <a:tab pos="14800000" algn="r"/>
+              </a:tabLst>
+            </a:pPr>
+            <a:r>
+              <a:rPr lang="en-US" sz="2400" b="1" dirty="0">
+                <a:latin typeface="Times New Roman" panose="02020603050405020304" pitchFamily="18" charset="0"/>
+                <a:cs typeface="Times New Roman" panose="02020603050405020304" pitchFamily="18" charset="0"/>
+              </a:rPr>
+              <a:t>Architecture Diagram	15</a:t>
+            </a:r>
+          </a:p>
+          <a:p>
+            <a:pPr marL="685800" indent="-685800">
+              <a:lnSpc>
+                <a:spcPct val="150000"/>
+              </a:lnSpc>
+              <a:buFont typeface="+mj-lt"/>
+              <a:buAutoNum type="arabicPeriod"/>
+              <a:tabLst>
+                <a:tab pos="14800000" algn="r"/>
+              </a:tabLst>
+            </a:pPr>
+            <a:r>
+              <a:rPr lang="en-US" sz="2400" b="1" dirty="0">
+                <a:latin typeface="Times New Roman" panose="02020603050405020304" pitchFamily="18" charset="0"/>
+                <a:cs typeface="Times New Roman" panose="02020603050405020304" pitchFamily="18" charset="0"/>
+              </a:rPr>
+              <a:t>System Architecture	16</a:t>
+            </a:r>
+          </a:p>
+          <a:p>
+            <a:pPr marL="685800" indent="-685800">
+              <a:lnSpc>
+                <a:spcPct val="150000"/>
+              </a:lnSpc>
+              <a:buFont typeface="+mj-lt"/>
+              <a:buAutoNum type="arabicPeriod"/>
+              <a:tabLst>
+                <a:tab pos="14800000" algn="r"/>
+              </a:tabLst>
+            </a:pPr>
+            <a:r>
+              <a:rPr lang="en-US" sz="2400" b="1" dirty="0">
+                <a:latin typeface="Times New Roman" panose="02020603050405020304" pitchFamily="18" charset="0"/>
+                <a:cs typeface="Times New Roman" panose="02020603050405020304" pitchFamily="18" charset="0"/>
+              </a:rPr>
+              <a:t>Datasets &amp; Preprocessing	17–18</a:t>
+            </a:r>
+          </a:p>
+          <a:p>
+            <a:pPr marL="685800" indent="-685800">
+              <a:lnSpc>
+                <a:spcPct val="150000"/>
+              </a:lnSpc>
+              <a:buFont typeface="+mj-lt"/>
+              <a:buAutoNum type="arabicPeriod"/>
+              <a:tabLst>
+                <a:tab pos="14800000" algn="r"/>
+              </a:tabLst>
+            </a:pPr>
+            <a:r>
+              <a:rPr lang="en-US" sz="2400" b="1" dirty="0">
+                <a:latin typeface="Times New Roman" panose="02020603050405020304" pitchFamily="18" charset="0"/>
+                <a:cs typeface="Times New Roman" panose="02020603050405020304" pitchFamily="18" charset="0"/>
+              </a:rPr>
+              <a:t>Model Design (CRNN, Training, Dual-Embedding, SMOTE)	19–22</a:t>
+            </a:r>
+          </a:p>
+          <a:p>
+            <a:pPr marL="685800" indent="-685800">
+              <a:lnSpc>
+                <a:spcPct val="150000"/>
+              </a:lnSpc>
+              <a:buFont typeface="+mj-lt"/>
+              <a:buAutoNum type="arabicPeriod"/>
+              <a:tabLst>
+                <a:tab pos="14800000" algn="r"/>
+              </a:tabLst>
+            </a:pPr>
+            <a:r>
+              <a:rPr lang="en-US" sz="2400" b="1" dirty="0">
+                <a:latin typeface="Times New Roman" panose="02020603050405020304" pitchFamily="18" charset="0"/>
+                <a:cs typeface="Times New Roman" panose="02020603050405020304" pitchFamily="18" charset="0"/>
+              </a:rPr>
+              <a:t>Models Compared &amp; Implementation	23–24</a:t>
+            </a:r>
+          </a:p>
+          <a:p>
+            <a:pPr marL="685800" indent="-685800">
+              <a:lnSpc>
+                <a:spcPct val="150000"/>
+              </a:lnSpc>
+              <a:buFont typeface="+mj-lt"/>
+              <a:buAutoNum type="arabicPeriod"/>
+              <a:tabLst>
+                <a:tab pos="14800000" algn="r"/>
+              </a:tabLst>
+            </a:pPr>
+            <a:r>
+              <a:rPr lang="en-US" sz="2400" b="1" dirty="0">
+                <a:latin typeface="Times New Roman" panose="02020603050405020304" pitchFamily="18" charset="0"/>
+                <a:cs typeface="Times New Roman" panose="02020603050405020304" pitchFamily="18" charset="0"/>
+              </a:rPr>
+              <a:t>Results &amp; Comparisons	25–35</a:t>
+            </a:r>
+          </a:p>
+          <a:p>
+            <a:pPr marL="685800" indent="-685800">
+              <a:lnSpc>
+                <a:spcPct val="150000"/>
+              </a:lnSpc>
+              <a:buFont typeface="+mj-lt"/>
+              <a:buAutoNum type="arabicPeriod"/>
+              <a:tabLst>
+                <a:tab pos="14800000" algn="r"/>
+              </a:tabLst>
+            </a:pPr>
+            <a:r>
+              <a:rPr lang="en-US" sz="2400" b="1" dirty="0">
+                <a:latin typeface="Times New Roman" panose="02020603050405020304" pitchFamily="18" charset="0"/>
+                <a:cs typeface="Times New Roman" panose="02020603050405020304" pitchFamily="18" charset="0"/>
+              </a:rPr>
+              <a:t>Limitations &amp; Future Enhancements	36</a:t>
+            </a:r>
+          </a:p>
+          <a:p>
+            <a:pPr marL="685800" indent="-685800">
+              <a:lnSpc>
+                <a:spcPct val="150000"/>
+              </a:lnSpc>
+              <a:buFont typeface="+mj-lt"/>
+              <a:buAutoNum type="arabicPeriod"/>
+              <a:tabLst>
+                <a:tab pos="14800000" algn="r"/>
+              </a:tabLst>
+            </a:pPr>
+            <a:r>
+              <a:rPr lang="en-US" sz="2400" b="1" dirty="0">
+                <a:latin typeface="Times New Roman" panose="02020603050405020304" pitchFamily="18" charset="0"/>
+                <a:cs typeface="Times New Roman" panose="02020603050405020304" pitchFamily="18" charset="0"/>
+              </a:rPr>
+              <a:t>Conclusion	37</a:t>
+            </a:r>
+          </a:p>
+          <a:p>
+            <a:pPr marL="685800" indent="-685800">
+              <a:lnSpc>
+                <a:spcPct val="150000"/>
+              </a:lnSpc>
+              <a:buFont typeface="+mj-lt"/>
+              <a:buAutoNum type="arabicPeriod"/>
+              <a:tabLst>
+                <a:tab pos="14800000" algn="r"/>
+              </a:tabLst>
+            </a:pPr>
+            <a:r>
+              <a:rPr lang="en-US" sz="2400" b="1" dirty="0">
+                <a:latin typeface="Times New Roman" panose="02020603050405020304" pitchFamily="18" charset="0"/>
+                <a:cs typeface="Times New Roman" panose="02020603050405020304" pitchFamily="18" charset="0"/>
+              </a:rPr>
+              <a:t>References	38–47</a:t>
+            </a:r>
+          </a:p>
+        </p:txBody>
+      </p:sp>
+      <p:sp>
+        <p:nvSpPr>
+          <p:cNvPr id="4" name="Text Box 3"/>
+          <p:cNvSpPr txBox="1"/>
+          <p:nvPr/>
+        </p:nvSpPr>
+        <p:spPr>
+          <a:xfrm>
+            <a:off x="1591310" y="4784725"/>
+            <a:ext cx="184731" cy="369332"/>
+          </a:xfrm>
+          <a:prstGeom prst="rect">
+            <a:avLst/>
+          </a:prstGeom>
+          <a:noFill/>
+        </p:spPr>
+        <p:txBody>
+          <a:bodyPr wrap="none" rtlCol="0">
+            <a:spAutoFit/>
+          </a:bodyPr>
+          <a:lstStyle/>
+          <a:p>
+            <a:endParaRPr lang="en-US">
+              <a:latin typeface="Times New Roman" panose="02020603050405020304" pitchFamily="18" charset="0"/>
+              <a:cs typeface="Times New Roman" panose="02020603050405020304" pitchFamily="18" charset="0"/>
+            </a:endParaRPr>
+          </a:p>
+        </p:txBody>
+      </p:sp>
+    </p:spTree>
+  </p:cSld>
+  <p:clrMapOvr>
+    <a:masterClrMapping/>
+  </p:clrMapOvr>
+</p:sld>
+</file>
+
+<file path=ppt/slides/slide20.xml><?xml version="1.0" encoding="utf-8"?>
 <p:sld xmlns:a="http://schemas.openxmlformats.org/drawingml/2006/main" xmlns:r="http://schemas.openxmlformats.org/officeDocument/2006/relationships" xmlns:p="http://schemas.openxmlformats.org/presentationml/2006/main">
   <p:cSld>
     <p:spTree>
@@ -21475,7 +21238,7 @@
                 <a:latin typeface="Times New Roman" panose="02020603050405020304" pitchFamily="18" charset="0"/>
                 <a:cs typeface="Times New Roman" panose="02020603050405020304" pitchFamily="18" charset="0"/>
               </a:rPr>
-              <a:t>26 October 2026</a:t>
+              <a:t>27 October 2026</a:t>
             </a:fld>
             <a:endParaRPr lang="en-US" dirty="0">
               <a:latin typeface="Times New Roman" panose="02020603050405020304" pitchFamily="18" charset="0"/>
@@ -21530,7 +21293,7 @@
                 <a:cs typeface="Times New Roman" panose="02020603050405020304" pitchFamily="18" charset="0"/>
               </a:rPr>
               <a:pPr/>
-              <a:t>21</a:t>
+              <a:t>20</a:t>
             </a:fld>
             <a:endParaRPr lang="en-IN" dirty="0">
               <a:latin typeface="Times New Roman" panose="02020603050405020304" pitchFamily="18" charset="0"/>
@@ -21792,6 +21555,325 @@
 </p:sld>
 </file>
 
+<file path=ppt/slides/slide21.xml><?xml version="1.0" encoding="utf-8"?>
+<p:sld xmlns:a="http://schemas.openxmlformats.org/drawingml/2006/main" xmlns:r="http://schemas.openxmlformats.org/officeDocument/2006/relationships" xmlns:p="http://schemas.openxmlformats.org/presentationml/2006/main">
+  <p:cSld>
+    <p:spTree>
+      <p:nvGrpSpPr>
+        <p:cNvPr id="1" name=""/>
+        <p:cNvGrpSpPr/>
+        <p:nvPr/>
+      </p:nvGrpSpPr>
+      <p:grpSpPr>
+        <a:xfrm>
+          <a:off x="0" y="0"/>
+          <a:ext cx="0" cy="0"/>
+          <a:chOff x="0" y="0"/>
+          <a:chExt cx="0" cy="0"/>
+        </a:xfrm>
+      </p:grpSpPr>
+      <p:sp>
+        <p:nvSpPr>
+          <p:cNvPr id="3" name="Date Placeholder 2"/>
+          <p:cNvSpPr>
+            <a:spLocks noGrp="1"/>
+          </p:cNvSpPr>
+          <p:nvPr>
+            <p:ph type="dt" sz="half" idx="10"/>
+          </p:nvPr>
+        </p:nvSpPr>
+        <p:spPr/>
+        <p:txBody>
+          <a:bodyPr/>
+          <a:lstStyle/>
+          <a:p>
+            <a:fld id="{79B7A7E6-0BB5-4562-B4D8-B2D95118667A}" type="datetime3">
+              <a:rPr lang="en-US" smtClean="0">
+                <a:latin typeface="Times New Roman" panose="02020603050405020304" pitchFamily="18" charset="0"/>
+                <a:cs typeface="Times New Roman" panose="02020603050405020304" pitchFamily="18" charset="0"/>
+              </a:rPr>
+              <a:t>27 October 2026</a:t>
+            </a:fld>
+            <a:endParaRPr lang="en-US" dirty="0">
+              <a:latin typeface="Times New Roman" panose="02020603050405020304" pitchFamily="18" charset="0"/>
+              <a:cs typeface="Times New Roman" panose="02020603050405020304" pitchFamily="18" charset="0"/>
+            </a:endParaRPr>
+          </a:p>
+        </p:txBody>
+      </p:sp>
+      <p:sp>
+        <p:nvSpPr>
+          <p:cNvPr id="7" name="Footer Placeholder 6"/>
+          <p:cNvSpPr>
+            <a:spLocks noGrp="1"/>
+          </p:cNvSpPr>
+          <p:nvPr>
+            <p:ph type="ftr" sz="quarter" idx="11"/>
+          </p:nvPr>
+        </p:nvSpPr>
+        <p:spPr/>
+        <p:txBody>
+          <a:bodyPr/>
+          <a:lstStyle/>
+          <a:p>
+            <a:r>
+              <a:rPr lang="en-IN" dirty="0">
+                <a:latin typeface="Times New Roman" panose="02020603050405020304" pitchFamily="18" charset="0"/>
+                <a:cs typeface="Times New Roman" panose="02020603050405020304" pitchFamily="18" charset="0"/>
+              </a:rPr>
+              <a:t>Dept of CSE </a:t>
+            </a:r>
+          </a:p>
+        </p:txBody>
+      </p:sp>
+      <p:sp>
+        <p:nvSpPr>
+          <p:cNvPr id="8" name="Slide Number Placeholder 7"/>
+          <p:cNvSpPr>
+            <a:spLocks noGrp="1"/>
+          </p:cNvSpPr>
+          <p:nvPr>
+            <p:ph type="sldNum" sz="quarter" idx="12"/>
+          </p:nvPr>
+        </p:nvSpPr>
+        <p:spPr/>
+        <p:txBody>
+          <a:bodyPr/>
+          <a:lstStyle/>
+          <a:p>
+            <a:fld id="{B6F15528-21DE-4FAA-801E-634DDDAF4B2B}" type="slidenum">
+              <a:rPr lang="en-IN" smtClean="0">
+                <a:latin typeface="Times New Roman" panose="02020603050405020304" pitchFamily="18" charset="0"/>
+                <a:cs typeface="Times New Roman" panose="02020603050405020304" pitchFamily="18" charset="0"/>
+              </a:rPr>
+              <a:pPr/>
+              <a:t>21</a:t>
+            </a:fld>
+            <a:endParaRPr lang="en-IN" dirty="0">
+              <a:latin typeface="Times New Roman" panose="02020603050405020304" pitchFamily="18" charset="0"/>
+              <a:cs typeface="Times New Roman" panose="02020603050405020304" pitchFamily="18" charset="0"/>
+            </a:endParaRPr>
+          </a:p>
+        </p:txBody>
+      </p:sp>
+      <p:sp>
+        <p:nvSpPr>
+          <p:cNvPr id="9" name="TextBox 8"/>
+          <p:cNvSpPr txBox="1"/>
+          <p:nvPr/>
+        </p:nvSpPr>
+        <p:spPr>
+          <a:xfrm>
+            <a:off x="508000" y="230000"/>
+            <a:ext cx="17272000" cy="1100000"/>
+          </a:xfrm>
+          <a:prstGeom prst="rect">
+            <a:avLst/>
+          </a:prstGeom>
+          <a:noFill/>
+        </p:spPr>
+        <p:txBody>
+          <a:bodyPr wrap="square">
+            <a:spAutoFit/>
+          </a:bodyPr>
+          <a:lstStyle/>
+          <a:p>
+            <a:pPr algn="ctr"/>
+            <a:r>
+              <a:rPr sz="6000" b="1" i="0">
+                <a:solidFill>
+                  <a:srgbClr val="1A1A1A"/>
+                </a:solidFill>
+                <a:latin typeface="Times New Roman"/>
+                <a:cs typeface="Times New Roman"/>
+              </a:rPr>
+              <a:t>Proposed Model: EEG-HDC v4 Dataflow</a:t>
+            </a:r>
+          </a:p>
+        </p:txBody>
+      </p:sp>
+      <p:sp>
+        <p:nvSpPr>
+          <p:cNvPr id="11" name="TextBox 10"/>
+          <p:cNvSpPr txBox="1"/>
+          <p:nvPr/>
+        </p:nvSpPr>
+        <p:spPr>
+          <a:xfrm>
+            <a:off x="9900000" y="2000000"/>
+            <a:ext cx="7300000" cy="7400000"/>
+          </a:xfrm>
+          <a:prstGeom prst="rect">
+            <a:avLst/>
+          </a:prstGeom>
+          <a:noFill/>
+        </p:spPr>
+        <p:txBody>
+          <a:bodyPr wrap="square">
+            <a:spAutoFit/>
+          </a:bodyPr>
+          <a:lstStyle/>
+          <a:p>
+            <a:pPr marL="571500" indent="-571500">
+              <a:lnSpc>
+                <a:spcPct val="115000"/>
+              </a:lnSpc>
+              <a:spcAft>
+                <a:spcPts val="600"/>
+              </a:spcAft>
+              <a:buFont typeface="Arial"/>
+              <a:buChar char="•"/>
+            </a:pPr>
+            <a:r>
+              <a:rPr sz="2800" b="0" i="0" dirty="0">
+                <a:solidFill>
+                  <a:srgbClr val="1A1A1A"/>
+                </a:solidFill>
+                <a:latin typeface="Times New Roman"/>
+                <a:cs typeface="Times New Roman"/>
+              </a:rPr>
+              <a:t>Input: harmonized 18-channel, 256 Hz Siena seizure window.</a:t>
+            </a:r>
+          </a:p>
+          <a:p>
+            <a:pPr marL="571500" indent="-571500">
+              <a:lnSpc>
+                <a:spcPct val="115000"/>
+              </a:lnSpc>
+              <a:spcAft>
+                <a:spcPts val="600"/>
+              </a:spcAft>
+              <a:buFont typeface="Arial"/>
+              <a:buChar char="•"/>
+            </a:pPr>
+            <a:r>
+              <a:rPr sz="2800" b="0" i="0" dirty="0">
+                <a:solidFill>
+                  <a:srgbClr val="1A1A1A"/>
+                </a:solidFill>
+                <a:latin typeface="Times New Roman"/>
+                <a:cs typeface="Times New Roman"/>
+              </a:rPr>
+              <a:t>Two CRNN backbones (445,697 parameters each) give 128-D embeddings.</a:t>
+            </a:r>
+          </a:p>
+          <a:p>
+            <a:pPr marL="571500" indent="-571500">
+              <a:lnSpc>
+                <a:spcPct val="115000"/>
+              </a:lnSpc>
+              <a:spcAft>
+                <a:spcPts val="600"/>
+              </a:spcAft>
+              <a:buFont typeface="Arial"/>
+              <a:buChar char="•"/>
+            </a:pPr>
+            <a:r>
+              <a:rPr sz="2800" b="0" i="0" dirty="0">
+                <a:solidFill>
+                  <a:srgbClr val="1A1A1A"/>
+                </a:solidFill>
+                <a:latin typeface="Times New Roman"/>
+                <a:cs typeface="Times New Roman"/>
+              </a:rPr>
+              <a:t>256-D concatenation; SMOTE on the training split only (test embeddings untouched).</a:t>
+            </a:r>
+          </a:p>
+          <a:p>
+            <a:pPr marL="571500" indent="-571500">
+              <a:lnSpc>
+                <a:spcPct val="115000"/>
+              </a:lnSpc>
+              <a:spcAft>
+                <a:spcPts val="600"/>
+              </a:spcAft>
+              <a:buFont typeface="Arial"/>
+              <a:buChar char="•"/>
+            </a:pPr>
+            <a:r>
+              <a:rPr sz="2800" b="0" i="0" dirty="0" err="1">
+                <a:solidFill>
+                  <a:srgbClr val="1A1A1A"/>
+                </a:solidFill>
+                <a:latin typeface="Times New Roman"/>
+                <a:cs typeface="Times New Roman"/>
+              </a:rPr>
+              <a:t>HistGradientBoosting</a:t>
+            </a:r>
+            <a:r>
+              <a:rPr sz="2800" b="0" i="0" dirty="0">
+                <a:solidFill>
+                  <a:srgbClr val="1A1A1A"/>
+                </a:solidFill>
+                <a:latin typeface="Times New Roman"/>
+                <a:cs typeface="Times New Roman"/>
+              </a:rPr>
+              <a:t>: 200 rounds, depth 4, learning rate 0.08, L2 = 0.5.</a:t>
+            </a:r>
+          </a:p>
+          <a:p>
+            <a:pPr marL="571500" indent="-571500">
+              <a:lnSpc>
+                <a:spcPct val="115000"/>
+              </a:lnSpc>
+              <a:spcAft>
+                <a:spcPts val="600"/>
+              </a:spcAft>
+              <a:buFont typeface="Arial"/>
+              <a:buChar char="•"/>
+            </a:pPr>
+            <a:r>
+              <a:rPr sz="2800" b="0" i="0" dirty="0">
+                <a:solidFill>
+                  <a:srgbClr val="1A1A1A"/>
+                </a:solidFill>
+                <a:latin typeface="Times New Roman"/>
+                <a:cs typeface="Times New Roman"/>
+              </a:rPr>
+              <a:t>Output: argmax over 3 subtype probabilities.</a:t>
+            </a:r>
+          </a:p>
+        </p:txBody>
+      </p:sp>
+      <p:pic>
+        <p:nvPicPr>
+          <p:cNvPr id="5" name="Picture 4">
+            <a:extLst>
+              <a:ext uri="{FF2B5EF4-FFF2-40B4-BE49-F238E27FC236}">
+                <a16:creationId xmlns:a16="http://schemas.microsoft.com/office/drawing/2014/main" id="{C7DA61CF-098E-B610-31DC-685CF6DB7066}"/>
+              </a:ext>
+            </a:extLst>
+          </p:cNvPr>
+          <p:cNvPicPr>
+            <a:picLocks noChangeAspect="1"/>
+          </p:cNvPicPr>
+          <p:nvPr/>
+        </p:nvPicPr>
+        <p:blipFill>
+          <a:blip r:embed="rId3"/>
+          <a:srcRect l="3520" t="2881" r="3783"/>
+          <a:stretch>
+            <a:fillRect/>
+          </a:stretch>
+        </p:blipFill>
+        <p:spPr>
+          <a:xfrm>
+            <a:off x="838200" y="1321201"/>
+            <a:ext cx="8321310" cy="8394299"/>
+          </a:xfrm>
+          <a:prstGeom prst="rect">
+            <a:avLst/>
+          </a:prstGeom>
+        </p:spPr>
+      </p:pic>
+    </p:spTree>
+  </p:cSld>
+  <p:clrMapOvr>
+    <a:masterClrMapping/>
+  </p:clrMapOvr>
+</p:sld>
+</file>
+
 <file path=ppt/slides/slide22.xml><?xml version="1.0" encoding="utf-8"?>
 <p:sld xmlns:a="http://schemas.openxmlformats.org/drawingml/2006/main" xmlns:r="http://schemas.openxmlformats.org/officeDocument/2006/relationships" xmlns:p="http://schemas.openxmlformats.org/presentationml/2006/main">
   <p:cSld>
@@ -21829,7 +21911,7 @@
                 <a:latin typeface="Times New Roman" panose="02020603050405020304" pitchFamily="18" charset="0"/>
                 <a:cs typeface="Times New Roman" panose="02020603050405020304" pitchFamily="18" charset="0"/>
               </a:rPr>
-              <a:t>26 October 2026</a:t>
+              <a:t>27 October 2026</a:t>
             </a:fld>
             <a:endParaRPr lang="en-US" dirty="0">
               <a:latin typeface="Times New Roman" panose="02020603050405020304" pitchFamily="18" charset="0"/>
@@ -21924,45 +22006,21 @@
                 <a:latin typeface="Times New Roman"/>
                 <a:cs typeface="Times New Roman"/>
               </a:rPr>
-              <a:t>Proposed Model: EEG-HDC v4 Dataflow</a:t>
+              <a:t>Latent-Space SMOTE &amp; Model Selection</a:t>
             </a:r>
           </a:p>
         </p:txBody>
       </p:sp>
-      <p:pic>
-        <p:nvPicPr>
-          <p:cNvPr id="10" name="Picture 9" descr="crnn_smote_v4_architecture.png"/>
-          <p:cNvPicPr>
-            <a:picLocks noChangeAspect="1"/>
-          </p:cNvPicPr>
+      <p:sp>
+        <p:nvSpPr>
+          <p:cNvPr id="10" name="TextBox 9"/>
+          <p:cNvSpPr txBox="1"/>
           <p:nvPr/>
-        </p:nvPicPr>
-        <p:blipFill>
-          <a:blip r:embed="rId3"/>
-          <a:stretch>
-            <a:fillRect/>
-          </a:stretch>
-        </p:blipFill>
+        </p:nvSpPr>
         <p:spPr>
           <a:xfrm>
-            <a:off x="1257300" y="1546695"/>
-            <a:ext cx="8200000" cy="7706610"/>
-          </a:xfrm>
-          <a:prstGeom prst="rect">
-            <a:avLst/>
-          </a:prstGeom>
-        </p:spPr>
-      </p:pic>
-      <p:sp>
-        <p:nvSpPr>
-          <p:cNvPr id="11" name="TextBox 10"/>
-          <p:cNvSpPr txBox="1"/>
-          <p:nvPr/>
-        </p:nvSpPr>
-        <p:spPr>
-          <a:xfrm>
-            <a:off x="9900000" y="2000000"/>
-            <a:ext cx="7300000" cy="7400000"/>
+            <a:off x="1257300" y="1750000"/>
+            <a:ext cx="15773400" cy="6549613"/>
           </a:xfrm>
           <a:prstGeom prst="rect">
             <a:avLst/>
@@ -21977,7 +22035,7 @@
           <a:p>
             <a:pPr marL="571500" indent="-571500">
               <a:lnSpc>
-                <a:spcPct val="115000"/>
+                <a:spcPct val="150000"/>
               </a:lnSpc>
               <a:spcAft>
                 <a:spcPts val="600"/>
@@ -21986,20 +22044,30 @@
               <a:buChar char="•"/>
             </a:pPr>
             <a:r>
-              <a:rPr sz="2800" b="0" i="0">
+              <a:rPr sz="3000" b="1" i="0" dirty="0">
                 <a:solidFill>
                   <a:srgbClr val="1A1A1A"/>
                 </a:solidFill>
                 <a:latin typeface="Times New Roman"/>
                 <a:cs typeface="Times New Roman"/>
               </a:rPr>
-              <a:t>Input: harmonized 18-channel, 256 Hz Siena seizure window.</a:t>
+              <a:t>Why latent space: </a:t>
+            </a:r>
+            <a:r>
+              <a:rPr sz="3000" b="0" i="0" dirty="0">
+                <a:solidFill>
+                  <a:srgbClr val="1A1A1A"/>
+                </a:solidFill>
+                <a:latin typeface="Times New Roman"/>
+                <a:cs typeface="Times New Roman"/>
+              </a:rPr>
+              <a:t>interpolating raw EEG creates non-physiological phase and frequency artifacts; interpolating learned embeddings does not.</a:t>
             </a:r>
           </a:p>
           <a:p>
             <a:pPr marL="571500" indent="-571500">
               <a:lnSpc>
-                <a:spcPct val="115000"/>
+                <a:spcPct val="150000"/>
               </a:lnSpc>
               <a:spcAft>
                 <a:spcPts val="600"/>
@@ -22008,20 +22076,30 @@
               <a:buChar char="•"/>
             </a:pPr>
             <a:r>
-              <a:rPr sz="2800" b="0" i="0">
+              <a:rPr sz="3000" b="1" i="0" dirty="0">
                 <a:solidFill>
                   <a:srgbClr val="1A1A1A"/>
                 </a:solidFill>
                 <a:latin typeface="Times New Roman"/>
                 <a:cs typeface="Times New Roman"/>
               </a:rPr>
-              <a:t>Two CRNN backbones (445,697 parameters each) give 128-D embeddings.</a:t>
+              <a:t>Class-adaptive ratios (k = 5 neighbors): </a:t>
+            </a:r>
+            <a:r>
+              <a:rPr sz="3000" b="0" i="0" dirty="0">
+                <a:solidFill>
+                  <a:srgbClr val="1A1A1A"/>
+                </a:solidFill>
+                <a:latin typeface="Times New Roman"/>
+                <a:cs typeface="Times New Roman"/>
+              </a:rPr>
+              <a:t>Focal Aware 29 → 87 (3×), FBTC 87 → 435 (5×); Focal Impaired Awareness (1,158) never oversampled.</a:t>
             </a:r>
           </a:p>
           <a:p>
             <a:pPr marL="571500" indent="-571500">
               <a:lnSpc>
-                <a:spcPct val="115000"/>
+                <a:spcPct val="150000"/>
               </a:lnSpc>
               <a:spcAft>
                 <a:spcPts val="600"/>
@@ -22030,20 +22108,57 @@
               <a:buChar char="•"/>
             </a:pPr>
             <a:r>
-              <a:rPr sz="2800" b="0" i="0">
+              <a:rPr sz="3000" b="1" i="0" dirty="0">
                 <a:solidFill>
                   <a:srgbClr val="1A1A1A"/>
                 </a:solidFill>
                 <a:latin typeface="Times New Roman"/>
                 <a:cs typeface="Times New Roman"/>
               </a:rPr>
-              <a:t>256-D concatenation; SMOTE on the training split only (test embeddings untouched).</a:t>
-            </a:r>
+              <a:t>Classifier sweep: </a:t>
+            </a:r>
+            <a:r>
+              <a:rPr sz="3000" b="0" i="0" dirty="0">
+                <a:solidFill>
+                  <a:srgbClr val="1A1A1A"/>
+                </a:solidFill>
+                <a:latin typeface="Times New Roman"/>
+                <a:cs typeface="Times New Roman"/>
+              </a:rPr>
+              <a:t>MLP, Random Forest and </a:t>
+            </a:r>
+            <a:r>
+              <a:rPr sz="3000" b="0" i="0" dirty="0" err="1">
+                <a:solidFill>
+                  <a:srgbClr val="1A1A1A"/>
+                </a:solidFill>
+                <a:latin typeface="Times New Roman"/>
+                <a:cs typeface="Times New Roman"/>
+              </a:rPr>
+              <a:t>HistGradientBoosting</a:t>
+            </a:r>
+            <a:r>
+              <a:rPr lang="en-US" sz="3000" b="0" i="0" dirty="0">
+                <a:solidFill>
+                  <a:srgbClr val="1A1A1A"/>
+                </a:solidFill>
+                <a:latin typeface="Times New Roman"/>
+                <a:cs typeface="Times New Roman"/>
+              </a:rPr>
+              <a:t>.</a:t>
+            </a:r>
+            <a:endParaRPr sz="3000" b="0" i="0" dirty="0">
+              <a:solidFill>
+                <a:srgbClr val="1A1A1A"/>
+              </a:solidFill>
+              <a:latin typeface="Times New Roman"/>
+              <a:cs typeface="Times New Roman"/>
+            </a:endParaRPr>
           </a:p>
           <a:p>
             <a:pPr marL="571500" indent="-571500">
               <a:lnSpc>
-                <a:spcPct val="115000"/>
+                <a:spcPct val="150000"/>
               </a:lnSpc>
               <a:spcAft>
                 <a:spcPts val="600"/>
@@ -22052,20 +22167,50 @@
               <a:buChar char="•"/>
             </a:pPr>
             <a:r>
-              <a:rPr sz="2800" b="0" i="0">
+              <a:rPr sz="3000" b="1" i="0" dirty="0">
                 <a:solidFill>
                   <a:srgbClr val="1A1A1A"/>
                 </a:solidFill>
                 <a:latin typeface="Times New Roman"/>
                 <a:cs typeface="Times New Roman"/>
               </a:rPr>
-              <a:t>HistGradientBoosting: 200 rounds, depth 4, learning rate 0.08, L2 = 0.5.</a:t>
+              <a:t>Adversarial control: </a:t>
+            </a:r>
+            <a:r>
+              <a:rPr sz="3000" b="0" i="0" dirty="0">
+                <a:solidFill>
+                  <a:srgbClr val="1A1A1A"/>
+                </a:solidFill>
+                <a:latin typeface="Times New Roman"/>
+                <a:cs typeface="Times New Roman"/>
+              </a:rPr>
+              <a:t>150 interictal windows per patient, re</a:t>
+            </a:r>
+            <a:r>
+              <a:rPr lang="en-US" sz="3000" b="0" i="0" dirty="0">
+                <a:solidFill>
+                  <a:srgbClr val="1A1A1A"/>
+                </a:solidFill>
+                <a:latin typeface="Times New Roman"/>
+                <a:cs typeface="Times New Roman"/>
+              </a:rPr>
+              <a:t>-</a:t>
+            </a:r>
+            <a:r>
+              <a:rPr sz="3000" b="0" i="0" dirty="0">
+                <a:solidFill>
+                  <a:srgbClr val="1A1A1A"/>
+                </a:solidFill>
+                <a:latin typeface="Times New Roman"/>
+                <a:cs typeface="Times New Roman"/>
+              </a:rPr>
+              <a:t>labelled with that patient’s subtype, run through the same pipeline. Recall gap Δ = real − control.</a:t>
             </a:r>
           </a:p>
           <a:p>
             <a:pPr marL="571500" indent="-571500">
               <a:lnSpc>
-                <a:spcPct val="115000"/>
+                <a:spcPct val="150000"/>
               </a:lnSpc>
               <a:spcAft>
                 <a:spcPts val="600"/>
@@ -22074,14 +22219,24 @@
               <a:buChar char="•"/>
             </a:pPr>
             <a:r>
-              <a:rPr sz="2800" b="0" i="0">
+              <a:rPr sz="3000" b="1" i="0" dirty="0">
                 <a:solidFill>
                   <a:srgbClr val="1A1A1A"/>
                 </a:solidFill>
                 <a:latin typeface="Times New Roman"/>
                 <a:cs typeface="Times New Roman"/>
               </a:rPr>
-              <a:t>Output: argmax over 3 subtype probabilities.</a:t>
+              <a:t>Selection rule (fixed before the sweep): </a:t>
+            </a:r>
+            <a:r>
+              <a:rPr sz="3000" b="0" i="0" dirty="0">
+                <a:solidFill>
+                  <a:srgbClr val="1A1A1A"/>
+                </a:solidFill>
+                <a:latin typeface="Times New Roman"/>
+                <a:cs typeface="Times New Roman"/>
+              </a:rPr>
+              <a:t>accuracy ≥ 0.90, positive Δ on both minority classes, then maximize the minimum class recall.</a:t>
             </a:r>
           </a:p>
         </p:txBody>
@@ -22131,7 +22286,7 @@
                 <a:latin typeface="Times New Roman" panose="02020603050405020304" pitchFamily="18" charset="0"/>
                 <a:cs typeface="Times New Roman" panose="02020603050405020304" pitchFamily="18" charset="0"/>
               </a:rPr>
-              <a:t>26 October 2026</a:t>
+              <a:t>27 October 2026</a:t>
             </a:fld>
             <a:endParaRPr lang="en-US" dirty="0">
               <a:latin typeface="Times New Roman" panose="02020603050405020304" pitchFamily="18" charset="0"/>
@@ -22187,381 +22342,6 @@
               </a:rPr>
               <a:pPr/>
               <a:t>23</a:t>
-            </a:fld>
-            <a:endParaRPr lang="en-IN" dirty="0">
-              <a:latin typeface="Times New Roman" panose="02020603050405020304" pitchFamily="18" charset="0"/>
-              <a:cs typeface="Times New Roman" panose="02020603050405020304" pitchFamily="18" charset="0"/>
-            </a:endParaRPr>
-          </a:p>
-        </p:txBody>
-      </p:sp>
-      <p:sp>
-        <p:nvSpPr>
-          <p:cNvPr id="9" name="TextBox 8"/>
-          <p:cNvSpPr txBox="1"/>
-          <p:nvPr/>
-        </p:nvSpPr>
-        <p:spPr>
-          <a:xfrm>
-            <a:off x="508000" y="230000"/>
-            <a:ext cx="17272000" cy="1100000"/>
-          </a:xfrm>
-          <a:prstGeom prst="rect">
-            <a:avLst/>
-          </a:prstGeom>
-          <a:noFill/>
-        </p:spPr>
-        <p:txBody>
-          <a:bodyPr wrap="square">
-            <a:spAutoFit/>
-          </a:bodyPr>
-          <a:lstStyle/>
-          <a:p>
-            <a:pPr algn="ctr"/>
-            <a:r>
-              <a:rPr sz="6000" b="1" i="0">
-                <a:solidFill>
-                  <a:srgbClr val="1A1A1A"/>
-                </a:solidFill>
-                <a:latin typeface="Times New Roman"/>
-                <a:cs typeface="Times New Roman"/>
-              </a:rPr>
-              <a:t>Latent-Space SMOTE &amp; Model Selection</a:t>
-            </a:r>
-          </a:p>
-        </p:txBody>
-      </p:sp>
-      <p:sp>
-        <p:nvSpPr>
-          <p:cNvPr id="10" name="TextBox 9"/>
-          <p:cNvSpPr txBox="1"/>
-          <p:nvPr/>
-        </p:nvSpPr>
-        <p:spPr>
-          <a:xfrm>
-            <a:off x="1257300" y="1750000"/>
-            <a:ext cx="15773400" cy="5014578"/>
-          </a:xfrm>
-          <a:prstGeom prst="rect">
-            <a:avLst/>
-          </a:prstGeom>
-          <a:noFill/>
-        </p:spPr>
-        <p:txBody>
-          <a:bodyPr wrap="square">
-            <a:spAutoFit/>
-          </a:bodyPr>
-          <a:lstStyle/>
-          <a:p>
-            <a:pPr marL="571500" indent="-571500">
-              <a:lnSpc>
-                <a:spcPct val="112000"/>
-              </a:lnSpc>
-              <a:spcAft>
-                <a:spcPts val="600"/>
-              </a:spcAft>
-              <a:buFont typeface="Arial"/>
-              <a:buChar char="•"/>
-            </a:pPr>
-            <a:r>
-              <a:rPr sz="3000" b="1" i="0" dirty="0">
-                <a:solidFill>
-                  <a:srgbClr val="1A1A1A"/>
-                </a:solidFill>
-                <a:latin typeface="Times New Roman"/>
-                <a:cs typeface="Times New Roman"/>
-              </a:rPr>
-              <a:t>Why latent space: </a:t>
-            </a:r>
-            <a:r>
-              <a:rPr sz="3000" b="0" i="0" dirty="0">
-                <a:solidFill>
-                  <a:srgbClr val="1A1A1A"/>
-                </a:solidFill>
-                <a:latin typeface="Times New Roman"/>
-                <a:cs typeface="Times New Roman"/>
-              </a:rPr>
-              <a:t>interpolating raw EEG creates non-physiological phase and frequency artifacts; interpolating learned embeddings does not.</a:t>
-            </a:r>
-          </a:p>
-          <a:p>
-            <a:pPr marL="571500" indent="-571500">
-              <a:lnSpc>
-                <a:spcPct val="112000"/>
-              </a:lnSpc>
-              <a:spcAft>
-                <a:spcPts val="600"/>
-              </a:spcAft>
-              <a:buFont typeface="Arial"/>
-              <a:buChar char="•"/>
-            </a:pPr>
-            <a:r>
-              <a:rPr sz="3000" b="1" i="0" dirty="0">
-                <a:solidFill>
-                  <a:srgbClr val="1A1A1A"/>
-                </a:solidFill>
-                <a:latin typeface="Times New Roman"/>
-                <a:cs typeface="Times New Roman"/>
-              </a:rPr>
-              <a:t>Class-adaptive ratios (k = 5 neighbors): </a:t>
-            </a:r>
-            <a:r>
-              <a:rPr sz="3000" b="0" i="0" dirty="0">
-                <a:solidFill>
-                  <a:srgbClr val="1A1A1A"/>
-                </a:solidFill>
-                <a:latin typeface="Times New Roman"/>
-                <a:cs typeface="Times New Roman"/>
-              </a:rPr>
-              <a:t>Focal Aware 29 → 87 (3×), FBTC 87 → 435 (5×); Focal Impaired Awareness (1,158) never oversampled.</a:t>
-            </a:r>
-          </a:p>
-          <a:p>
-            <a:pPr marL="571500" indent="-571500">
-              <a:lnSpc>
-                <a:spcPct val="112000"/>
-              </a:lnSpc>
-              <a:spcAft>
-                <a:spcPts val="600"/>
-              </a:spcAft>
-              <a:buFont typeface="Arial"/>
-              <a:buChar char="•"/>
-            </a:pPr>
-            <a:r>
-              <a:rPr sz="3000" b="1" i="0" dirty="0">
-                <a:solidFill>
-                  <a:srgbClr val="1A1A1A"/>
-                </a:solidFill>
-                <a:latin typeface="Times New Roman"/>
-                <a:cs typeface="Times New Roman"/>
-              </a:rPr>
-              <a:t>Classifier sweep: </a:t>
-            </a:r>
-            <a:r>
-              <a:rPr sz="3000" b="0" i="0" dirty="0">
-                <a:solidFill>
-                  <a:srgbClr val="1A1A1A"/>
-                </a:solidFill>
-                <a:latin typeface="Times New Roman"/>
-                <a:cs typeface="Times New Roman"/>
-              </a:rPr>
-              <a:t>MLP, Random Forest and </a:t>
-            </a:r>
-            <a:r>
-              <a:rPr sz="3000" b="0" i="0" dirty="0" err="1">
-                <a:solidFill>
-                  <a:srgbClr val="1A1A1A"/>
-                </a:solidFill>
-                <a:latin typeface="Times New Roman"/>
-                <a:cs typeface="Times New Roman"/>
-              </a:rPr>
-              <a:t>HistGradientBoosting</a:t>
-            </a:r>
-            <a:r>
-              <a:rPr lang="en-US" sz="3000" b="0" i="0" dirty="0">
-                <a:solidFill>
-                  <a:srgbClr val="1A1A1A"/>
-                </a:solidFill>
-                <a:latin typeface="Times New Roman"/>
-                <a:cs typeface="Times New Roman"/>
-              </a:rPr>
-              <a:t>.</a:t>
-            </a:r>
-            <a:endParaRPr sz="3000" b="0" i="0" dirty="0">
-              <a:solidFill>
-                <a:srgbClr val="1A1A1A"/>
-              </a:solidFill>
-              <a:latin typeface="Times New Roman"/>
-              <a:cs typeface="Times New Roman"/>
-            </a:endParaRPr>
-          </a:p>
-          <a:p>
-            <a:pPr marL="571500" indent="-571500">
-              <a:lnSpc>
-                <a:spcPct val="112000"/>
-              </a:lnSpc>
-              <a:spcAft>
-                <a:spcPts val="600"/>
-              </a:spcAft>
-              <a:buFont typeface="Arial"/>
-              <a:buChar char="•"/>
-            </a:pPr>
-            <a:r>
-              <a:rPr sz="3000" b="1" i="0" dirty="0">
-                <a:solidFill>
-                  <a:srgbClr val="1A1A1A"/>
-                </a:solidFill>
-                <a:latin typeface="Times New Roman"/>
-                <a:cs typeface="Times New Roman"/>
-              </a:rPr>
-              <a:t>Adversarial control: </a:t>
-            </a:r>
-            <a:r>
-              <a:rPr sz="3000" b="0" i="0" dirty="0">
-                <a:solidFill>
-                  <a:srgbClr val="1A1A1A"/>
-                </a:solidFill>
-                <a:latin typeface="Times New Roman"/>
-                <a:cs typeface="Times New Roman"/>
-              </a:rPr>
-              <a:t>150 interictal windows per patient, re</a:t>
-            </a:r>
-            <a:r>
-              <a:rPr lang="en-US" sz="3000" b="0" i="0" dirty="0">
-                <a:solidFill>
-                  <a:srgbClr val="1A1A1A"/>
-                </a:solidFill>
-                <a:latin typeface="Times New Roman"/>
-                <a:cs typeface="Times New Roman"/>
-              </a:rPr>
-              <a:t>-</a:t>
-            </a:r>
-            <a:r>
-              <a:rPr sz="3000" b="0" i="0" dirty="0">
-                <a:solidFill>
-                  <a:srgbClr val="1A1A1A"/>
-                </a:solidFill>
-                <a:latin typeface="Times New Roman"/>
-                <a:cs typeface="Times New Roman"/>
-              </a:rPr>
-              <a:t>labelled with that patient’s subtype, run through the same pipeline. Recall gap Δ = real − control.</a:t>
-            </a:r>
-          </a:p>
-          <a:p>
-            <a:pPr marL="571500" indent="-571500">
-              <a:lnSpc>
-                <a:spcPct val="112000"/>
-              </a:lnSpc>
-              <a:spcAft>
-                <a:spcPts val="600"/>
-              </a:spcAft>
-              <a:buFont typeface="Arial"/>
-              <a:buChar char="•"/>
-            </a:pPr>
-            <a:r>
-              <a:rPr sz="3000" b="1" i="0" dirty="0">
-                <a:solidFill>
-                  <a:srgbClr val="1A1A1A"/>
-                </a:solidFill>
-                <a:latin typeface="Times New Roman"/>
-                <a:cs typeface="Times New Roman"/>
-              </a:rPr>
-              <a:t>Selection rule (fixed before the sweep): </a:t>
-            </a:r>
-            <a:r>
-              <a:rPr sz="3000" b="0" i="0" dirty="0">
-                <a:solidFill>
-                  <a:srgbClr val="1A1A1A"/>
-                </a:solidFill>
-                <a:latin typeface="Times New Roman"/>
-                <a:cs typeface="Times New Roman"/>
-              </a:rPr>
-              <a:t>accuracy ≥ 0.90, positive Δ on both minority classes, then maximize the minimum class recall.</a:t>
-            </a:r>
-          </a:p>
-        </p:txBody>
-      </p:sp>
-    </p:spTree>
-  </p:cSld>
-  <p:clrMapOvr>
-    <a:masterClrMapping/>
-  </p:clrMapOvr>
-</p:sld>
-</file>
-
-<file path=ppt/slides/slide24.xml><?xml version="1.0" encoding="utf-8"?>
-<p:sld xmlns:a="http://schemas.openxmlformats.org/drawingml/2006/main" xmlns:r="http://schemas.openxmlformats.org/officeDocument/2006/relationships" xmlns:p="http://schemas.openxmlformats.org/presentationml/2006/main">
-  <p:cSld>
-    <p:spTree>
-      <p:nvGrpSpPr>
-        <p:cNvPr id="1" name=""/>
-        <p:cNvGrpSpPr/>
-        <p:nvPr/>
-      </p:nvGrpSpPr>
-      <p:grpSpPr>
-        <a:xfrm>
-          <a:off x="0" y="0"/>
-          <a:ext cx="0" cy="0"/>
-          <a:chOff x="0" y="0"/>
-          <a:chExt cx="0" cy="0"/>
-        </a:xfrm>
-      </p:grpSpPr>
-      <p:sp>
-        <p:nvSpPr>
-          <p:cNvPr id="3" name="Date Placeholder 2"/>
-          <p:cNvSpPr>
-            <a:spLocks noGrp="1"/>
-          </p:cNvSpPr>
-          <p:nvPr>
-            <p:ph type="dt" sz="half" idx="10"/>
-          </p:nvPr>
-        </p:nvSpPr>
-        <p:spPr/>
-        <p:txBody>
-          <a:bodyPr/>
-          <a:lstStyle/>
-          <a:p>
-            <a:fld id="{79B7A7E6-0BB5-4562-B4D8-B2D95118667A}" type="datetime3">
-              <a:rPr lang="en-US" smtClean="0">
-                <a:latin typeface="Times New Roman" panose="02020603050405020304" pitchFamily="18" charset="0"/>
-                <a:cs typeface="Times New Roman" panose="02020603050405020304" pitchFamily="18" charset="0"/>
-              </a:rPr>
-              <a:t>26 October 2026</a:t>
-            </a:fld>
-            <a:endParaRPr lang="en-US" dirty="0">
-              <a:latin typeface="Times New Roman" panose="02020603050405020304" pitchFamily="18" charset="0"/>
-              <a:cs typeface="Times New Roman" panose="02020603050405020304" pitchFamily="18" charset="0"/>
-            </a:endParaRPr>
-          </a:p>
-        </p:txBody>
-      </p:sp>
-      <p:sp>
-        <p:nvSpPr>
-          <p:cNvPr id="7" name="Footer Placeholder 6"/>
-          <p:cNvSpPr>
-            <a:spLocks noGrp="1"/>
-          </p:cNvSpPr>
-          <p:nvPr>
-            <p:ph type="ftr" sz="quarter" idx="11"/>
-          </p:nvPr>
-        </p:nvSpPr>
-        <p:spPr/>
-        <p:txBody>
-          <a:bodyPr/>
-          <a:lstStyle/>
-          <a:p>
-            <a:r>
-              <a:rPr lang="en-IN" dirty="0">
-                <a:latin typeface="Times New Roman" panose="02020603050405020304" pitchFamily="18" charset="0"/>
-                <a:cs typeface="Times New Roman" panose="02020603050405020304" pitchFamily="18" charset="0"/>
-              </a:rPr>
-              <a:t>Dept of CSE </a:t>
-            </a:r>
-          </a:p>
-        </p:txBody>
-      </p:sp>
-      <p:sp>
-        <p:nvSpPr>
-          <p:cNvPr id="8" name="Slide Number Placeholder 7"/>
-          <p:cNvSpPr>
-            <a:spLocks noGrp="1"/>
-          </p:cNvSpPr>
-          <p:nvPr>
-            <p:ph type="sldNum" sz="quarter" idx="12"/>
-          </p:nvPr>
-        </p:nvSpPr>
-        <p:spPr/>
-        <p:txBody>
-          <a:bodyPr/>
-          <a:lstStyle/>
-          <a:p>
-            <a:fld id="{B6F15528-21DE-4FAA-801E-634DDDAF4B2B}" type="slidenum">
-              <a:rPr lang="en-IN" smtClean="0">
-                <a:latin typeface="Times New Roman" panose="02020603050405020304" pitchFamily="18" charset="0"/>
-                <a:cs typeface="Times New Roman" panose="02020603050405020304" pitchFamily="18" charset="0"/>
-              </a:rPr>
-              <a:pPr/>
-              <a:t>24</a:t>
             </a:fld>
             <a:endParaRPr lang="en-IN" dirty="0">
               <a:latin typeface="Times New Roman" panose="02020603050405020304" pitchFamily="18" charset="0"/>
@@ -23346,7 +23126,7 @@
                     <a:p>
                       <a:pPr algn="ctr"/>
                       <a:r>
-                        <a:rPr sz="2400" b="0" i="0">
+                        <a:rPr sz="2400" b="0" i="0" dirty="0">
                           <a:solidFill>
                             <a:srgbClr val="1A1A1A"/>
                           </a:solidFill>
@@ -23696,7 +23476,7 @@
                     <a:p>
                       <a:pPr algn="ctr"/>
                       <a:r>
-                        <a:rPr sz="2400" b="0" i="0">
+                        <a:rPr sz="2400" b="0" i="0" dirty="0">
                           <a:solidFill>
                             <a:srgbClr val="1A1A1A"/>
                           </a:solidFill>
@@ -23792,7 +23572,7 @@
                     <a:p>
                       <a:pPr algn="ctr"/>
                       <a:r>
-                        <a:rPr sz="2400" b="0" i="0">
+                        <a:rPr sz="2400" b="0" i="0" dirty="0">
                           <a:solidFill>
                             <a:srgbClr val="1A1A1A"/>
                           </a:solidFill>
@@ -23843,16 +23623,125 @@
           </a:graphicData>
         </a:graphic>
       </p:graphicFrame>
-      <p:sp>
-        <p:nvSpPr>
-          <p:cNvPr id="11" name="TextBox 10"/>
+    </p:spTree>
+  </p:cSld>
+  <p:clrMapOvr>
+    <a:masterClrMapping/>
+  </p:clrMapOvr>
+</p:sld>
+</file>
+
+<file path=ppt/slides/slide24.xml><?xml version="1.0" encoding="utf-8"?>
+<p:sld xmlns:a="http://schemas.openxmlformats.org/drawingml/2006/main" xmlns:r="http://schemas.openxmlformats.org/officeDocument/2006/relationships" xmlns:p="http://schemas.openxmlformats.org/presentationml/2006/main">
+  <p:cSld>
+    <p:spTree>
+      <p:nvGrpSpPr>
+        <p:cNvPr id="1" name=""/>
+        <p:cNvGrpSpPr/>
+        <p:nvPr/>
+      </p:nvGrpSpPr>
+      <p:grpSpPr>
+        <a:xfrm>
+          <a:off x="0" y="0"/>
+          <a:ext cx="0" cy="0"/>
+          <a:chOff x="0" y="0"/>
+          <a:chExt cx="0" cy="0"/>
+        </a:xfrm>
+      </p:grpSpPr>
+      <p:sp>
+        <p:nvSpPr>
+          <p:cNvPr id="3" name="Date Placeholder 2"/>
+          <p:cNvSpPr>
+            <a:spLocks noGrp="1"/>
+          </p:cNvSpPr>
+          <p:nvPr>
+            <p:ph type="dt" sz="half" idx="10"/>
+          </p:nvPr>
+        </p:nvSpPr>
+        <p:spPr/>
+        <p:txBody>
+          <a:bodyPr/>
+          <a:lstStyle/>
+          <a:p>
+            <a:fld id="{79B7A7E6-0BB5-4562-B4D8-B2D95118667A}" type="datetime3">
+              <a:rPr lang="en-US" smtClean="0">
+                <a:latin typeface="Times New Roman" panose="02020603050405020304" pitchFamily="18" charset="0"/>
+                <a:cs typeface="Times New Roman" panose="02020603050405020304" pitchFamily="18" charset="0"/>
+              </a:rPr>
+              <a:t>27 October 2026</a:t>
+            </a:fld>
+            <a:endParaRPr lang="en-US" dirty="0">
+              <a:latin typeface="Times New Roman" panose="02020603050405020304" pitchFamily="18" charset="0"/>
+              <a:cs typeface="Times New Roman" panose="02020603050405020304" pitchFamily="18" charset="0"/>
+            </a:endParaRPr>
+          </a:p>
+        </p:txBody>
+      </p:sp>
+      <p:sp>
+        <p:nvSpPr>
+          <p:cNvPr id="7" name="Footer Placeholder 6"/>
+          <p:cNvSpPr>
+            <a:spLocks noGrp="1"/>
+          </p:cNvSpPr>
+          <p:nvPr>
+            <p:ph type="ftr" sz="quarter" idx="11"/>
+          </p:nvPr>
+        </p:nvSpPr>
+        <p:spPr/>
+        <p:txBody>
+          <a:bodyPr/>
+          <a:lstStyle/>
+          <a:p>
+            <a:r>
+              <a:rPr lang="en-IN" dirty="0">
+                <a:latin typeface="Times New Roman" panose="02020603050405020304" pitchFamily="18" charset="0"/>
+                <a:cs typeface="Times New Roman" panose="02020603050405020304" pitchFamily="18" charset="0"/>
+              </a:rPr>
+              <a:t>Dept of CSE </a:t>
+            </a:r>
+          </a:p>
+        </p:txBody>
+      </p:sp>
+      <p:sp>
+        <p:nvSpPr>
+          <p:cNvPr id="8" name="Slide Number Placeholder 7"/>
+          <p:cNvSpPr>
+            <a:spLocks noGrp="1"/>
+          </p:cNvSpPr>
+          <p:nvPr>
+            <p:ph type="sldNum" sz="quarter" idx="12"/>
+          </p:nvPr>
+        </p:nvSpPr>
+        <p:spPr/>
+        <p:txBody>
+          <a:bodyPr/>
+          <a:lstStyle/>
+          <a:p>
+            <a:fld id="{B6F15528-21DE-4FAA-801E-634DDDAF4B2B}" type="slidenum">
+              <a:rPr lang="en-IN" smtClean="0">
+                <a:latin typeface="Times New Roman" panose="02020603050405020304" pitchFamily="18" charset="0"/>
+                <a:cs typeface="Times New Roman" panose="02020603050405020304" pitchFamily="18" charset="0"/>
+              </a:rPr>
+              <a:pPr/>
+              <a:t>24</a:t>
+            </a:fld>
+            <a:endParaRPr lang="en-IN" dirty="0">
+              <a:latin typeface="Times New Roman" panose="02020603050405020304" pitchFamily="18" charset="0"/>
+              <a:cs typeface="Times New Roman" panose="02020603050405020304" pitchFamily="18" charset="0"/>
+            </a:endParaRPr>
+          </a:p>
+        </p:txBody>
+      </p:sp>
+      <p:sp>
+        <p:nvSpPr>
+          <p:cNvPr id="9" name="TextBox 8"/>
           <p:cNvSpPr txBox="1"/>
           <p:nvPr/>
         </p:nvSpPr>
         <p:spPr>
           <a:xfrm>
-            <a:off x="1257300" y="7500000"/>
-            <a:ext cx="15773400" cy="900000"/>
+            <a:off x="508000" y="230000"/>
+            <a:ext cx="17272000" cy="1015663"/>
           </a:xfrm>
           <a:prstGeom prst="rect">
             <a:avLst/>
@@ -23867,14 +23756,148 @@
           <a:p>
             <a:pPr algn="ctr"/>
             <a:r>
-              <a:rPr sz="2600" b="0" i="1" dirty="0">
+              <a:rPr sz="6000" b="1" i="0" dirty="0">
                 <a:solidFill>
                   <a:srgbClr val="1A1A1A"/>
                 </a:solidFill>
                 <a:latin typeface="Times New Roman"/>
                 <a:cs typeface="Times New Roman"/>
               </a:rPr>
-              <a:t>The LOSO baseline is a stricter test (unseen patients); v2 and v4 share the same event-level split and are directly comparable.</a:t>
+              <a:t>Implementation</a:t>
+            </a:r>
+            <a:r>
+              <a:rPr lang="en-US" sz="6000" b="1" i="0" dirty="0">
+                <a:solidFill>
+                  <a:srgbClr val="1A1A1A"/>
+                </a:solidFill>
+                <a:latin typeface="Times New Roman"/>
+                <a:cs typeface="Times New Roman"/>
+              </a:rPr>
+              <a:t> Technology</a:t>
+            </a:r>
+            <a:endParaRPr sz="6000" b="1" i="0" dirty="0">
+              <a:solidFill>
+                <a:srgbClr val="1A1A1A"/>
+              </a:solidFill>
+              <a:latin typeface="Times New Roman"/>
+              <a:cs typeface="Times New Roman"/>
+            </a:endParaRPr>
+          </a:p>
+        </p:txBody>
+      </p:sp>
+      <p:sp>
+        <p:nvSpPr>
+          <p:cNvPr id="10" name="TextBox 9"/>
+          <p:cNvSpPr txBox="1"/>
+          <p:nvPr/>
+        </p:nvSpPr>
+        <p:spPr>
+          <a:xfrm>
+            <a:off x="1257300" y="1750000"/>
+            <a:ext cx="15773400" cy="3502369"/>
+          </a:xfrm>
+          <a:prstGeom prst="rect">
+            <a:avLst/>
+          </a:prstGeom>
+          <a:noFill/>
+        </p:spPr>
+        <p:txBody>
+          <a:bodyPr wrap="square">
+            <a:spAutoFit/>
+          </a:bodyPr>
+          <a:lstStyle/>
+          <a:p>
+            <a:pPr marL="571500" indent="-571500">
+              <a:lnSpc>
+                <a:spcPct val="130000"/>
+              </a:lnSpc>
+              <a:spcAft>
+                <a:spcPts val="600"/>
+              </a:spcAft>
+              <a:buFont typeface="Arial"/>
+              <a:buChar char="•"/>
+            </a:pPr>
+            <a:r>
+              <a:rPr sz="3400" b="1" i="0" dirty="0">
+                <a:solidFill>
+                  <a:srgbClr val="1A1A1A"/>
+                </a:solidFill>
+                <a:latin typeface="Times New Roman"/>
+                <a:cs typeface="Times New Roman"/>
+              </a:rPr>
+              <a:t>Training: </a:t>
+            </a:r>
+            <a:r>
+              <a:rPr sz="3400" b="0" i="0" dirty="0" err="1">
+                <a:solidFill>
+                  <a:srgbClr val="1A1A1A"/>
+                </a:solidFill>
+                <a:latin typeface="Times New Roman"/>
+                <a:cs typeface="Times New Roman"/>
+              </a:rPr>
+              <a:t>PyTorch</a:t>
+            </a:r>
+            <a:r>
+              <a:rPr sz="3400" b="0" i="0" dirty="0">
+                <a:solidFill>
+                  <a:srgbClr val="1A1A1A"/>
+                </a:solidFill>
+                <a:latin typeface="Times New Roman"/>
+                <a:cs typeface="Times New Roman"/>
+              </a:rPr>
+              <a:t> (CRNN backbones), scikit-learn (SMOTE-balanced classifiers), MNE / HDF5 for EEG preprocessing.</a:t>
+            </a:r>
+          </a:p>
+          <a:p>
+            <a:pPr marL="571500" indent="-571500">
+              <a:lnSpc>
+                <a:spcPct val="130000"/>
+              </a:lnSpc>
+              <a:spcAft>
+                <a:spcPts val="600"/>
+              </a:spcAft>
+              <a:buFont typeface="Arial"/>
+              <a:buChar char="•"/>
+            </a:pPr>
+            <a:r>
+              <a:rPr sz="3400" b="1" i="0" dirty="0">
+                <a:solidFill>
+                  <a:srgbClr val="1A1A1A"/>
+                </a:solidFill>
+                <a:latin typeface="Times New Roman"/>
+                <a:cs typeface="Times New Roman"/>
+              </a:rPr>
+              <a:t>Inference path: </a:t>
+            </a:r>
+            <a:r>
+              <a:rPr sz="3400" b="0" i="0" dirty="0">
+                <a:solidFill>
+                  <a:srgbClr val="1A1A1A"/>
+                </a:solidFill>
+                <a:latin typeface="Times New Roman"/>
+                <a:cs typeface="Times New Roman"/>
+              </a:rPr>
+              <a:t>4 s windows → Stage 1 detector → threshold + minimum event duration → 10 s event windows → dual-embedding </a:t>
+            </a:r>
+            <a:r>
+              <a:rPr sz="3400" b="0" i="0" dirty="0" err="1">
+                <a:solidFill>
+                  <a:srgbClr val="1A1A1A"/>
+                </a:solidFill>
+                <a:latin typeface="Times New Roman"/>
+                <a:cs typeface="Times New Roman"/>
+              </a:rPr>
+              <a:t>HistGB</a:t>
+            </a:r>
+            <a:r>
+              <a:rPr sz="3400" b="0" i="0" dirty="0">
+                <a:solidFill>
+                  <a:srgbClr val="1A1A1A"/>
+                </a:solidFill>
+                <a:latin typeface="Times New Roman"/>
+                <a:cs typeface="Times New Roman"/>
+              </a:rPr>
+              <a:t> subtype with per-class probabilities.</a:t>
             </a:r>
           </a:p>
         </p:txBody>
@@ -23924,7 +23947,7 @@
                 <a:latin typeface="Times New Roman" panose="02020603050405020304" pitchFamily="18" charset="0"/>
                 <a:cs typeface="Times New Roman" panose="02020603050405020304" pitchFamily="18" charset="0"/>
               </a:rPr>
-              <a:t>26 October 2026</a:t>
+              <a:t>27 October 2026</a:t>
             </a:fld>
             <a:endParaRPr lang="en-US" dirty="0">
               <a:latin typeface="Times New Roman" panose="02020603050405020304" pitchFamily="18" charset="0"/>
@@ -23980,285 +24003,6 @@
               </a:rPr>
               <a:pPr/>
               <a:t>25</a:t>
-            </a:fld>
-            <a:endParaRPr lang="en-IN" dirty="0">
-              <a:latin typeface="Times New Roman" panose="02020603050405020304" pitchFamily="18" charset="0"/>
-              <a:cs typeface="Times New Roman" panose="02020603050405020304" pitchFamily="18" charset="0"/>
-            </a:endParaRPr>
-          </a:p>
-        </p:txBody>
-      </p:sp>
-      <p:sp>
-        <p:nvSpPr>
-          <p:cNvPr id="9" name="TextBox 8"/>
-          <p:cNvSpPr txBox="1"/>
-          <p:nvPr/>
-        </p:nvSpPr>
-        <p:spPr>
-          <a:xfrm>
-            <a:off x="508000" y="230000"/>
-            <a:ext cx="17272000" cy="1015663"/>
-          </a:xfrm>
-          <a:prstGeom prst="rect">
-            <a:avLst/>
-          </a:prstGeom>
-          <a:noFill/>
-        </p:spPr>
-        <p:txBody>
-          <a:bodyPr wrap="square">
-            <a:spAutoFit/>
-          </a:bodyPr>
-          <a:lstStyle/>
-          <a:p>
-            <a:pPr algn="ctr"/>
-            <a:r>
-              <a:rPr sz="6000" b="1" i="0" dirty="0">
-                <a:solidFill>
-                  <a:srgbClr val="1A1A1A"/>
-                </a:solidFill>
-                <a:latin typeface="Times New Roman"/>
-                <a:cs typeface="Times New Roman"/>
-              </a:rPr>
-              <a:t>Implementation</a:t>
-            </a:r>
-            <a:r>
-              <a:rPr lang="en-US" sz="6000" b="1" i="0" dirty="0">
-                <a:solidFill>
-                  <a:srgbClr val="1A1A1A"/>
-                </a:solidFill>
-                <a:latin typeface="Times New Roman"/>
-                <a:cs typeface="Times New Roman"/>
-              </a:rPr>
-              <a:t> Technology</a:t>
-            </a:r>
-            <a:endParaRPr sz="6000" b="1" i="0" dirty="0">
-              <a:solidFill>
-                <a:srgbClr val="1A1A1A"/>
-              </a:solidFill>
-              <a:latin typeface="Times New Roman"/>
-              <a:cs typeface="Times New Roman"/>
-            </a:endParaRPr>
-          </a:p>
-        </p:txBody>
-      </p:sp>
-      <p:sp>
-        <p:nvSpPr>
-          <p:cNvPr id="10" name="TextBox 9"/>
-          <p:cNvSpPr txBox="1"/>
-          <p:nvPr/>
-        </p:nvSpPr>
-        <p:spPr>
-          <a:xfrm>
-            <a:off x="1257300" y="1750000"/>
-            <a:ext cx="15773400" cy="3502369"/>
-          </a:xfrm>
-          <a:prstGeom prst="rect">
-            <a:avLst/>
-          </a:prstGeom>
-          <a:noFill/>
-        </p:spPr>
-        <p:txBody>
-          <a:bodyPr wrap="square">
-            <a:spAutoFit/>
-          </a:bodyPr>
-          <a:lstStyle/>
-          <a:p>
-            <a:pPr marL="571500" indent="-571500">
-              <a:lnSpc>
-                <a:spcPct val="130000"/>
-              </a:lnSpc>
-              <a:spcAft>
-                <a:spcPts val="600"/>
-              </a:spcAft>
-              <a:buFont typeface="Arial"/>
-              <a:buChar char="•"/>
-            </a:pPr>
-            <a:r>
-              <a:rPr sz="3400" b="1" i="0" dirty="0">
-                <a:solidFill>
-                  <a:srgbClr val="1A1A1A"/>
-                </a:solidFill>
-                <a:latin typeface="Times New Roman"/>
-                <a:cs typeface="Times New Roman"/>
-              </a:rPr>
-              <a:t>Training: </a:t>
-            </a:r>
-            <a:r>
-              <a:rPr sz="3400" b="0" i="0" dirty="0" err="1">
-                <a:solidFill>
-                  <a:srgbClr val="1A1A1A"/>
-                </a:solidFill>
-                <a:latin typeface="Times New Roman"/>
-                <a:cs typeface="Times New Roman"/>
-              </a:rPr>
-              <a:t>PyTorch</a:t>
-            </a:r>
-            <a:r>
-              <a:rPr sz="3400" b="0" i="0" dirty="0">
-                <a:solidFill>
-                  <a:srgbClr val="1A1A1A"/>
-                </a:solidFill>
-                <a:latin typeface="Times New Roman"/>
-                <a:cs typeface="Times New Roman"/>
-              </a:rPr>
-              <a:t> (CRNN backbones), scikit-learn (SMOTE-balanced classifiers), MNE / HDF5 for EEG preprocessing.</a:t>
-            </a:r>
-          </a:p>
-          <a:p>
-            <a:pPr marL="571500" indent="-571500">
-              <a:lnSpc>
-                <a:spcPct val="130000"/>
-              </a:lnSpc>
-              <a:spcAft>
-                <a:spcPts val="600"/>
-              </a:spcAft>
-              <a:buFont typeface="Arial"/>
-              <a:buChar char="•"/>
-            </a:pPr>
-            <a:r>
-              <a:rPr sz="3400" b="1" i="0" dirty="0">
-                <a:solidFill>
-                  <a:srgbClr val="1A1A1A"/>
-                </a:solidFill>
-                <a:latin typeface="Times New Roman"/>
-                <a:cs typeface="Times New Roman"/>
-              </a:rPr>
-              <a:t>Inference path: </a:t>
-            </a:r>
-            <a:r>
-              <a:rPr sz="3400" b="0" i="0" dirty="0">
-                <a:solidFill>
-                  <a:srgbClr val="1A1A1A"/>
-                </a:solidFill>
-                <a:latin typeface="Times New Roman"/>
-                <a:cs typeface="Times New Roman"/>
-              </a:rPr>
-              <a:t>4 s windows → Stage 1 detector → threshold + minimum event duration → 10 s event windows → dual-embedding </a:t>
-            </a:r>
-            <a:r>
-              <a:rPr sz="3400" b="0" i="0" dirty="0" err="1">
-                <a:solidFill>
-                  <a:srgbClr val="1A1A1A"/>
-                </a:solidFill>
-                <a:latin typeface="Times New Roman"/>
-                <a:cs typeface="Times New Roman"/>
-              </a:rPr>
-              <a:t>HistGB</a:t>
-            </a:r>
-            <a:r>
-              <a:rPr sz="3400" b="0" i="0" dirty="0">
-                <a:solidFill>
-                  <a:srgbClr val="1A1A1A"/>
-                </a:solidFill>
-                <a:latin typeface="Times New Roman"/>
-                <a:cs typeface="Times New Roman"/>
-              </a:rPr>
-              <a:t> subtype with per-class probabilities.</a:t>
-            </a:r>
-          </a:p>
-        </p:txBody>
-      </p:sp>
-    </p:spTree>
-  </p:cSld>
-  <p:clrMapOvr>
-    <a:masterClrMapping/>
-  </p:clrMapOvr>
-</p:sld>
-</file>
-
-<file path=ppt/slides/slide26.xml><?xml version="1.0" encoding="utf-8"?>
-<p:sld xmlns:a="http://schemas.openxmlformats.org/drawingml/2006/main" xmlns:r="http://schemas.openxmlformats.org/officeDocument/2006/relationships" xmlns:p="http://schemas.openxmlformats.org/presentationml/2006/main">
-  <p:cSld>
-    <p:spTree>
-      <p:nvGrpSpPr>
-        <p:cNvPr id="1" name=""/>
-        <p:cNvGrpSpPr/>
-        <p:nvPr/>
-      </p:nvGrpSpPr>
-      <p:grpSpPr>
-        <a:xfrm>
-          <a:off x="0" y="0"/>
-          <a:ext cx="0" cy="0"/>
-          <a:chOff x="0" y="0"/>
-          <a:chExt cx="0" cy="0"/>
-        </a:xfrm>
-      </p:grpSpPr>
-      <p:sp>
-        <p:nvSpPr>
-          <p:cNvPr id="3" name="Date Placeholder 2"/>
-          <p:cNvSpPr>
-            <a:spLocks noGrp="1"/>
-          </p:cNvSpPr>
-          <p:nvPr>
-            <p:ph type="dt" sz="half" idx="10"/>
-          </p:nvPr>
-        </p:nvSpPr>
-        <p:spPr/>
-        <p:txBody>
-          <a:bodyPr/>
-          <a:lstStyle/>
-          <a:p>
-            <a:fld id="{79B7A7E6-0BB5-4562-B4D8-B2D95118667A}" type="datetime3">
-              <a:rPr lang="en-US" smtClean="0">
-                <a:latin typeface="Times New Roman" panose="02020603050405020304" pitchFamily="18" charset="0"/>
-                <a:cs typeface="Times New Roman" panose="02020603050405020304" pitchFamily="18" charset="0"/>
-              </a:rPr>
-              <a:t>26 October 2026</a:t>
-            </a:fld>
-            <a:endParaRPr lang="en-US" dirty="0">
-              <a:latin typeface="Times New Roman" panose="02020603050405020304" pitchFamily="18" charset="0"/>
-              <a:cs typeface="Times New Roman" panose="02020603050405020304" pitchFamily="18" charset="0"/>
-            </a:endParaRPr>
-          </a:p>
-        </p:txBody>
-      </p:sp>
-      <p:sp>
-        <p:nvSpPr>
-          <p:cNvPr id="7" name="Footer Placeholder 6"/>
-          <p:cNvSpPr>
-            <a:spLocks noGrp="1"/>
-          </p:cNvSpPr>
-          <p:nvPr>
-            <p:ph type="ftr" sz="quarter" idx="11"/>
-          </p:nvPr>
-        </p:nvSpPr>
-        <p:spPr/>
-        <p:txBody>
-          <a:bodyPr/>
-          <a:lstStyle/>
-          <a:p>
-            <a:r>
-              <a:rPr lang="en-IN" dirty="0">
-                <a:latin typeface="Times New Roman" panose="02020603050405020304" pitchFamily="18" charset="0"/>
-                <a:cs typeface="Times New Roman" panose="02020603050405020304" pitchFamily="18" charset="0"/>
-              </a:rPr>
-              <a:t>Dept of CSE </a:t>
-            </a:r>
-          </a:p>
-        </p:txBody>
-      </p:sp>
-      <p:sp>
-        <p:nvSpPr>
-          <p:cNvPr id="8" name="Slide Number Placeholder 7"/>
-          <p:cNvSpPr>
-            <a:spLocks noGrp="1"/>
-          </p:cNvSpPr>
-          <p:nvPr>
-            <p:ph type="sldNum" sz="quarter" idx="12"/>
-          </p:nvPr>
-        </p:nvSpPr>
-        <p:spPr/>
-        <p:txBody>
-          <a:bodyPr/>
-          <a:lstStyle/>
-          <a:p>
-            <a:fld id="{B6F15528-21DE-4FAA-801E-634DDDAF4B2B}" type="slidenum">
-              <a:rPr lang="en-IN" smtClean="0">
-                <a:latin typeface="Times New Roman" panose="02020603050405020304" pitchFamily="18" charset="0"/>
-                <a:cs typeface="Times New Roman" panose="02020603050405020304" pitchFamily="18" charset="0"/>
-              </a:rPr>
-              <a:pPr/>
-              <a:t>26</a:t>
             </a:fld>
             <a:endParaRPr lang="en-IN" dirty="0">
               <a:latin typeface="Times New Roman" panose="02020603050405020304" pitchFamily="18" charset="0"/>
@@ -25311,7 +25055,7 @@
               <a:buChar char="•"/>
             </a:pPr>
             <a:r>
-              <a:rPr sz="2600" b="0" i="0">
+              <a:rPr sz="2600" b="0" i="0" dirty="0">
                 <a:solidFill>
                   <a:srgbClr val="1A1A1A"/>
                 </a:solidFill>
@@ -25333,7 +25077,7 @@
               <a:buChar char="•"/>
             </a:pPr>
             <a:r>
-              <a:rPr sz="2600" b="0" i="0">
+              <a:rPr sz="2600" b="0" i="0" dirty="0">
                 <a:solidFill>
                   <a:srgbClr val="1A1A1A"/>
                 </a:solidFill>
@@ -25341,6 +25085,271 @@
                 <a:cs typeface="Times New Roman"/>
               </a:rPr>
               <a:t>The two detectors are comparable (~0.82–0.85 AUROC); the CRNN trades specificity for higher sensitivity.</a:t>
+            </a:r>
+          </a:p>
+        </p:txBody>
+      </p:sp>
+    </p:spTree>
+  </p:cSld>
+  <p:clrMapOvr>
+    <a:masterClrMapping/>
+  </p:clrMapOvr>
+</p:sld>
+</file>
+
+<file path=ppt/slides/slide26.xml><?xml version="1.0" encoding="utf-8"?>
+<p:sld xmlns:a="http://schemas.openxmlformats.org/drawingml/2006/main" xmlns:r="http://schemas.openxmlformats.org/officeDocument/2006/relationships" xmlns:p="http://schemas.openxmlformats.org/presentationml/2006/main">
+  <p:cSld>
+    <p:spTree>
+      <p:nvGrpSpPr>
+        <p:cNvPr id="1" name=""/>
+        <p:cNvGrpSpPr/>
+        <p:nvPr/>
+      </p:nvGrpSpPr>
+      <p:grpSpPr>
+        <a:xfrm>
+          <a:off x="0" y="0"/>
+          <a:ext cx="0" cy="0"/>
+          <a:chOff x="0" y="0"/>
+          <a:chExt cx="0" cy="0"/>
+        </a:xfrm>
+      </p:grpSpPr>
+      <p:sp>
+        <p:nvSpPr>
+          <p:cNvPr id="3" name="Date Placeholder 2"/>
+          <p:cNvSpPr>
+            <a:spLocks noGrp="1"/>
+          </p:cNvSpPr>
+          <p:nvPr>
+            <p:ph type="dt" sz="half" idx="10"/>
+          </p:nvPr>
+        </p:nvSpPr>
+        <p:spPr/>
+        <p:txBody>
+          <a:bodyPr/>
+          <a:lstStyle/>
+          <a:p>
+            <a:fld id="{79B7A7E6-0BB5-4562-B4D8-B2D95118667A}" type="datetime3">
+              <a:rPr lang="en-US" smtClean="0">
+                <a:latin typeface="Times New Roman" panose="02020603050405020304" pitchFamily="18" charset="0"/>
+                <a:cs typeface="Times New Roman" panose="02020603050405020304" pitchFamily="18" charset="0"/>
+              </a:rPr>
+              <a:t>27 October 2026</a:t>
+            </a:fld>
+            <a:endParaRPr lang="en-US" dirty="0">
+              <a:latin typeface="Times New Roman" panose="02020603050405020304" pitchFamily="18" charset="0"/>
+              <a:cs typeface="Times New Roman" panose="02020603050405020304" pitchFamily="18" charset="0"/>
+            </a:endParaRPr>
+          </a:p>
+        </p:txBody>
+      </p:sp>
+      <p:sp>
+        <p:nvSpPr>
+          <p:cNvPr id="7" name="Footer Placeholder 6"/>
+          <p:cNvSpPr>
+            <a:spLocks noGrp="1"/>
+          </p:cNvSpPr>
+          <p:nvPr>
+            <p:ph type="ftr" sz="quarter" idx="11"/>
+          </p:nvPr>
+        </p:nvSpPr>
+        <p:spPr/>
+        <p:txBody>
+          <a:bodyPr/>
+          <a:lstStyle/>
+          <a:p>
+            <a:r>
+              <a:rPr lang="en-IN" dirty="0">
+                <a:latin typeface="Times New Roman" panose="02020603050405020304" pitchFamily="18" charset="0"/>
+                <a:cs typeface="Times New Roman" panose="02020603050405020304" pitchFamily="18" charset="0"/>
+              </a:rPr>
+              <a:t>Dept of CSE </a:t>
+            </a:r>
+          </a:p>
+        </p:txBody>
+      </p:sp>
+      <p:sp>
+        <p:nvSpPr>
+          <p:cNvPr id="8" name="Slide Number Placeholder 7"/>
+          <p:cNvSpPr>
+            <a:spLocks noGrp="1"/>
+          </p:cNvSpPr>
+          <p:nvPr>
+            <p:ph type="sldNum" sz="quarter" idx="12"/>
+          </p:nvPr>
+        </p:nvSpPr>
+        <p:spPr/>
+        <p:txBody>
+          <a:bodyPr/>
+          <a:lstStyle/>
+          <a:p>
+            <a:fld id="{B6F15528-21DE-4FAA-801E-634DDDAF4B2B}" type="slidenum">
+              <a:rPr lang="en-IN" smtClean="0">
+                <a:latin typeface="Times New Roman" panose="02020603050405020304" pitchFamily="18" charset="0"/>
+                <a:cs typeface="Times New Roman" panose="02020603050405020304" pitchFamily="18" charset="0"/>
+              </a:rPr>
+              <a:pPr/>
+              <a:t>26</a:t>
+            </a:fld>
+            <a:endParaRPr lang="en-IN" dirty="0">
+              <a:latin typeface="Times New Roman" panose="02020603050405020304" pitchFamily="18" charset="0"/>
+              <a:cs typeface="Times New Roman" panose="02020603050405020304" pitchFamily="18" charset="0"/>
+            </a:endParaRPr>
+          </a:p>
+        </p:txBody>
+      </p:sp>
+      <p:sp>
+        <p:nvSpPr>
+          <p:cNvPr id="9" name="TextBox 8"/>
+          <p:cNvSpPr txBox="1"/>
+          <p:nvPr/>
+        </p:nvSpPr>
+        <p:spPr>
+          <a:xfrm>
+            <a:off x="508000" y="230000"/>
+            <a:ext cx="17272000" cy="1100000"/>
+          </a:xfrm>
+          <a:prstGeom prst="rect">
+            <a:avLst/>
+          </a:prstGeom>
+          <a:noFill/>
+        </p:spPr>
+        <p:txBody>
+          <a:bodyPr wrap="square">
+            <a:spAutoFit/>
+          </a:bodyPr>
+          <a:lstStyle/>
+          <a:p>
+            <a:pPr algn="ctr"/>
+            <a:r>
+              <a:rPr sz="6000" b="1" i="0">
+                <a:solidFill>
+                  <a:srgbClr val="1A1A1A"/>
+                </a:solidFill>
+                <a:latin typeface="Times New Roman"/>
+                <a:cs typeface="Times New Roman"/>
+              </a:rPr>
+              <a:t>Results: Training Curves</a:t>
+            </a:r>
+          </a:p>
+        </p:txBody>
+      </p:sp>
+      <p:pic>
+        <p:nvPicPr>
+          <p:cNvPr id="10" name="Picture 9" descr="phase_a_training_curves.png"/>
+          <p:cNvPicPr>
+            <a:picLocks noChangeAspect="1"/>
+          </p:cNvPicPr>
+          <p:nvPr/>
+        </p:nvPicPr>
+        <p:blipFill>
+          <a:blip r:embed="rId3"/>
+          <a:stretch>
+            <a:fillRect/>
+          </a:stretch>
+        </p:blipFill>
+        <p:spPr>
+          <a:xfrm>
+            <a:off x="2072869" y="1450000"/>
+            <a:ext cx="14142261" cy="3450000"/>
+          </a:xfrm>
+          <a:prstGeom prst="rect">
+            <a:avLst/>
+          </a:prstGeom>
+        </p:spPr>
+      </p:pic>
+      <p:sp>
+        <p:nvSpPr>
+          <p:cNvPr id="11" name="TextBox 10"/>
+          <p:cNvSpPr txBox="1"/>
+          <p:nvPr/>
+        </p:nvSpPr>
+        <p:spPr>
+          <a:xfrm>
+            <a:off x="1257300" y="4900000"/>
+            <a:ext cx="15773400" cy="450000"/>
+          </a:xfrm>
+          <a:prstGeom prst="rect">
+            <a:avLst/>
+          </a:prstGeom>
+          <a:noFill/>
+        </p:spPr>
+        <p:txBody>
+          <a:bodyPr wrap="square">
+            <a:spAutoFit/>
+          </a:bodyPr>
+          <a:lstStyle/>
+          <a:p>
+            <a:pPr algn="ctr"/>
+            <a:r>
+              <a:rPr sz="2400" b="0" i="1">
+                <a:solidFill>
+                  <a:srgbClr val="1A1A1A"/>
+                </a:solidFill>
+                <a:latin typeface="Times New Roman"/>
+                <a:cs typeface="Times New Roman"/>
+              </a:rPr>
+              <a:t>CRNN (Phase A): focal loss, validation AUROC (best 0.830) and sensitivity / specificity / F1</a:t>
+            </a:r>
+          </a:p>
+        </p:txBody>
+      </p:sp>
+      <p:pic>
+        <p:nvPicPr>
+          <p:cNvPr id="12" name="Picture 11" descr="training_curves.png"/>
+          <p:cNvPicPr>
+            <a:picLocks noChangeAspect="1"/>
+          </p:cNvPicPr>
+          <p:nvPr/>
+        </p:nvPicPr>
+        <p:blipFill>
+          <a:blip r:embed="rId4"/>
+          <a:stretch>
+            <a:fillRect/>
+          </a:stretch>
+        </p:blipFill>
+        <p:spPr>
+          <a:xfrm>
+            <a:off x="2072869" y="5450000"/>
+            <a:ext cx="14142261" cy="3450000"/>
+          </a:xfrm>
+          <a:prstGeom prst="rect">
+            <a:avLst/>
+          </a:prstGeom>
+        </p:spPr>
+      </p:pic>
+      <p:sp>
+        <p:nvSpPr>
+          <p:cNvPr id="13" name="TextBox 12"/>
+          <p:cNvSpPr txBox="1"/>
+          <p:nvPr/>
+        </p:nvSpPr>
+        <p:spPr>
+          <a:xfrm>
+            <a:off x="1257300" y="8900000"/>
+            <a:ext cx="15773400" cy="450000"/>
+          </a:xfrm>
+          <a:prstGeom prst="rect">
+            <a:avLst/>
+          </a:prstGeom>
+          <a:noFill/>
+        </p:spPr>
+        <p:txBody>
+          <a:bodyPr wrap="square">
+            <a:spAutoFit/>
+          </a:bodyPr>
+          <a:lstStyle/>
+          <a:p>
+            <a:pPr algn="ctr"/>
+            <a:r>
+              <a:rPr sz="2400" b="0" i="1">
+                <a:solidFill>
+                  <a:srgbClr val="1A1A1A"/>
+                </a:solidFill>
+                <a:latin typeface="Times New Roman"/>
+                <a:cs typeface="Times New Roman"/>
+              </a:rPr>
+              <a:t>1D-CNN (Stage 1): training curves for comparison</a:t>
             </a:r>
           </a:p>
         </p:txBody>
@@ -25390,7 +25399,7 @@
                 <a:latin typeface="Times New Roman" panose="02020603050405020304" pitchFamily="18" charset="0"/>
                 <a:cs typeface="Times New Roman" panose="02020603050405020304" pitchFamily="18" charset="0"/>
               </a:rPr>
-              <a:t>26 October 2026</a:t>
+              <a:t>27 October 2026</a:t>
             </a:fld>
             <a:endParaRPr lang="en-US" dirty="0">
               <a:latin typeface="Times New Roman" panose="02020603050405020304" pitchFamily="18" charset="0"/>
@@ -25446,271 +25455,6 @@
               </a:rPr>
               <a:pPr/>
               <a:t>27</a:t>
-            </a:fld>
-            <a:endParaRPr lang="en-IN" dirty="0">
-              <a:latin typeface="Times New Roman" panose="02020603050405020304" pitchFamily="18" charset="0"/>
-              <a:cs typeface="Times New Roman" panose="02020603050405020304" pitchFamily="18" charset="0"/>
-            </a:endParaRPr>
-          </a:p>
-        </p:txBody>
-      </p:sp>
-      <p:sp>
-        <p:nvSpPr>
-          <p:cNvPr id="9" name="TextBox 8"/>
-          <p:cNvSpPr txBox="1"/>
-          <p:nvPr/>
-        </p:nvSpPr>
-        <p:spPr>
-          <a:xfrm>
-            <a:off x="508000" y="230000"/>
-            <a:ext cx="17272000" cy="1100000"/>
-          </a:xfrm>
-          <a:prstGeom prst="rect">
-            <a:avLst/>
-          </a:prstGeom>
-          <a:noFill/>
-        </p:spPr>
-        <p:txBody>
-          <a:bodyPr wrap="square">
-            <a:spAutoFit/>
-          </a:bodyPr>
-          <a:lstStyle/>
-          <a:p>
-            <a:pPr algn="ctr"/>
-            <a:r>
-              <a:rPr sz="6000" b="1" i="0">
-                <a:solidFill>
-                  <a:srgbClr val="1A1A1A"/>
-                </a:solidFill>
-                <a:latin typeface="Times New Roman"/>
-                <a:cs typeface="Times New Roman"/>
-              </a:rPr>
-              <a:t>Results: Training Curves</a:t>
-            </a:r>
-          </a:p>
-        </p:txBody>
-      </p:sp>
-      <p:pic>
-        <p:nvPicPr>
-          <p:cNvPr id="10" name="Picture 9" descr="phase_a_training_curves.png"/>
-          <p:cNvPicPr>
-            <a:picLocks noChangeAspect="1"/>
-          </p:cNvPicPr>
-          <p:nvPr/>
-        </p:nvPicPr>
-        <p:blipFill>
-          <a:blip r:embed="rId3"/>
-          <a:stretch>
-            <a:fillRect/>
-          </a:stretch>
-        </p:blipFill>
-        <p:spPr>
-          <a:xfrm>
-            <a:off x="2072869" y="1450000"/>
-            <a:ext cx="14142261" cy="3450000"/>
-          </a:xfrm>
-          <a:prstGeom prst="rect">
-            <a:avLst/>
-          </a:prstGeom>
-        </p:spPr>
-      </p:pic>
-      <p:sp>
-        <p:nvSpPr>
-          <p:cNvPr id="11" name="TextBox 10"/>
-          <p:cNvSpPr txBox="1"/>
-          <p:nvPr/>
-        </p:nvSpPr>
-        <p:spPr>
-          <a:xfrm>
-            <a:off x="1257300" y="4900000"/>
-            <a:ext cx="15773400" cy="450000"/>
-          </a:xfrm>
-          <a:prstGeom prst="rect">
-            <a:avLst/>
-          </a:prstGeom>
-          <a:noFill/>
-        </p:spPr>
-        <p:txBody>
-          <a:bodyPr wrap="square">
-            <a:spAutoFit/>
-          </a:bodyPr>
-          <a:lstStyle/>
-          <a:p>
-            <a:pPr algn="ctr"/>
-            <a:r>
-              <a:rPr sz="2400" b="0" i="1">
-                <a:solidFill>
-                  <a:srgbClr val="1A1A1A"/>
-                </a:solidFill>
-                <a:latin typeface="Times New Roman"/>
-                <a:cs typeface="Times New Roman"/>
-              </a:rPr>
-              <a:t>CRNN (Phase A): focal loss, validation AUROC (best 0.830) and sensitivity / specificity / F1</a:t>
-            </a:r>
-          </a:p>
-        </p:txBody>
-      </p:sp>
-      <p:pic>
-        <p:nvPicPr>
-          <p:cNvPr id="12" name="Picture 11" descr="training_curves.png"/>
-          <p:cNvPicPr>
-            <a:picLocks noChangeAspect="1"/>
-          </p:cNvPicPr>
-          <p:nvPr/>
-        </p:nvPicPr>
-        <p:blipFill>
-          <a:blip r:embed="rId4"/>
-          <a:stretch>
-            <a:fillRect/>
-          </a:stretch>
-        </p:blipFill>
-        <p:spPr>
-          <a:xfrm>
-            <a:off x="2072869" y="5450000"/>
-            <a:ext cx="14142261" cy="3450000"/>
-          </a:xfrm>
-          <a:prstGeom prst="rect">
-            <a:avLst/>
-          </a:prstGeom>
-        </p:spPr>
-      </p:pic>
-      <p:sp>
-        <p:nvSpPr>
-          <p:cNvPr id="13" name="TextBox 12"/>
-          <p:cNvSpPr txBox="1"/>
-          <p:nvPr/>
-        </p:nvSpPr>
-        <p:spPr>
-          <a:xfrm>
-            <a:off x="1257300" y="8900000"/>
-            <a:ext cx="15773400" cy="450000"/>
-          </a:xfrm>
-          <a:prstGeom prst="rect">
-            <a:avLst/>
-          </a:prstGeom>
-          <a:noFill/>
-        </p:spPr>
-        <p:txBody>
-          <a:bodyPr wrap="square">
-            <a:spAutoFit/>
-          </a:bodyPr>
-          <a:lstStyle/>
-          <a:p>
-            <a:pPr algn="ctr"/>
-            <a:r>
-              <a:rPr sz="2400" b="0" i="1">
-                <a:solidFill>
-                  <a:srgbClr val="1A1A1A"/>
-                </a:solidFill>
-                <a:latin typeface="Times New Roman"/>
-                <a:cs typeface="Times New Roman"/>
-              </a:rPr>
-              <a:t>1D-CNN (Stage 1): training curves for comparison</a:t>
-            </a:r>
-          </a:p>
-        </p:txBody>
-      </p:sp>
-    </p:spTree>
-  </p:cSld>
-  <p:clrMapOvr>
-    <a:masterClrMapping/>
-  </p:clrMapOvr>
-</p:sld>
-</file>
-
-<file path=ppt/slides/slide28.xml><?xml version="1.0" encoding="utf-8"?>
-<p:sld xmlns:a="http://schemas.openxmlformats.org/drawingml/2006/main" xmlns:r="http://schemas.openxmlformats.org/officeDocument/2006/relationships" xmlns:p="http://schemas.openxmlformats.org/presentationml/2006/main">
-  <p:cSld>
-    <p:spTree>
-      <p:nvGrpSpPr>
-        <p:cNvPr id="1" name=""/>
-        <p:cNvGrpSpPr/>
-        <p:nvPr/>
-      </p:nvGrpSpPr>
-      <p:grpSpPr>
-        <a:xfrm>
-          <a:off x="0" y="0"/>
-          <a:ext cx="0" cy="0"/>
-          <a:chOff x="0" y="0"/>
-          <a:chExt cx="0" cy="0"/>
-        </a:xfrm>
-      </p:grpSpPr>
-      <p:sp>
-        <p:nvSpPr>
-          <p:cNvPr id="3" name="Date Placeholder 2"/>
-          <p:cNvSpPr>
-            <a:spLocks noGrp="1"/>
-          </p:cNvSpPr>
-          <p:nvPr>
-            <p:ph type="dt" sz="half" idx="10"/>
-          </p:nvPr>
-        </p:nvSpPr>
-        <p:spPr/>
-        <p:txBody>
-          <a:bodyPr/>
-          <a:lstStyle/>
-          <a:p>
-            <a:fld id="{79B7A7E6-0BB5-4562-B4D8-B2D95118667A}" type="datetime3">
-              <a:rPr lang="en-US" smtClean="0">
-                <a:latin typeface="Times New Roman" panose="02020603050405020304" pitchFamily="18" charset="0"/>
-                <a:cs typeface="Times New Roman" panose="02020603050405020304" pitchFamily="18" charset="0"/>
-              </a:rPr>
-              <a:t>26 October 2026</a:t>
-            </a:fld>
-            <a:endParaRPr lang="en-US" dirty="0">
-              <a:latin typeface="Times New Roman" panose="02020603050405020304" pitchFamily="18" charset="0"/>
-              <a:cs typeface="Times New Roman" panose="02020603050405020304" pitchFamily="18" charset="0"/>
-            </a:endParaRPr>
-          </a:p>
-        </p:txBody>
-      </p:sp>
-      <p:sp>
-        <p:nvSpPr>
-          <p:cNvPr id="7" name="Footer Placeholder 6"/>
-          <p:cNvSpPr>
-            <a:spLocks noGrp="1"/>
-          </p:cNvSpPr>
-          <p:nvPr>
-            <p:ph type="ftr" sz="quarter" idx="11"/>
-          </p:nvPr>
-        </p:nvSpPr>
-        <p:spPr/>
-        <p:txBody>
-          <a:bodyPr/>
-          <a:lstStyle/>
-          <a:p>
-            <a:r>
-              <a:rPr lang="en-IN" dirty="0">
-                <a:latin typeface="Times New Roman" panose="02020603050405020304" pitchFamily="18" charset="0"/>
-                <a:cs typeface="Times New Roman" panose="02020603050405020304" pitchFamily="18" charset="0"/>
-              </a:rPr>
-              <a:t>Dept of CSE </a:t>
-            </a:r>
-          </a:p>
-        </p:txBody>
-      </p:sp>
-      <p:sp>
-        <p:nvSpPr>
-          <p:cNvPr id="8" name="Slide Number Placeholder 7"/>
-          <p:cNvSpPr>
-            <a:spLocks noGrp="1"/>
-          </p:cNvSpPr>
-          <p:nvPr>
-            <p:ph type="sldNum" sz="quarter" idx="12"/>
-          </p:nvPr>
-        </p:nvSpPr>
-        <p:spPr/>
-        <p:txBody>
-          <a:bodyPr/>
-          <a:lstStyle/>
-          <a:p>
-            <a:fld id="{B6F15528-21DE-4FAA-801E-634DDDAF4B2B}" type="slidenum">
-              <a:rPr lang="en-IN" smtClean="0">
-                <a:latin typeface="Times New Roman" panose="02020603050405020304" pitchFamily="18" charset="0"/>
-                <a:cs typeface="Times New Roman" panose="02020603050405020304" pitchFamily="18" charset="0"/>
-              </a:rPr>
-              <a:pPr/>
-              <a:t>28</a:t>
             </a:fld>
             <a:endParaRPr lang="en-IN" dirty="0">
               <a:latin typeface="Times New Roman" panose="02020603050405020304" pitchFamily="18" charset="0"/>
@@ -30307,7 +30051,7 @@
 </p:sld>
 </file>
 
-<file path=ppt/slides/slide29.xml><?xml version="1.0" encoding="utf-8"?>
+<file path=ppt/slides/slide28.xml><?xml version="1.0" encoding="utf-8"?>
 <p:sld xmlns:a="http://schemas.openxmlformats.org/drawingml/2006/main" xmlns:r="http://schemas.openxmlformats.org/officeDocument/2006/relationships" xmlns:p="http://schemas.openxmlformats.org/presentationml/2006/main">
   <p:cSld>
     <p:spTree>
@@ -30344,7 +30088,7 @@
                 <a:latin typeface="Times New Roman" panose="02020603050405020304" pitchFamily="18" charset="0"/>
                 <a:cs typeface="Times New Roman" panose="02020603050405020304" pitchFamily="18" charset="0"/>
               </a:rPr>
-              <a:t>26 October 2026</a:t>
+              <a:t>27 October 2026</a:t>
             </a:fld>
             <a:endParaRPr lang="en-US" dirty="0">
               <a:latin typeface="Times New Roman" panose="02020603050405020304" pitchFamily="18" charset="0"/>
@@ -30399,7 +30143,7 @@
                 <a:cs typeface="Times New Roman" panose="02020603050405020304" pitchFamily="18" charset="0"/>
               </a:rPr>
               <a:pPr/>
-              <a:t>29</a:t>
+              <a:t>28</a:t>
             </a:fld>
             <a:endParaRPr lang="en-IN" dirty="0">
               <a:latin typeface="Times New Roman" panose="02020603050405020304" pitchFamily="18" charset="0"/>
@@ -30567,6 +30311,278 @@
                 <a:cs typeface="Times New Roman"/>
               </a:rPr>
               <a:t>Only the majority class is recognised: FA recall 0 / 45, FBTC recall 0 / 124.</a:t>
+            </a:r>
+          </a:p>
+        </p:txBody>
+      </p:sp>
+    </p:spTree>
+  </p:cSld>
+  <p:clrMapOvr>
+    <a:masterClrMapping/>
+  </p:clrMapOvr>
+</p:sld>
+</file>
+
+<file path=ppt/slides/slide29.xml><?xml version="1.0" encoding="utf-8"?>
+<p:sld xmlns:a="http://schemas.openxmlformats.org/drawingml/2006/main" xmlns:r="http://schemas.openxmlformats.org/officeDocument/2006/relationships" xmlns:p="http://schemas.openxmlformats.org/presentationml/2006/main">
+  <p:cSld>
+    <p:spTree>
+      <p:nvGrpSpPr>
+        <p:cNvPr id="1" name=""/>
+        <p:cNvGrpSpPr/>
+        <p:nvPr/>
+      </p:nvGrpSpPr>
+      <p:grpSpPr>
+        <a:xfrm>
+          <a:off x="0" y="0"/>
+          <a:ext cx="0" cy="0"/>
+          <a:chOff x="0" y="0"/>
+          <a:chExt cx="0" cy="0"/>
+        </a:xfrm>
+      </p:grpSpPr>
+      <p:sp>
+        <p:nvSpPr>
+          <p:cNvPr id="3" name="Date Placeholder 2"/>
+          <p:cNvSpPr>
+            <a:spLocks noGrp="1"/>
+          </p:cNvSpPr>
+          <p:nvPr>
+            <p:ph type="dt" sz="half" idx="10"/>
+          </p:nvPr>
+        </p:nvSpPr>
+        <p:spPr/>
+        <p:txBody>
+          <a:bodyPr/>
+          <a:lstStyle/>
+          <a:p>
+            <a:fld id="{79B7A7E6-0BB5-4562-B4D8-B2D95118667A}" type="datetime3">
+              <a:rPr lang="en-US" smtClean="0">
+                <a:latin typeface="Times New Roman" panose="02020603050405020304" pitchFamily="18" charset="0"/>
+                <a:cs typeface="Times New Roman" panose="02020603050405020304" pitchFamily="18" charset="0"/>
+              </a:rPr>
+              <a:t>27 October 2026</a:t>
+            </a:fld>
+            <a:endParaRPr lang="en-US" dirty="0">
+              <a:latin typeface="Times New Roman" panose="02020603050405020304" pitchFamily="18" charset="0"/>
+              <a:cs typeface="Times New Roman" panose="02020603050405020304" pitchFamily="18" charset="0"/>
+            </a:endParaRPr>
+          </a:p>
+        </p:txBody>
+      </p:sp>
+      <p:sp>
+        <p:nvSpPr>
+          <p:cNvPr id="7" name="Footer Placeholder 6"/>
+          <p:cNvSpPr>
+            <a:spLocks noGrp="1"/>
+          </p:cNvSpPr>
+          <p:nvPr>
+            <p:ph type="ftr" sz="quarter" idx="11"/>
+          </p:nvPr>
+        </p:nvSpPr>
+        <p:spPr/>
+        <p:txBody>
+          <a:bodyPr/>
+          <a:lstStyle/>
+          <a:p>
+            <a:r>
+              <a:rPr lang="en-IN" dirty="0">
+                <a:latin typeface="Times New Roman" panose="02020603050405020304" pitchFamily="18" charset="0"/>
+                <a:cs typeface="Times New Roman" panose="02020603050405020304" pitchFamily="18" charset="0"/>
+              </a:rPr>
+              <a:t>Dept of CSE </a:t>
+            </a:r>
+          </a:p>
+        </p:txBody>
+      </p:sp>
+      <p:sp>
+        <p:nvSpPr>
+          <p:cNvPr id="8" name="Slide Number Placeholder 7"/>
+          <p:cNvSpPr>
+            <a:spLocks noGrp="1"/>
+          </p:cNvSpPr>
+          <p:nvPr>
+            <p:ph type="sldNum" sz="quarter" idx="12"/>
+          </p:nvPr>
+        </p:nvSpPr>
+        <p:spPr/>
+        <p:txBody>
+          <a:bodyPr/>
+          <a:lstStyle/>
+          <a:p>
+            <a:fld id="{B6F15528-21DE-4FAA-801E-634DDDAF4B2B}" type="slidenum">
+              <a:rPr lang="en-IN" smtClean="0">
+                <a:latin typeface="Times New Roman" panose="02020603050405020304" pitchFamily="18" charset="0"/>
+                <a:cs typeface="Times New Roman" panose="02020603050405020304" pitchFamily="18" charset="0"/>
+              </a:rPr>
+              <a:pPr/>
+              <a:t>29</a:t>
+            </a:fld>
+            <a:endParaRPr lang="en-IN" dirty="0">
+              <a:latin typeface="Times New Roman" panose="02020603050405020304" pitchFamily="18" charset="0"/>
+              <a:cs typeface="Times New Roman" panose="02020603050405020304" pitchFamily="18" charset="0"/>
+            </a:endParaRPr>
+          </a:p>
+        </p:txBody>
+      </p:sp>
+      <p:sp>
+        <p:nvSpPr>
+          <p:cNvPr id="9" name="TextBox 8"/>
+          <p:cNvSpPr txBox="1"/>
+          <p:nvPr/>
+        </p:nvSpPr>
+        <p:spPr>
+          <a:xfrm>
+            <a:off x="508000" y="230000"/>
+            <a:ext cx="17272000" cy="1100000"/>
+          </a:xfrm>
+          <a:prstGeom prst="rect">
+            <a:avLst/>
+          </a:prstGeom>
+          <a:noFill/>
+        </p:spPr>
+        <p:txBody>
+          <a:bodyPr wrap="square">
+            <a:spAutoFit/>
+          </a:bodyPr>
+          <a:lstStyle/>
+          <a:p>
+            <a:pPr algn="ctr"/>
+            <a:r>
+              <a:rPr sz="5400" b="1" i="0">
+                <a:solidFill>
+                  <a:srgbClr val="1A1A1A"/>
+                </a:solidFill>
+                <a:latin typeface="Times New Roman"/>
+                <a:cs typeface="Times New Roman"/>
+              </a:rPr>
+              <a:t>Confusion Matrices: Fine-tuned CRNN (v2)</a:t>
+            </a:r>
+          </a:p>
+        </p:txBody>
+      </p:sp>
+      <p:pic>
+        <p:nvPicPr>
+          <p:cNvPr id="10" name="Picture 9" descr="v2_confusion_matrices.png"/>
+          <p:cNvPicPr>
+            <a:picLocks noChangeAspect="1"/>
+          </p:cNvPicPr>
+          <p:nvPr/>
+        </p:nvPicPr>
+        <p:blipFill>
+          <a:blip r:embed="rId3"/>
+          <a:stretch>
+            <a:fillRect/>
+          </a:stretch>
+        </p:blipFill>
+        <p:spPr>
+          <a:xfrm>
+            <a:off x="2847339" y="1450000"/>
+            <a:ext cx="12593321" cy="5299999"/>
+          </a:xfrm>
+          <a:prstGeom prst="rect">
+            <a:avLst/>
+          </a:prstGeom>
+        </p:spPr>
+      </p:pic>
+      <p:sp>
+        <p:nvSpPr>
+          <p:cNvPr id="11" name="TextBox 10"/>
+          <p:cNvSpPr txBox="1"/>
+          <p:nvPr/>
+        </p:nvSpPr>
+        <p:spPr>
+          <a:xfrm>
+            <a:off x="1257300" y="6800000"/>
+            <a:ext cx="15773400" cy="450000"/>
+          </a:xfrm>
+          <a:prstGeom prst="rect">
+            <a:avLst/>
+          </a:prstGeom>
+          <a:noFill/>
+        </p:spPr>
+        <p:txBody>
+          <a:bodyPr wrap="square">
+            <a:spAutoFit/>
+          </a:bodyPr>
+          <a:lstStyle/>
+          <a:p>
+            <a:pPr algn="ctr"/>
+            <a:r>
+              <a:rPr sz="2400" b="0" i="1">
+                <a:solidFill>
+                  <a:srgbClr val="1A1A1A"/>
+                </a:solidFill>
+                <a:latin typeface="Times New Roman"/>
+                <a:cs typeface="Times New Roman"/>
+              </a:rPr>
+              <a:t>Left: real seizure windows     Right: adversarial interictal control</a:t>
+            </a:r>
+          </a:p>
+        </p:txBody>
+      </p:sp>
+      <p:sp>
+        <p:nvSpPr>
+          <p:cNvPr id="12" name="TextBox 11"/>
+          <p:cNvSpPr txBox="1"/>
+          <p:nvPr/>
+        </p:nvSpPr>
+        <p:spPr>
+          <a:xfrm>
+            <a:off x="1257300" y="7350000"/>
+            <a:ext cx="15773400" cy="7400000"/>
+          </a:xfrm>
+          <a:prstGeom prst="rect">
+            <a:avLst/>
+          </a:prstGeom>
+          <a:noFill/>
+        </p:spPr>
+        <p:txBody>
+          <a:bodyPr wrap="square">
+            <a:spAutoFit/>
+          </a:bodyPr>
+          <a:lstStyle/>
+          <a:p>
+            <a:pPr marL="571500" indent="-571500">
+              <a:lnSpc>
+                <a:spcPct val="105000"/>
+              </a:lnSpc>
+              <a:spcAft>
+                <a:spcPts val="600"/>
+              </a:spcAft>
+              <a:buFont typeface="Arial"/>
+              <a:buChar char="•"/>
+            </a:pPr>
+            <a:r>
+              <a:rPr sz="2800" b="0" i="0">
+                <a:solidFill>
+                  <a:srgbClr val="1A1A1A"/>
+                </a:solidFill>
+                <a:latin typeface="Times New Roman"/>
+                <a:cs typeface="Times New Roman"/>
+              </a:rPr>
+              <a:t>Test windows: 550; accuracy 0.907, macro-F1 0.526.</a:t>
+            </a:r>
+          </a:p>
+          <a:p>
+            <a:pPr marL="571500" indent="-571500">
+              <a:lnSpc>
+                <a:spcPct val="105000"/>
+              </a:lnSpc>
+              <a:spcAft>
+                <a:spcPts val="600"/>
+              </a:spcAft>
+              <a:buFont typeface="Arial"/>
+              <a:buChar char="•"/>
+            </a:pPr>
+            <a:r>
+              <a:rPr sz="2800" b="0" i="0">
+                <a:solidFill>
+                  <a:srgbClr val="1A1A1A"/>
+                </a:solidFill>
+                <a:latin typeface="Times New Roman"/>
+                <a:cs typeface="Times New Roman"/>
+              </a:rPr>
+              <a:t>FBTC recall rises to 17 / 37 (45.9 %), but Focal Aware is still missed (0 / 16).</a:t>
             </a:r>
           </a:p>
         </p:txBody>
@@ -30652,7 +30668,7 @@
                 <a:latin typeface="Times New Roman" panose="02020603050405020304" pitchFamily="18" charset="0"/>
                 <a:cs typeface="Times New Roman" panose="02020603050405020304" pitchFamily="18" charset="0"/>
               </a:rPr>
-              <a:t>26 October 2026</a:t>
+              <a:t>27 October 2026</a:t>
             </a:fld>
             <a:endParaRPr lang="en-US" dirty="0">
               <a:latin typeface="Times New Roman" panose="02020603050405020304" pitchFamily="18" charset="0"/>
@@ -30836,7 +30852,7 @@
                 <a:latin typeface="Times New Roman" panose="02020603050405020304" pitchFamily="18" charset="0"/>
                 <a:cs typeface="Times New Roman" panose="02020603050405020304" pitchFamily="18" charset="0"/>
               </a:rPr>
-              <a:t>26 October 2026</a:t>
+              <a:t>27 October 2026</a:t>
             </a:fld>
             <a:endParaRPr lang="en-US" dirty="0">
               <a:latin typeface="Times New Roman" panose="02020603050405020304" pitchFamily="18" charset="0"/>
@@ -30931,14 +30947,14 @@
                 <a:latin typeface="Times New Roman"/>
                 <a:cs typeface="Times New Roman"/>
               </a:rPr>
-              <a:t>Confusion Matrices: Fine-tuned CRNN (v2)</a:t>
+              <a:t>Confusion Matrices: EEG-HDC v4 (Proposed)</a:t>
             </a:r>
           </a:p>
         </p:txBody>
       </p:sp>
       <p:pic>
         <p:nvPicPr>
-          <p:cNvPr id="10" name="Picture 9" descr="v2_confusion_matrices.png"/>
+          <p:cNvPr id="10" name="Picture 9" descr="v4_confusion_matrices (1).png"/>
           <p:cNvPicPr>
             <a:picLocks noChangeAspect="1"/>
           </p:cNvPicPr>
@@ -30952,8 +30968,8 @@
         </p:blipFill>
         <p:spPr>
           <a:xfrm>
-            <a:off x="2847339" y="1450000"/>
-            <a:ext cx="12593321" cy="5299999"/>
+            <a:off x="2973562" y="1450000"/>
+            <a:ext cx="12340875" cy="5300000"/>
           </a:xfrm>
           <a:prstGeom prst="rect">
             <a:avLst/>
@@ -31036,7 +31052,7 @@
                 <a:latin typeface="Times New Roman"/>
                 <a:cs typeface="Times New Roman"/>
               </a:rPr>
-              <a:t>Test windows: 550; accuracy 0.907, macro-F1 0.526.</a:t>
+              <a:t>Test windows: 550; accuracy 0.911, macro-F1 0.612.</a:t>
             </a:r>
           </a:p>
           <a:p>
@@ -31058,7 +31074,7 @@
                 <a:latin typeface="Times New Roman"/>
                 <a:cs typeface="Times New Roman"/>
               </a:rPr>
-              <a:t>FBTC recall rises to 17 / 37 (45.9 %), but Focal Aware is still missed (0 / 16).</a:t>
+              <a:t>Recall: FA 4 / 16 (25.0 %), FIA 478 / 497 (96.2 %), FBTC 19 / 37 (51.4 %) – the first model to recognise all three subtypes.</a:t>
             </a:r>
           </a:p>
         </p:txBody>
@@ -31108,7 +31124,7 @@
                 <a:latin typeface="Times New Roman" panose="02020603050405020304" pitchFamily="18" charset="0"/>
                 <a:cs typeface="Times New Roman" panose="02020603050405020304" pitchFamily="18" charset="0"/>
               </a:rPr>
-              <a:t>26 October 2026</a:t>
+              <a:t>27 October 2026</a:t>
             </a:fld>
             <a:endParaRPr lang="en-US" dirty="0">
               <a:latin typeface="Times New Roman" panose="02020603050405020304" pitchFamily="18" charset="0"/>
@@ -31196,42 +31212,36 @@
           <a:p>
             <a:pPr algn="ctr"/>
             <a:r>
-              <a:rPr sz="5400" b="1" i="0">
+              <a:rPr sz="6000" b="1" i="0">
                 <a:solidFill>
                   <a:srgbClr val="1A1A1A"/>
                 </a:solidFill>
                 <a:latin typeface="Times New Roman"/>
                 <a:cs typeface="Times New Roman"/>
               </a:rPr>
-              <a:t>Confusion Matrices: EEG-HDC v4 (Proposed)</a:t>
+              <a:t>Comparison: Per-Class Recall</a:t>
             </a:r>
           </a:p>
         </p:txBody>
       </p:sp>
-      <p:pic>
-        <p:nvPicPr>
-          <p:cNvPr id="10" name="Picture 9" descr="v4_confusion_matrices (1).png"/>
-          <p:cNvPicPr>
-            <a:picLocks noChangeAspect="1"/>
-          </p:cNvPicPr>
+      <p:graphicFrame>
+        <p:nvGraphicFramePr>
+          <p:cNvPr id="10" name="Chart 9"/>
+          <p:cNvGraphicFramePr>
+            <a:graphicFrameLocks noGrp="1"/>
+          </p:cNvGraphicFramePr>
           <p:nvPr/>
-        </p:nvPicPr>
-        <p:blipFill>
-          <a:blip r:embed="rId3"/>
-          <a:stretch>
-            <a:fillRect/>
-          </a:stretch>
-        </p:blipFill>
-        <p:spPr>
-          <a:xfrm>
-            <a:off x="2973562" y="1450000"/>
-            <a:ext cx="12340875" cy="5300000"/>
-          </a:xfrm>
-          <a:prstGeom prst="rect">
-            <a:avLst/>
-          </a:prstGeom>
-        </p:spPr>
-      </p:pic>
+        </p:nvGraphicFramePr>
+        <p:xfrm>
+          <a:off x="1257300" y="1550000"/>
+          <a:ext cx="15773400" cy="6300000"/>
+        </p:xfrm>
+        <a:graphic>
+          <a:graphicData uri="http://schemas.openxmlformats.org/drawingml/2006/chart">
+            <c:chart xmlns:c="http://schemas.openxmlformats.org/drawingml/2006/chart" xmlns:r="http://schemas.openxmlformats.org/officeDocument/2006/relationships" r:id="rId3"/>
+          </a:graphicData>
+        </a:graphic>
+      </p:graphicFrame>
       <p:sp>
         <p:nvSpPr>
           <p:cNvPr id="11" name="TextBox 10"/>
@@ -31240,43 +31250,7 @@
         </p:nvSpPr>
         <p:spPr>
           <a:xfrm>
-            <a:off x="1257300" y="6800000"/>
-            <a:ext cx="15773400" cy="450000"/>
-          </a:xfrm>
-          <a:prstGeom prst="rect">
-            <a:avLst/>
-          </a:prstGeom>
-          <a:noFill/>
-        </p:spPr>
-        <p:txBody>
-          <a:bodyPr wrap="square">
-            <a:spAutoFit/>
-          </a:bodyPr>
-          <a:lstStyle/>
-          <a:p>
-            <a:pPr algn="ctr"/>
-            <a:r>
-              <a:rPr sz="2400" b="0" i="1">
-                <a:solidFill>
-                  <a:srgbClr val="1A1A1A"/>
-                </a:solidFill>
-                <a:latin typeface="Times New Roman"/>
-                <a:cs typeface="Times New Roman"/>
-              </a:rPr>
-              <a:t>Left: real seizure windows     Right: adversarial interictal control</a:t>
-            </a:r>
-          </a:p>
-        </p:txBody>
-      </p:sp>
-      <p:sp>
-        <p:nvSpPr>
-          <p:cNvPr id="12" name="TextBox 11"/>
-          <p:cNvSpPr txBox="1"/>
-          <p:nvPr/>
-        </p:nvSpPr>
-        <p:spPr>
-          <a:xfrm>
-            <a:off x="1257300" y="7350000"/>
+            <a:off x="1257300" y="8000000"/>
             <a:ext cx="15773400" cy="7400000"/>
           </a:xfrm>
           <a:prstGeom prst="rect">
@@ -31301,14 +31275,14 @@
               <a:buChar char="•"/>
             </a:pPr>
             <a:r>
-              <a:rPr sz="2800" b="0" i="0">
+              <a:rPr sz="2800" b="0" i="0" dirty="0">
                 <a:solidFill>
                   <a:srgbClr val="1A1A1A"/>
                 </a:solidFill>
                 <a:latin typeface="Times New Roman"/>
                 <a:cs typeface="Times New Roman"/>
               </a:rPr>
-              <a:t>Test windows: 550; accuracy 0.911, macro-F1 0.612.</a:t>
+              <a:t>v4 is the only model with non-zero recall on every subtype, at the same overall accuracy (~0.91).</a:t>
             </a:r>
           </a:p>
           <a:p>
@@ -31323,14 +31297,14 @@
               <a:buChar char="•"/>
             </a:pPr>
             <a:r>
-              <a:rPr sz="2800" b="0" i="0">
+              <a:rPr sz="2800" b="0" i="0" dirty="0">
                 <a:solidFill>
                   <a:srgbClr val="1A1A1A"/>
                 </a:solidFill>
                 <a:latin typeface="Times New Roman"/>
                 <a:cs typeface="Times New Roman"/>
               </a:rPr>
-              <a:t>Recall: FA 4 / 16 (25.0 %), FIA 478 / 497 (96.2 %), FBTC 19 / 37 (51.4 %) – the first model to recognise all three subtypes.</a:t>
+              <a:t>Gains on minority classes cost under 3 points of FIA recall.</a:t>
             </a:r>
           </a:p>
         </p:txBody>
@@ -31380,7 +31354,7 @@
                 <a:latin typeface="Times New Roman" panose="02020603050405020304" pitchFamily="18" charset="0"/>
                 <a:cs typeface="Times New Roman" panose="02020603050405020304" pitchFamily="18" charset="0"/>
               </a:rPr>
-              <a:t>26 October 2026</a:t>
+              <a:t>27 October 2026</a:t>
             </a:fld>
             <a:endParaRPr lang="en-US" dirty="0">
               <a:latin typeface="Times New Roman" panose="02020603050405020304" pitchFamily="18" charset="0"/>
@@ -31436,236 +31410,6 @@
               </a:rPr>
               <a:pPr/>
               <a:t>32</a:t>
-            </a:fld>
-            <a:endParaRPr lang="en-IN" dirty="0">
-              <a:latin typeface="Times New Roman" panose="02020603050405020304" pitchFamily="18" charset="0"/>
-              <a:cs typeface="Times New Roman" panose="02020603050405020304" pitchFamily="18" charset="0"/>
-            </a:endParaRPr>
-          </a:p>
-        </p:txBody>
-      </p:sp>
-      <p:sp>
-        <p:nvSpPr>
-          <p:cNvPr id="9" name="TextBox 8"/>
-          <p:cNvSpPr txBox="1"/>
-          <p:nvPr/>
-        </p:nvSpPr>
-        <p:spPr>
-          <a:xfrm>
-            <a:off x="508000" y="230000"/>
-            <a:ext cx="17272000" cy="1100000"/>
-          </a:xfrm>
-          <a:prstGeom prst="rect">
-            <a:avLst/>
-          </a:prstGeom>
-          <a:noFill/>
-        </p:spPr>
-        <p:txBody>
-          <a:bodyPr wrap="square">
-            <a:spAutoFit/>
-          </a:bodyPr>
-          <a:lstStyle/>
-          <a:p>
-            <a:pPr algn="ctr"/>
-            <a:r>
-              <a:rPr sz="6000" b="1" i="0">
-                <a:solidFill>
-                  <a:srgbClr val="1A1A1A"/>
-                </a:solidFill>
-                <a:latin typeface="Times New Roman"/>
-                <a:cs typeface="Times New Roman"/>
-              </a:rPr>
-              <a:t>Comparison: Per-Class Recall</a:t>
-            </a:r>
-          </a:p>
-        </p:txBody>
-      </p:sp>
-      <p:graphicFrame>
-        <p:nvGraphicFramePr>
-          <p:cNvPr id="10" name="Chart 9"/>
-          <p:cNvGraphicFramePr>
-            <a:graphicFrameLocks noGrp="1"/>
-          </p:cNvGraphicFramePr>
-          <p:nvPr/>
-        </p:nvGraphicFramePr>
-        <p:xfrm>
-          <a:off x="1257300" y="1550000"/>
-          <a:ext cx="15773400" cy="6300000"/>
-        </p:xfrm>
-        <a:graphic>
-          <a:graphicData uri="http://schemas.openxmlformats.org/drawingml/2006/chart">
-            <c:chart xmlns:c="http://schemas.openxmlformats.org/drawingml/2006/chart" xmlns:r="http://schemas.openxmlformats.org/officeDocument/2006/relationships" r:id="rId3"/>
-          </a:graphicData>
-        </a:graphic>
-      </p:graphicFrame>
-      <p:sp>
-        <p:nvSpPr>
-          <p:cNvPr id="11" name="TextBox 10"/>
-          <p:cNvSpPr txBox="1"/>
-          <p:nvPr/>
-        </p:nvSpPr>
-        <p:spPr>
-          <a:xfrm>
-            <a:off x="1257300" y="8000000"/>
-            <a:ext cx="15773400" cy="7400000"/>
-          </a:xfrm>
-          <a:prstGeom prst="rect">
-            <a:avLst/>
-          </a:prstGeom>
-          <a:noFill/>
-        </p:spPr>
-        <p:txBody>
-          <a:bodyPr wrap="square">
-            <a:spAutoFit/>
-          </a:bodyPr>
-          <a:lstStyle/>
-          <a:p>
-            <a:pPr marL="571500" indent="-571500">
-              <a:lnSpc>
-                <a:spcPct val="105000"/>
-              </a:lnSpc>
-              <a:spcAft>
-                <a:spcPts val="600"/>
-              </a:spcAft>
-              <a:buFont typeface="Arial"/>
-              <a:buChar char="•"/>
-            </a:pPr>
-            <a:r>
-              <a:rPr sz="2800" b="0" i="0" dirty="0">
-                <a:solidFill>
-                  <a:srgbClr val="1A1A1A"/>
-                </a:solidFill>
-                <a:latin typeface="Times New Roman"/>
-                <a:cs typeface="Times New Roman"/>
-              </a:rPr>
-              <a:t>v4 is the only model with non-zero recall on every subtype, at the same overall accuracy (~0.91).</a:t>
-            </a:r>
-          </a:p>
-          <a:p>
-            <a:pPr marL="571500" indent="-571500">
-              <a:lnSpc>
-                <a:spcPct val="105000"/>
-              </a:lnSpc>
-              <a:spcAft>
-                <a:spcPts val="600"/>
-              </a:spcAft>
-              <a:buFont typeface="Arial"/>
-              <a:buChar char="•"/>
-            </a:pPr>
-            <a:r>
-              <a:rPr sz="2800" b="0" i="0" dirty="0">
-                <a:solidFill>
-                  <a:srgbClr val="1A1A1A"/>
-                </a:solidFill>
-                <a:latin typeface="Times New Roman"/>
-                <a:cs typeface="Times New Roman"/>
-              </a:rPr>
-              <a:t>Gains on minority classes cost under 3 points of FIA recall.</a:t>
-            </a:r>
-          </a:p>
-        </p:txBody>
-      </p:sp>
-    </p:spTree>
-  </p:cSld>
-  <p:clrMapOvr>
-    <a:masterClrMapping/>
-  </p:clrMapOvr>
-</p:sld>
-</file>
-
-<file path=ppt/slides/slide33.xml><?xml version="1.0" encoding="utf-8"?>
-<p:sld xmlns:a="http://schemas.openxmlformats.org/drawingml/2006/main" xmlns:r="http://schemas.openxmlformats.org/officeDocument/2006/relationships" xmlns:p="http://schemas.openxmlformats.org/presentationml/2006/main">
-  <p:cSld>
-    <p:spTree>
-      <p:nvGrpSpPr>
-        <p:cNvPr id="1" name=""/>
-        <p:cNvGrpSpPr/>
-        <p:nvPr/>
-      </p:nvGrpSpPr>
-      <p:grpSpPr>
-        <a:xfrm>
-          <a:off x="0" y="0"/>
-          <a:ext cx="0" cy="0"/>
-          <a:chOff x="0" y="0"/>
-          <a:chExt cx="0" cy="0"/>
-        </a:xfrm>
-      </p:grpSpPr>
-      <p:sp>
-        <p:nvSpPr>
-          <p:cNvPr id="3" name="Date Placeholder 2"/>
-          <p:cNvSpPr>
-            <a:spLocks noGrp="1"/>
-          </p:cNvSpPr>
-          <p:nvPr>
-            <p:ph type="dt" sz="half" idx="10"/>
-          </p:nvPr>
-        </p:nvSpPr>
-        <p:spPr/>
-        <p:txBody>
-          <a:bodyPr/>
-          <a:lstStyle/>
-          <a:p>
-            <a:fld id="{79B7A7E6-0BB5-4562-B4D8-B2D95118667A}" type="datetime3">
-              <a:rPr lang="en-US" smtClean="0">
-                <a:latin typeface="Times New Roman" panose="02020603050405020304" pitchFamily="18" charset="0"/>
-                <a:cs typeface="Times New Roman" panose="02020603050405020304" pitchFamily="18" charset="0"/>
-              </a:rPr>
-              <a:t>26 October 2026</a:t>
-            </a:fld>
-            <a:endParaRPr lang="en-US" dirty="0">
-              <a:latin typeface="Times New Roman" panose="02020603050405020304" pitchFamily="18" charset="0"/>
-              <a:cs typeface="Times New Roman" panose="02020603050405020304" pitchFamily="18" charset="0"/>
-            </a:endParaRPr>
-          </a:p>
-        </p:txBody>
-      </p:sp>
-      <p:sp>
-        <p:nvSpPr>
-          <p:cNvPr id="7" name="Footer Placeholder 6"/>
-          <p:cNvSpPr>
-            <a:spLocks noGrp="1"/>
-          </p:cNvSpPr>
-          <p:nvPr>
-            <p:ph type="ftr" sz="quarter" idx="11"/>
-          </p:nvPr>
-        </p:nvSpPr>
-        <p:spPr/>
-        <p:txBody>
-          <a:bodyPr/>
-          <a:lstStyle/>
-          <a:p>
-            <a:r>
-              <a:rPr lang="en-IN" dirty="0">
-                <a:latin typeface="Times New Roman" panose="02020603050405020304" pitchFamily="18" charset="0"/>
-                <a:cs typeface="Times New Roman" panose="02020603050405020304" pitchFamily="18" charset="0"/>
-              </a:rPr>
-              <a:t>Dept of CSE </a:t>
-            </a:r>
-          </a:p>
-        </p:txBody>
-      </p:sp>
-      <p:sp>
-        <p:nvSpPr>
-          <p:cNvPr id="8" name="Slide Number Placeholder 7"/>
-          <p:cNvSpPr>
-            <a:spLocks noGrp="1"/>
-          </p:cNvSpPr>
-          <p:nvPr>
-            <p:ph type="sldNum" sz="quarter" idx="12"/>
-          </p:nvPr>
-        </p:nvSpPr>
-        <p:spPr/>
-        <p:txBody>
-          <a:bodyPr/>
-          <a:lstStyle/>
-          <a:p>
-            <a:fld id="{B6F15528-21DE-4FAA-801E-634DDDAF4B2B}" type="slidenum">
-              <a:rPr lang="en-IN" smtClean="0">
-                <a:latin typeface="Times New Roman" panose="02020603050405020304" pitchFamily="18" charset="0"/>
-                <a:cs typeface="Times New Roman" panose="02020603050405020304" pitchFamily="18" charset="0"/>
-              </a:rPr>
-              <a:pPr/>
-              <a:t>33</a:t>
             </a:fld>
             <a:endParaRPr lang="en-IN" dirty="0">
               <a:latin typeface="Times New Roman" panose="02020603050405020304" pitchFamily="18" charset="0"/>
@@ -33252,7 +32996,7 @@
 </p:sld>
 </file>
 
-<file path=ppt/slides/slide34.xml><?xml version="1.0" encoding="utf-8"?>
+<file path=ppt/slides/slide33.xml><?xml version="1.0" encoding="utf-8"?>
 <p:sld xmlns:a="http://schemas.openxmlformats.org/drawingml/2006/main" xmlns:r="http://schemas.openxmlformats.org/officeDocument/2006/relationships" xmlns:p="http://schemas.openxmlformats.org/presentationml/2006/main">
   <p:cSld>
     <p:spTree>
@@ -33289,7 +33033,7 @@
                 <a:latin typeface="Times New Roman" panose="02020603050405020304" pitchFamily="18" charset="0"/>
                 <a:cs typeface="Times New Roman" panose="02020603050405020304" pitchFamily="18" charset="0"/>
               </a:rPr>
-              <a:t>26 October 2026</a:t>
+              <a:t>27 October 2026</a:t>
             </a:fld>
             <a:endParaRPr lang="en-US" dirty="0">
               <a:latin typeface="Times New Roman" panose="02020603050405020304" pitchFamily="18" charset="0"/>
@@ -33344,7 +33088,7 @@
                 <a:cs typeface="Times New Roman" panose="02020603050405020304" pitchFamily="18" charset="0"/>
               </a:rPr>
               <a:pPr/>
-              <a:t>34</a:t>
+              <a:t>33</a:t>
             </a:fld>
             <a:endParaRPr lang="en-IN" dirty="0">
               <a:latin typeface="Times New Roman" panose="02020603050405020304" pitchFamily="18" charset="0"/>
@@ -33492,6 +33236,258 @@
                 <a:cs typeface="Times New Roman"/>
               </a:rPr>
               <a:t>Configuration shown: SMOTE 3× FA / 5× FBTC.</a:t>
+            </a:r>
+          </a:p>
+        </p:txBody>
+      </p:sp>
+    </p:spTree>
+  </p:cSld>
+  <p:clrMapOvr>
+    <a:masterClrMapping/>
+  </p:clrMapOvr>
+</p:sld>
+</file>
+
+<file path=ppt/slides/slide34.xml><?xml version="1.0" encoding="utf-8"?>
+<p:sld xmlns:a="http://schemas.openxmlformats.org/drawingml/2006/main" xmlns:r="http://schemas.openxmlformats.org/officeDocument/2006/relationships" xmlns:p="http://schemas.openxmlformats.org/presentationml/2006/main">
+  <p:cSld>
+    <p:spTree>
+      <p:nvGrpSpPr>
+        <p:cNvPr id="1" name=""/>
+        <p:cNvGrpSpPr/>
+        <p:nvPr/>
+      </p:nvGrpSpPr>
+      <p:grpSpPr>
+        <a:xfrm>
+          <a:off x="0" y="0"/>
+          <a:ext cx="0" cy="0"/>
+          <a:chOff x="0" y="0"/>
+          <a:chExt cx="0" cy="0"/>
+        </a:xfrm>
+      </p:grpSpPr>
+      <p:sp>
+        <p:nvSpPr>
+          <p:cNvPr id="3" name="Date Placeholder 2"/>
+          <p:cNvSpPr>
+            <a:spLocks noGrp="1"/>
+          </p:cNvSpPr>
+          <p:nvPr>
+            <p:ph type="dt" sz="half" idx="10"/>
+          </p:nvPr>
+        </p:nvSpPr>
+        <p:spPr/>
+        <p:txBody>
+          <a:bodyPr/>
+          <a:lstStyle/>
+          <a:p>
+            <a:fld id="{79B7A7E6-0BB5-4562-B4D8-B2D95118667A}" type="datetime3">
+              <a:rPr lang="en-US" smtClean="0">
+                <a:latin typeface="Times New Roman" panose="02020603050405020304" pitchFamily="18" charset="0"/>
+                <a:cs typeface="Times New Roman" panose="02020603050405020304" pitchFamily="18" charset="0"/>
+              </a:rPr>
+              <a:t>27 October 2026</a:t>
+            </a:fld>
+            <a:endParaRPr lang="en-US" dirty="0">
+              <a:latin typeface="Times New Roman" panose="02020603050405020304" pitchFamily="18" charset="0"/>
+              <a:cs typeface="Times New Roman" panose="02020603050405020304" pitchFamily="18" charset="0"/>
+            </a:endParaRPr>
+          </a:p>
+        </p:txBody>
+      </p:sp>
+      <p:sp>
+        <p:nvSpPr>
+          <p:cNvPr id="7" name="Footer Placeholder 6"/>
+          <p:cNvSpPr>
+            <a:spLocks noGrp="1"/>
+          </p:cNvSpPr>
+          <p:nvPr>
+            <p:ph type="ftr" sz="quarter" idx="11"/>
+          </p:nvPr>
+        </p:nvSpPr>
+        <p:spPr/>
+        <p:txBody>
+          <a:bodyPr/>
+          <a:lstStyle/>
+          <a:p>
+            <a:r>
+              <a:rPr lang="en-IN" dirty="0">
+                <a:latin typeface="Times New Roman" panose="02020603050405020304" pitchFamily="18" charset="0"/>
+                <a:cs typeface="Times New Roman" panose="02020603050405020304" pitchFamily="18" charset="0"/>
+              </a:rPr>
+              <a:t>Dept of CSE </a:t>
+            </a:r>
+          </a:p>
+        </p:txBody>
+      </p:sp>
+      <p:sp>
+        <p:nvSpPr>
+          <p:cNvPr id="8" name="Slide Number Placeholder 7"/>
+          <p:cNvSpPr>
+            <a:spLocks noGrp="1"/>
+          </p:cNvSpPr>
+          <p:nvPr>
+            <p:ph type="sldNum" sz="quarter" idx="12"/>
+          </p:nvPr>
+        </p:nvSpPr>
+        <p:spPr/>
+        <p:txBody>
+          <a:bodyPr/>
+          <a:lstStyle/>
+          <a:p>
+            <a:fld id="{B6F15528-21DE-4FAA-801E-634DDDAF4B2B}" type="slidenum">
+              <a:rPr lang="en-IN" smtClean="0">
+                <a:latin typeface="Times New Roman" panose="02020603050405020304" pitchFamily="18" charset="0"/>
+                <a:cs typeface="Times New Roman" panose="02020603050405020304" pitchFamily="18" charset="0"/>
+              </a:rPr>
+              <a:pPr/>
+              <a:t>34</a:t>
+            </a:fld>
+            <a:endParaRPr lang="en-IN" dirty="0">
+              <a:latin typeface="Times New Roman" panose="02020603050405020304" pitchFamily="18" charset="0"/>
+              <a:cs typeface="Times New Roman" panose="02020603050405020304" pitchFamily="18" charset="0"/>
+            </a:endParaRPr>
+          </a:p>
+        </p:txBody>
+      </p:sp>
+      <p:sp>
+        <p:nvSpPr>
+          <p:cNvPr id="9" name="TextBox 8"/>
+          <p:cNvSpPr txBox="1"/>
+          <p:nvPr/>
+        </p:nvSpPr>
+        <p:spPr>
+          <a:xfrm>
+            <a:off x="508000" y="230000"/>
+            <a:ext cx="17272000" cy="1100000"/>
+          </a:xfrm>
+          <a:prstGeom prst="rect">
+            <a:avLst/>
+          </a:prstGeom>
+          <a:noFill/>
+        </p:spPr>
+        <p:txBody>
+          <a:bodyPr wrap="square">
+            <a:spAutoFit/>
+          </a:bodyPr>
+          <a:lstStyle/>
+          <a:p>
+            <a:pPr algn="ctr"/>
+            <a:r>
+              <a:rPr sz="6000" b="1" i="0">
+                <a:solidFill>
+                  <a:srgbClr val="1A1A1A"/>
+                </a:solidFill>
+                <a:latin typeface="Times New Roman"/>
+                <a:cs typeface="Times New Roman"/>
+              </a:rPr>
+              <a:t>Model Evolution Across Versions</a:t>
+            </a:r>
+          </a:p>
+        </p:txBody>
+      </p:sp>
+      <p:graphicFrame>
+        <p:nvGraphicFramePr>
+          <p:cNvPr id="10" name="Chart 9"/>
+          <p:cNvGraphicFramePr>
+            <a:graphicFrameLocks noGrp="1"/>
+          </p:cNvGraphicFramePr>
+          <p:nvPr/>
+        </p:nvGraphicFramePr>
+        <p:xfrm>
+          <a:off x="1257300" y="1550000"/>
+          <a:ext cx="15773400" cy="5300000"/>
+        </p:xfrm>
+        <a:graphic>
+          <a:graphicData uri="http://schemas.openxmlformats.org/drawingml/2006/chart">
+            <c:chart xmlns:c="http://schemas.openxmlformats.org/drawingml/2006/chart" xmlns:r="http://schemas.openxmlformats.org/officeDocument/2006/relationships" r:id="rId3"/>
+          </a:graphicData>
+        </a:graphic>
+      </p:graphicFrame>
+      <p:sp>
+        <p:nvSpPr>
+          <p:cNvPr id="11" name="TextBox 10"/>
+          <p:cNvSpPr txBox="1"/>
+          <p:nvPr/>
+        </p:nvSpPr>
+        <p:spPr>
+          <a:xfrm>
+            <a:off x="1257300" y="7000000"/>
+            <a:ext cx="15773400" cy="7400000"/>
+          </a:xfrm>
+          <a:prstGeom prst="rect">
+            <a:avLst/>
+          </a:prstGeom>
+          <a:noFill/>
+        </p:spPr>
+        <p:txBody>
+          <a:bodyPr wrap="square">
+            <a:spAutoFit/>
+          </a:bodyPr>
+          <a:lstStyle/>
+          <a:p>
+            <a:pPr marL="571500" indent="-571500">
+              <a:lnSpc>
+                <a:spcPct val="110000"/>
+              </a:lnSpc>
+              <a:spcAft>
+                <a:spcPts val="600"/>
+              </a:spcAft>
+              <a:buFont typeface="Arial"/>
+              <a:buChar char="•"/>
+            </a:pPr>
+            <a:r>
+              <a:rPr sz="2800" b="0" i="0">
+                <a:solidFill>
+                  <a:srgbClr val="1A1A1A"/>
+                </a:solidFill>
+                <a:latin typeface="Times New Roman"/>
+                <a:cs typeface="Times New Roman"/>
+              </a:rPr>
+              <a:t>v1 (embedding SMOTE) recovers Focal Aware (13 / 16) but never FBTC (0 / 56); v2 (fine-tuned) recovers FBTC but loses FA.</a:t>
+            </a:r>
+          </a:p>
+          <a:p>
+            <a:pPr marL="571500" indent="-571500">
+              <a:lnSpc>
+                <a:spcPct val="110000"/>
+              </a:lnSpc>
+              <a:spcAft>
+                <a:spcPts val="600"/>
+              </a:spcAft>
+              <a:buFont typeface="Arial"/>
+              <a:buChar char="•"/>
+            </a:pPr>
+            <a:r>
+              <a:rPr sz="2800" b="0" i="0">
+                <a:solidFill>
+                  <a:srgbClr val="1A1A1A"/>
+                </a:solidFill>
+                <a:latin typeface="Times New Roman"/>
+                <a:cs typeface="Times New Roman"/>
+              </a:rPr>
+              <a:t>v3 (frozen detection backbone only) recovers FA but accuracy drops to 0.573.</a:t>
+            </a:r>
+          </a:p>
+          <a:p>
+            <a:pPr marL="571500" indent="-571500">
+              <a:lnSpc>
+                <a:spcPct val="110000"/>
+              </a:lnSpc>
+              <a:spcAft>
+                <a:spcPts val="600"/>
+              </a:spcAft>
+              <a:buFont typeface="Arial"/>
+              <a:buChar char="•"/>
+            </a:pPr>
+            <a:r>
+              <a:rPr sz="2800" b="0" i="0">
+                <a:solidFill>
+                  <a:srgbClr val="1A1A1A"/>
+                </a:solidFill>
+                <a:latin typeface="Times New Roman"/>
+                <a:cs typeface="Times New Roman"/>
+              </a:rPr>
+              <a:t>v4 fuses both views: highest macro-F1 (0.612) with accuracy above 0.91.</a:t>
             </a:r>
           </a:p>
         </p:txBody>
@@ -33541,7 +33537,7 @@
                 <a:latin typeface="Times New Roman" panose="02020603050405020304" pitchFamily="18" charset="0"/>
                 <a:cs typeface="Times New Roman" panose="02020603050405020304" pitchFamily="18" charset="0"/>
               </a:rPr>
-              <a:t>26 October 2026</a:t>
+              <a:t>27 October 2026</a:t>
             </a:fld>
             <a:endParaRPr lang="en-US" dirty="0">
               <a:latin typeface="Times New Roman" panose="02020603050405020304" pitchFamily="18" charset="0"/>
@@ -33597,258 +33593,6 @@
               </a:rPr>
               <a:pPr/>
               <a:t>35</a:t>
-            </a:fld>
-            <a:endParaRPr lang="en-IN" dirty="0">
-              <a:latin typeface="Times New Roman" panose="02020603050405020304" pitchFamily="18" charset="0"/>
-              <a:cs typeface="Times New Roman" panose="02020603050405020304" pitchFamily="18" charset="0"/>
-            </a:endParaRPr>
-          </a:p>
-        </p:txBody>
-      </p:sp>
-      <p:sp>
-        <p:nvSpPr>
-          <p:cNvPr id="9" name="TextBox 8"/>
-          <p:cNvSpPr txBox="1"/>
-          <p:nvPr/>
-        </p:nvSpPr>
-        <p:spPr>
-          <a:xfrm>
-            <a:off x="508000" y="230000"/>
-            <a:ext cx="17272000" cy="1100000"/>
-          </a:xfrm>
-          <a:prstGeom prst="rect">
-            <a:avLst/>
-          </a:prstGeom>
-          <a:noFill/>
-        </p:spPr>
-        <p:txBody>
-          <a:bodyPr wrap="square">
-            <a:spAutoFit/>
-          </a:bodyPr>
-          <a:lstStyle/>
-          <a:p>
-            <a:pPr algn="ctr"/>
-            <a:r>
-              <a:rPr sz="6000" b="1" i="0">
-                <a:solidFill>
-                  <a:srgbClr val="1A1A1A"/>
-                </a:solidFill>
-                <a:latin typeface="Times New Roman"/>
-                <a:cs typeface="Times New Roman"/>
-              </a:rPr>
-              <a:t>Model Evolution Across Versions</a:t>
-            </a:r>
-          </a:p>
-        </p:txBody>
-      </p:sp>
-      <p:graphicFrame>
-        <p:nvGraphicFramePr>
-          <p:cNvPr id="10" name="Chart 9"/>
-          <p:cNvGraphicFramePr>
-            <a:graphicFrameLocks noGrp="1"/>
-          </p:cNvGraphicFramePr>
-          <p:nvPr/>
-        </p:nvGraphicFramePr>
-        <p:xfrm>
-          <a:off x="1257300" y="1550000"/>
-          <a:ext cx="15773400" cy="5300000"/>
-        </p:xfrm>
-        <a:graphic>
-          <a:graphicData uri="http://schemas.openxmlformats.org/drawingml/2006/chart">
-            <c:chart xmlns:c="http://schemas.openxmlformats.org/drawingml/2006/chart" xmlns:r="http://schemas.openxmlformats.org/officeDocument/2006/relationships" r:id="rId3"/>
-          </a:graphicData>
-        </a:graphic>
-      </p:graphicFrame>
-      <p:sp>
-        <p:nvSpPr>
-          <p:cNvPr id="11" name="TextBox 10"/>
-          <p:cNvSpPr txBox="1"/>
-          <p:nvPr/>
-        </p:nvSpPr>
-        <p:spPr>
-          <a:xfrm>
-            <a:off x="1257300" y="7000000"/>
-            <a:ext cx="15773400" cy="7400000"/>
-          </a:xfrm>
-          <a:prstGeom prst="rect">
-            <a:avLst/>
-          </a:prstGeom>
-          <a:noFill/>
-        </p:spPr>
-        <p:txBody>
-          <a:bodyPr wrap="square">
-            <a:spAutoFit/>
-          </a:bodyPr>
-          <a:lstStyle/>
-          <a:p>
-            <a:pPr marL="571500" indent="-571500">
-              <a:lnSpc>
-                <a:spcPct val="110000"/>
-              </a:lnSpc>
-              <a:spcAft>
-                <a:spcPts val="600"/>
-              </a:spcAft>
-              <a:buFont typeface="Arial"/>
-              <a:buChar char="•"/>
-            </a:pPr>
-            <a:r>
-              <a:rPr sz="2800" b="0" i="0">
-                <a:solidFill>
-                  <a:srgbClr val="1A1A1A"/>
-                </a:solidFill>
-                <a:latin typeface="Times New Roman"/>
-                <a:cs typeface="Times New Roman"/>
-              </a:rPr>
-              <a:t>v1 (embedding SMOTE) recovers Focal Aware (13 / 16) but never FBTC (0 / 56); v2 (fine-tuned) recovers FBTC but loses FA.</a:t>
-            </a:r>
-          </a:p>
-          <a:p>
-            <a:pPr marL="571500" indent="-571500">
-              <a:lnSpc>
-                <a:spcPct val="110000"/>
-              </a:lnSpc>
-              <a:spcAft>
-                <a:spcPts val="600"/>
-              </a:spcAft>
-              <a:buFont typeface="Arial"/>
-              <a:buChar char="•"/>
-            </a:pPr>
-            <a:r>
-              <a:rPr sz="2800" b="0" i="0">
-                <a:solidFill>
-                  <a:srgbClr val="1A1A1A"/>
-                </a:solidFill>
-                <a:latin typeface="Times New Roman"/>
-                <a:cs typeface="Times New Roman"/>
-              </a:rPr>
-              <a:t>v3 (frozen detection backbone only) recovers FA but accuracy drops to 0.573.</a:t>
-            </a:r>
-          </a:p>
-          <a:p>
-            <a:pPr marL="571500" indent="-571500">
-              <a:lnSpc>
-                <a:spcPct val="110000"/>
-              </a:lnSpc>
-              <a:spcAft>
-                <a:spcPts val="600"/>
-              </a:spcAft>
-              <a:buFont typeface="Arial"/>
-              <a:buChar char="•"/>
-            </a:pPr>
-            <a:r>
-              <a:rPr sz="2800" b="0" i="0">
-                <a:solidFill>
-                  <a:srgbClr val="1A1A1A"/>
-                </a:solidFill>
-                <a:latin typeface="Times New Roman"/>
-                <a:cs typeface="Times New Roman"/>
-              </a:rPr>
-              <a:t>v4 fuses both views: highest macro-F1 (0.612) with accuracy above 0.91.</a:t>
-            </a:r>
-          </a:p>
-        </p:txBody>
-      </p:sp>
-    </p:spTree>
-  </p:cSld>
-  <p:clrMapOvr>
-    <a:masterClrMapping/>
-  </p:clrMapOvr>
-</p:sld>
-</file>
-
-<file path=ppt/slides/slide36.xml><?xml version="1.0" encoding="utf-8"?>
-<p:sld xmlns:a="http://schemas.openxmlformats.org/drawingml/2006/main" xmlns:r="http://schemas.openxmlformats.org/officeDocument/2006/relationships" xmlns:p="http://schemas.openxmlformats.org/presentationml/2006/main">
-  <p:cSld>
-    <p:spTree>
-      <p:nvGrpSpPr>
-        <p:cNvPr id="1" name=""/>
-        <p:cNvGrpSpPr/>
-        <p:nvPr/>
-      </p:nvGrpSpPr>
-      <p:grpSpPr>
-        <a:xfrm>
-          <a:off x="0" y="0"/>
-          <a:ext cx="0" cy="0"/>
-          <a:chOff x="0" y="0"/>
-          <a:chExt cx="0" cy="0"/>
-        </a:xfrm>
-      </p:grpSpPr>
-      <p:sp>
-        <p:nvSpPr>
-          <p:cNvPr id="3" name="Date Placeholder 2"/>
-          <p:cNvSpPr>
-            <a:spLocks noGrp="1"/>
-          </p:cNvSpPr>
-          <p:nvPr>
-            <p:ph type="dt" sz="half" idx="10"/>
-          </p:nvPr>
-        </p:nvSpPr>
-        <p:spPr/>
-        <p:txBody>
-          <a:bodyPr/>
-          <a:lstStyle/>
-          <a:p>
-            <a:fld id="{79B7A7E6-0BB5-4562-B4D8-B2D95118667A}" type="datetime3">
-              <a:rPr lang="en-US" smtClean="0">
-                <a:latin typeface="Times New Roman" panose="02020603050405020304" pitchFamily="18" charset="0"/>
-                <a:cs typeface="Times New Roman" panose="02020603050405020304" pitchFamily="18" charset="0"/>
-              </a:rPr>
-              <a:t>26 October 2026</a:t>
-            </a:fld>
-            <a:endParaRPr lang="en-US" dirty="0">
-              <a:latin typeface="Times New Roman" panose="02020603050405020304" pitchFamily="18" charset="0"/>
-              <a:cs typeface="Times New Roman" panose="02020603050405020304" pitchFamily="18" charset="0"/>
-            </a:endParaRPr>
-          </a:p>
-        </p:txBody>
-      </p:sp>
-      <p:sp>
-        <p:nvSpPr>
-          <p:cNvPr id="7" name="Footer Placeholder 6"/>
-          <p:cNvSpPr>
-            <a:spLocks noGrp="1"/>
-          </p:cNvSpPr>
-          <p:nvPr>
-            <p:ph type="ftr" sz="quarter" idx="11"/>
-          </p:nvPr>
-        </p:nvSpPr>
-        <p:spPr/>
-        <p:txBody>
-          <a:bodyPr/>
-          <a:lstStyle/>
-          <a:p>
-            <a:r>
-              <a:rPr lang="en-IN" dirty="0">
-                <a:latin typeface="Times New Roman" panose="02020603050405020304" pitchFamily="18" charset="0"/>
-                <a:cs typeface="Times New Roman" panose="02020603050405020304" pitchFamily="18" charset="0"/>
-              </a:rPr>
-              <a:t>Dept of CSE </a:t>
-            </a:r>
-          </a:p>
-        </p:txBody>
-      </p:sp>
-      <p:sp>
-        <p:nvSpPr>
-          <p:cNvPr id="8" name="Slide Number Placeholder 7"/>
-          <p:cNvSpPr>
-            <a:spLocks noGrp="1"/>
-          </p:cNvSpPr>
-          <p:nvPr>
-            <p:ph type="sldNum" sz="quarter" idx="12"/>
-          </p:nvPr>
-        </p:nvSpPr>
-        <p:spPr/>
-        <p:txBody>
-          <a:bodyPr/>
-          <a:lstStyle/>
-          <a:p>
-            <a:fld id="{B6F15528-21DE-4FAA-801E-634DDDAF4B2B}" type="slidenum">
-              <a:rPr lang="en-IN" smtClean="0">
-                <a:latin typeface="Times New Roman" panose="02020603050405020304" pitchFamily="18" charset="0"/>
-                <a:cs typeface="Times New Roman" panose="02020603050405020304" pitchFamily="18" charset="0"/>
-              </a:rPr>
-              <a:pPr/>
-              <a:t>36</a:t>
             </a:fld>
             <a:endParaRPr lang="en-IN" dirty="0">
               <a:latin typeface="Times New Roman" panose="02020603050405020304" pitchFamily="18" charset="0"/>
@@ -34828,6 +34572,306 @@
 </p:sld>
 </file>
 
+<file path=ppt/slides/slide36.xml><?xml version="1.0" encoding="utf-8"?>
+<p:sld xmlns:a="http://schemas.openxmlformats.org/drawingml/2006/main" xmlns:r="http://schemas.openxmlformats.org/officeDocument/2006/relationships" xmlns:p="http://schemas.openxmlformats.org/presentationml/2006/main">
+  <p:cSld>
+    <p:spTree>
+      <p:nvGrpSpPr>
+        <p:cNvPr id="1" name=""/>
+        <p:cNvGrpSpPr/>
+        <p:nvPr/>
+      </p:nvGrpSpPr>
+      <p:grpSpPr>
+        <a:xfrm>
+          <a:off x="0" y="0"/>
+          <a:ext cx="0" cy="0"/>
+          <a:chOff x="0" y="0"/>
+          <a:chExt cx="0" cy="0"/>
+        </a:xfrm>
+      </p:grpSpPr>
+      <p:sp>
+        <p:nvSpPr>
+          <p:cNvPr id="3" name="Date Placeholder 2"/>
+          <p:cNvSpPr>
+            <a:spLocks noGrp="1"/>
+          </p:cNvSpPr>
+          <p:nvPr>
+            <p:ph type="dt" sz="half" idx="10"/>
+          </p:nvPr>
+        </p:nvSpPr>
+        <p:spPr/>
+        <p:txBody>
+          <a:bodyPr/>
+          <a:lstStyle/>
+          <a:p>
+            <a:fld id="{79B7A7E6-0BB5-4562-B4D8-B2D95118667A}" type="datetime3">
+              <a:rPr lang="en-US" smtClean="0">
+                <a:latin typeface="Times New Roman" panose="02020603050405020304" pitchFamily="18" charset="0"/>
+                <a:cs typeface="Times New Roman" panose="02020603050405020304" pitchFamily="18" charset="0"/>
+              </a:rPr>
+              <a:t>27 October 2026</a:t>
+            </a:fld>
+            <a:endParaRPr lang="en-US" dirty="0">
+              <a:latin typeface="Times New Roman" panose="02020603050405020304" pitchFamily="18" charset="0"/>
+              <a:cs typeface="Times New Roman" panose="02020603050405020304" pitchFamily="18" charset="0"/>
+            </a:endParaRPr>
+          </a:p>
+        </p:txBody>
+      </p:sp>
+      <p:sp>
+        <p:nvSpPr>
+          <p:cNvPr id="7" name="Footer Placeholder 6"/>
+          <p:cNvSpPr>
+            <a:spLocks noGrp="1"/>
+          </p:cNvSpPr>
+          <p:nvPr>
+            <p:ph type="ftr" sz="quarter" idx="11"/>
+          </p:nvPr>
+        </p:nvSpPr>
+        <p:spPr/>
+        <p:txBody>
+          <a:bodyPr/>
+          <a:lstStyle/>
+          <a:p>
+            <a:r>
+              <a:rPr lang="en-IN" dirty="0">
+                <a:latin typeface="Times New Roman" panose="02020603050405020304" pitchFamily="18" charset="0"/>
+                <a:cs typeface="Times New Roman" panose="02020603050405020304" pitchFamily="18" charset="0"/>
+              </a:rPr>
+              <a:t>Dept of CSE </a:t>
+            </a:r>
+          </a:p>
+        </p:txBody>
+      </p:sp>
+      <p:sp>
+        <p:nvSpPr>
+          <p:cNvPr id="8" name="Slide Number Placeholder 7"/>
+          <p:cNvSpPr>
+            <a:spLocks noGrp="1"/>
+          </p:cNvSpPr>
+          <p:nvPr>
+            <p:ph type="sldNum" sz="quarter" idx="12"/>
+          </p:nvPr>
+        </p:nvSpPr>
+        <p:spPr/>
+        <p:txBody>
+          <a:bodyPr/>
+          <a:lstStyle/>
+          <a:p>
+            <a:fld id="{B6F15528-21DE-4FAA-801E-634DDDAF4B2B}" type="slidenum">
+              <a:rPr lang="en-IN" smtClean="0">
+                <a:latin typeface="Times New Roman" panose="02020603050405020304" pitchFamily="18" charset="0"/>
+                <a:cs typeface="Times New Roman" panose="02020603050405020304" pitchFamily="18" charset="0"/>
+              </a:rPr>
+              <a:pPr/>
+              <a:t>36</a:t>
+            </a:fld>
+            <a:endParaRPr lang="en-IN" dirty="0">
+              <a:latin typeface="Times New Roman" panose="02020603050405020304" pitchFamily="18" charset="0"/>
+              <a:cs typeface="Times New Roman" panose="02020603050405020304" pitchFamily="18" charset="0"/>
+            </a:endParaRPr>
+          </a:p>
+        </p:txBody>
+      </p:sp>
+      <p:sp>
+        <p:nvSpPr>
+          <p:cNvPr id="9" name="TextBox 8"/>
+          <p:cNvSpPr txBox="1"/>
+          <p:nvPr/>
+        </p:nvSpPr>
+        <p:spPr>
+          <a:xfrm>
+            <a:off x="508000" y="230000"/>
+            <a:ext cx="17272000" cy="1100000"/>
+          </a:xfrm>
+          <a:prstGeom prst="rect">
+            <a:avLst/>
+          </a:prstGeom>
+          <a:noFill/>
+        </p:spPr>
+        <p:txBody>
+          <a:bodyPr wrap="square">
+            <a:spAutoFit/>
+          </a:bodyPr>
+          <a:lstStyle/>
+          <a:p>
+            <a:pPr algn="ctr"/>
+            <a:r>
+              <a:rPr sz="6000" b="1" i="0">
+                <a:solidFill>
+                  <a:srgbClr val="1A1A1A"/>
+                </a:solidFill>
+                <a:latin typeface="Times New Roman"/>
+                <a:cs typeface="Times New Roman"/>
+              </a:rPr>
+              <a:t>Limitations &amp; Future Enhancements</a:t>
+            </a:r>
+          </a:p>
+        </p:txBody>
+      </p:sp>
+      <p:sp>
+        <p:nvSpPr>
+          <p:cNvPr id="10" name="TextBox 9"/>
+          <p:cNvSpPr txBox="1"/>
+          <p:nvPr/>
+        </p:nvSpPr>
+        <p:spPr>
+          <a:xfrm>
+            <a:off x="1257300" y="1750000"/>
+            <a:ext cx="15773400" cy="7400000"/>
+          </a:xfrm>
+          <a:prstGeom prst="rect">
+            <a:avLst/>
+          </a:prstGeom>
+          <a:noFill/>
+        </p:spPr>
+        <p:txBody>
+          <a:bodyPr wrap="square">
+            <a:spAutoFit/>
+          </a:bodyPr>
+          <a:lstStyle/>
+          <a:p>
+            <a:pPr marL="571500" indent="-571500">
+              <a:lnSpc>
+                <a:spcPct val="118000"/>
+              </a:lnSpc>
+              <a:spcAft>
+                <a:spcPts val="600"/>
+              </a:spcAft>
+              <a:buFont typeface="Arial"/>
+              <a:buChar char="•"/>
+            </a:pPr>
+            <a:r>
+              <a:rPr sz="3000" b="0" i="0">
+                <a:solidFill>
+                  <a:srgbClr val="1A1A1A"/>
+                </a:solidFill>
+                <a:latin typeface="Times New Roman"/>
+                <a:cs typeface="Times New Roman"/>
+              </a:rPr>
+              <a:t>Extreme data scarcity: Focal Aware and FBTC come from one Siena patient each; the FA test set has only 16 windows (4 correct).</a:t>
+            </a:r>
+          </a:p>
+          <a:p>
+            <a:pPr marL="571500" indent="-571500">
+              <a:lnSpc>
+                <a:spcPct val="118000"/>
+              </a:lnSpc>
+              <a:spcAft>
+                <a:spcPts val="600"/>
+              </a:spcAft>
+              <a:buFont typeface="Arial"/>
+              <a:buChar char="•"/>
+            </a:pPr>
+            <a:r>
+              <a:rPr sz="3000" b="0" i="0">
+                <a:solidFill>
+                  <a:srgbClr val="1A1A1A"/>
+                </a:solidFill>
+                <a:latin typeface="Times New Roman"/>
+                <a:cs typeface="Times New Roman"/>
+              </a:rPr>
+              <a:t>v2 / v4 use an event-level split, so the same patient appears in train and test; this is weaker than patient-independent generalization.</a:t>
+            </a:r>
+          </a:p>
+          <a:p>
+            <a:pPr marL="571500" indent="-571500">
+              <a:lnSpc>
+                <a:spcPct val="118000"/>
+              </a:lnSpc>
+              <a:spcAft>
+                <a:spcPts val="600"/>
+              </a:spcAft>
+              <a:buFont typeface="Arial"/>
+              <a:buChar char="•"/>
+            </a:pPr>
+            <a:r>
+              <a:rPr sz="3000" b="0" i="0">
+                <a:solidFill>
+                  <a:srgbClr val="1A1A1A"/>
+                </a:solidFill>
+                <a:latin typeface="Times New Roman"/>
+                <a:cs typeface="Times New Roman"/>
+              </a:rPr>
+              <a:t>Detection is moderate (AUROC 0.824, sensitivity 0.605 at the best-F1 threshold); window-level only, with no temporal smoothing.</a:t>
+            </a:r>
+          </a:p>
+          <a:p>
+            <a:pPr marL="571500" indent="-571500">
+              <a:lnSpc>
+                <a:spcPct val="118000"/>
+              </a:lnSpc>
+              <a:spcAft>
+                <a:spcPts val="600"/>
+              </a:spcAft>
+              <a:buFont typeface="Arial"/>
+              <a:buChar char="•"/>
+            </a:pPr>
+            <a:r>
+              <a:rPr sz="3000" b="0" i="0">
+                <a:solidFill>
+                  <a:srgbClr val="1A1A1A"/>
+                </a:solidFill>
+                <a:latin typeface="Times New Roman"/>
+                <a:cs typeface="Times New Roman"/>
+              </a:rPr>
+              <a:t>FA recall of 25 % and FBTC recall of 51 % are not yet clinically sufficient.</a:t>
+            </a:r>
+          </a:p>
+          <a:p>
+            <a:pPr marL="571500" indent="-571500">
+              <a:lnSpc>
+                <a:spcPct val="118000"/>
+              </a:lnSpc>
+              <a:spcAft>
+                <a:spcPts val="600"/>
+              </a:spcAft>
+              <a:buFont typeface="Arial"/>
+              <a:buChar char="•"/>
+            </a:pPr>
+            <a:r>
+              <a:rPr sz="3000" b="0" i="0">
+                <a:solidFill>
+                  <a:srgbClr val="1A1A1A"/>
+                </a:solidFill>
+                <a:latin typeface="Times New Roman"/>
+                <a:cs typeface="Times New Roman"/>
+              </a:rPr>
+              <a:t>Only the three focal subtypes are covered; no prospective or clinical validation.</a:t>
+            </a:r>
+          </a:p>
+          <a:p>
+            <a:pPr marL="571500" indent="-571500">
+              <a:lnSpc>
+                <a:spcPct val="118000"/>
+              </a:lnSpc>
+              <a:spcAft>
+                <a:spcPts val="600"/>
+              </a:spcAft>
+              <a:buFont typeface="Arial"/>
+              <a:buChar char="•"/>
+            </a:pPr>
+            <a:r>
+              <a:rPr sz="3000" b="0" i="0">
+                <a:solidFill>
+                  <a:srgbClr val="1A1A1A"/>
+                </a:solidFill>
+                <a:latin typeface="Times New Roman"/>
+                <a:cs typeface="Times New Roman"/>
+              </a:rPr>
+              <a:t>Future: more multi-patient subtype data (e.g. TUSZ), true patient-independent evaluation, rare generalized subtypes, event-level smoothing and real-time deployment.</a:t>
+            </a:r>
+          </a:p>
+        </p:txBody>
+      </p:sp>
+    </p:spTree>
+  </p:cSld>
+  <p:clrMapOvr>
+    <a:masterClrMapping/>
+  </p:clrMapOvr>
+</p:sld>
+</file>
+
 <file path=ppt/slides/slide37.xml><?xml version="1.0" encoding="utf-8"?>
 <p:sld xmlns:a="http://schemas.openxmlformats.org/drawingml/2006/main" xmlns:r="http://schemas.openxmlformats.org/officeDocument/2006/relationships" xmlns:p="http://schemas.openxmlformats.org/presentationml/2006/main">
   <p:cSld>
@@ -34865,7 +34909,7 @@
                 <a:latin typeface="Times New Roman" panose="02020603050405020304" pitchFamily="18" charset="0"/>
                 <a:cs typeface="Times New Roman" panose="02020603050405020304" pitchFamily="18" charset="0"/>
               </a:rPr>
-              <a:t>26 October 2026</a:t>
+              <a:t>27 October 2026</a:t>
             </a:fld>
             <a:endParaRPr lang="en-US" dirty="0">
               <a:latin typeface="Times New Roman" panose="02020603050405020304" pitchFamily="18" charset="0"/>
@@ -34960,7 +35004,7 @@
                 <a:latin typeface="Times New Roman"/>
                 <a:cs typeface="Times New Roman"/>
               </a:rPr>
-              <a:t>Limitations &amp; Future Enhancements</a:t>
+              <a:t>Conclusion</a:t>
             </a:r>
           </a:p>
         </p:txBody>
@@ -34989,7 +35033,7 @@
           <a:p>
             <a:pPr marL="571500" indent="-571500">
               <a:lnSpc>
-                <a:spcPct val="118000"/>
+                <a:spcPct val="125000"/>
               </a:lnSpc>
               <a:spcAft>
                 <a:spcPts val="600"/>
@@ -34998,20 +35042,20 @@
               <a:buChar char="•"/>
             </a:pPr>
             <a:r>
-              <a:rPr sz="3000" b="0" i="0">
+              <a:rPr sz="3400" b="0" i="0">
                 <a:solidFill>
                   <a:srgbClr val="1A1A1A"/>
                 </a:solidFill>
                 <a:latin typeface="Times New Roman"/>
                 <a:cs typeface="Times New Roman"/>
               </a:rPr>
-              <a:t>Extreme data scarcity: Focal Aware and FBTC come from one Siena patient each; the FA test set has only 16 windows (4 correct).</a:t>
+              <a:t>EEG-HDC v4 combines a standardized 18-channel preprocessing pipeline with a dual-embedding CRNN (128-D frozen + 128-D fine-tuned = 256-D).</a:t>
             </a:r>
           </a:p>
           <a:p>
             <a:pPr marL="571500" indent="-571500">
               <a:lnSpc>
-                <a:spcPct val="118000"/>
+                <a:spcPct val="125000"/>
               </a:lnSpc>
               <a:spcAft>
                 <a:spcPts val="600"/>
@@ -35020,20 +35064,20 @@
               <a:buChar char="•"/>
             </a:pPr>
             <a:r>
-              <a:rPr sz="3000" b="0" i="0">
+              <a:rPr sz="3400" b="0" i="0">
                 <a:solidFill>
                   <a:srgbClr val="1A1A1A"/>
                 </a:solidFill>
                 <a:latin typeface="Times New Roman"/>
                 <a:cs typeface="Times New Roman"/>
               </a:rPr>
-              <a:t>v2 / v4 use an event-level split, so the same patient appears in train and test; this is weaker than patient-independent generalization.</a:t>
+              <a:t>Latent-space SMOTE handles severe subtype imbalance without corrupting raw EEG.</a:t>
             </a:r>
           </a:p>
           <a:p>
             <a:pPr marL="571500" indent="-571500">
               <a:lnSpc>
-                <a:spcPct val="118000"/>
+                <a:spcPct val="125000"/>
               </a:lnSpc>
               <a:spcAft>
                 <a:spcPts val="600"/>
@@ -35042,20 +35086,20 @@
               <a:buChar char="•"/>
             </a:pPr>
             <a:r>
-              <a:rPr sz="3000" b="0" i="0">
+              <a:rPr sz="3400" b="0" i="0">
                 <a:solidFill>
                   <a:srgbClr val="1A1A1A"/>
                 </a:solidFill>
                 <a:latin typeface="Times New Roman"/>
                 <a:cs typeface="Times New Roman"/>
               </a:rPr>
-              <a:t>Detection is moderate (AUROC 0.824, sensitivity 0.605 at the best-F1 threshold); window-level only, with no temporal smoothing.</a:t>
+              <a:t>Best configuration (HistGB, 3× FA / 5× FBTC): accuracy 0.911, macro-F1 0.612, recall FA 25.0 %, FIA 96.2 %, FBTC 51.4 %.</a:t>
             </a:r>
           </a:p>
           <a:p>
             <a:pPr marL="571500" indent="-571500">
               <a:lnSpc>
-                <a:spcPct val="118000"/>
+                <a:spcPct val="125000"/>
               </a:lnSpc>
               <a:spcAft>
                 <a:spcPts val="600"/>
@@ -35064,20 +35108,20 @@
               <a:buChar char="•"/>
             </a:pPr>
             <a:r>
-              <a:rPr sz="3000" b="0" i="0">
+              <a:rPr sz="3400" b="0" i="0">
                 <a:solidFill>
                   <a:srgbClr val="1A1A1A"/>
                 </a:solidFill>
                 <a:latin typeface="Times New Roman"/>
                 <a:cs typeface="Times New Roman"/>
               </a:rPr>
-              <a:t>FA recall of 25 % and FBTC recall of 51 % are not yet clinically sufficient.</a:t>
+              <a:t>Positive control gaps on both minority classes (ΔFA = +0.117, ΔFBTC = +0.069) indicate the model is not merely recognising patients.</a:t>
             </a:r>
           </a:p>
           <a:p>
             <a:pPr marL="571500" indent="-571500">
               <a:lnSpc>
-                <a:spcPct val="118000"/>
+                <a:spcPct val="125000"/>
               </a:lnSpc>
               <a:spcAft>
                 <a:spcPts val="600"/>
@@ -35086,36 +35130,14 @@
               <a:buChar char="•"/>
             </a:pPr>
             <a:r>
-              <a:rPr sz="3000" b="0" i="0">
+              <a:rPr sz="3400" b="0" i="0">
                 <a:solidFill>
                   <a:srgbClr val="1A1A1A"/>
                 </a:solidFill>
                 <a:latin typeface="Times New Roman"/>
                 <a:cs typeface="Times New Roman"/>
               </a:rPr>
-              <a:t>Only the three focal subtypes are covered; no prospective or clinical validation.</a:t>
-            </a:r>
-          </a:p>
-          <a:p>
-            <a:pPr marL="571500" indent="-571500">
-              <a:lnSpc>
-                <a:spcPct val="118000"/>
-              </a:lnSpc>
-              <a:spcAft>
-                <a:spcPts val="600"/>
-              </a:spcAft>
-              <a:buFont typeface="Arial"/>
-              <a:buChar char="•"/>
-            </a:pPr>
-            <a:r>
-              <a:rPr sz="3000" b="0" i="0">
-                <a:solidFill>
-                  <a:srgbClr val="1A1A1A"/>
-                </a:solidFill>
-                <a:latin typeface="Times New Roman"/>
-                <a:cs typeface="Times New Roman"/>
-              </a:rPr>
-              <a:t>Future: more multi-patient subtype data (e.g. TUSZ), true patient-independent evaluation, rare generalized subtypes, event-level smoothing and real-time deployment.</a:t>
+              <a:t>Macro-F1 improves from 0.315 (1D-CNN baseline) to 0.612 and v4 is the only model that detects all three subtypes.</a:t>
             </a:r>
           </a:p>
         </p:txBody>
@@ -35165,7 +35187,7 @@
                 <a:latin typeface="Times New Roman" panose="02020603050405020304" pitchFamily="18" charset="0"/>
                 <a:cs typeface="Times New Roman" panose="02020603050405020304" pitchFamily="18" charset="0"/>
               </a:rPr>
-              <a:t>26 October 2026</a:t>
+              <a:t>27 October 2026</a:t>
             </a:fld>
             <a:endParaRPr lang="en-US" dirty="0">
               <a:latin typeface="Times New Roman" panose="02020603050405020304" pitchFamily="18" charset="0"/>
@@ -35260,7 +35282,7 @@
                 <a:latin typeface="Times New Roman"/>
                 <a:cs typeface="Times New Roman"/>
               </a:rPr>
-              <a:t>Conclusion</a:t>
+              <a:t>References</a:t>
             </a:r>
           </a:p>
         </p:txBody>
@@ -35273,8 +35295,8 @@
         </p:nvSpPr>
         <p:spPr>
           <a:xfrm>
-            <a:off x="1257300" y="1750000"/>
-            <a:ext cx="15773400" cy="7400000"/>
+            <a:off x="1257300" y="1450000"/>
+            <a:ext cx="15773400" cy="7700000"/>
           </a:xfrm>
           <a:prstGeom prst="rect">
             <a:avLst/>
@@ -35287,113 +35309,118 @@
           </a:bodyPr>
           <a:lstStyle/>
           <a:p>
-            <a:pPr marL="571500" indent="-571500">
+            <a:pPr marL="914400" indent="-914400" algn="just">
               <a:lnSpc>
-                <a:spcPct val="125000"/>
+                <a:spcPct val="110000"/>
               </a:lnSpc>
               <a:spcAft>
-                <a:spcPts val="600"/>
+                <a:spcPts val="1800"/>
               </a:spcAft>
-              <a:buFont typeface="Arial"/>
-              <a:buChar char="•"/>
+              <a:tabLst>
+                <a:tab pos="914400" algn="l"/>
+              </a:tabLst>
             </a:pPr>
             <a:r>
-              <a:rPr sz="3400" b="0" i="0">
+              <a:rPr sz="2800" b="0" i="0">
                 <a:solidFill>
                   <a:srgbClr val="1A1A1A"/>
                 </a:solidFill>
                 <a:latin typeface="Times New Roman"/>
                 <a:cs typeface="Times New Roman"/>
               </a:rPr>
-              <a:t>EEG-HDC v4 combines a standardized 18-channel preprocessing pipeline with a dual-embedding CRNN (128-D frozen + 128-D fine-tuned = 256-D).</a:t>
-            </a:r>
-          </a:p>
-          <a:p>
-            <a:pPr marL="571500" indent="-571500">
+              <a:t>[1]	N. Ilakiyaselvan, A. N. Khan, and A. Shahina, “Deep learning approach to detect seizure using reconstructed phase space images,” J. Biomed. Res., vol. 34, no. 3, p. 240, 2020.</a:t>
+            </a:r>
+          </a:p>
+          <a:p>
+            <a:pPr marL="914400" indent="-914400" algn="just">
               <a:lnSpc>
-                <a:spcPct val="125000"/>
+                <a:spcPct val="110000"/>
               </a:lnSpc>
               <a:spcAft>
-                <a:spcPts val="600"/>
+                <a:spcPts val="1800"/>
               </a:spcAft>
-              <a:buFont typeface="Arial"/>
-              <a:buChar char="•"/>
+              <a:tabLst>
+                <a:tab pos="914400" algn="l"/>
+              </a:tabLst>
             </a:pPr>
             <a:r>
-              <a:rPr sz="3400" b="0" i="0">
+              <a:rPr sz="2800" b="0" i="0">
                 <a:solidFill>
                   <a:srgbClr val="1A1A1A"/>
                 </a:solidFill>
                 <a:latin typeface="Times New Roman"/>
                 <a:cs typeface="Times New Roman"/>
               </a:rPr>
-              <a:t>Latent-space SMOTE handles severe subtype imbalance without corrupting raw EEG.</a:t>
-            </a:r>
-          </a:p>
-          <a:p>
-            <a:pPr marL="571500" indent="-571500">
+              <a:t>[2]	S. Srinivasan, S. Dayalane, S. K. Mathivanan, H. Rajadurai, P. Jayagopal, and G. T. Dalu, “Detection and classification of adult epilepsy using hybrid deep learning approach,” Sci. Rep., vol. 13, no. 1, Art. no. 17574, Oct. 2023.</a:t>
+            </a:r>
+          </a:p>
+          <a:p>
+            <a:pPr marL="914400" indent="-914400" algn="just">
               <a:lnSpc>
-                <a:spcPct val="125000"/>
+                <a:spcPct val="110000"/>
               </a:lnSpc>
               <a:spcAft>
-                <a:spcPts val="600"/>
+                <a:spcPts val="1800"/>
               </a:spcAft>
-              <a:buFont typeface="Arial"/>
-              <a:buChar char="•"/>
+              <a:tabLst>
+                <a:tab pos="914400" algn="l"/>
+              </a:tabLst>
             </a:pPr>
             <a:r>
-              <a:rPr sz="3400" b="0" i="0">
+              <a:rPr sz="2800" b="0" i="0">
                 <a:solidFill>
                   <a:srgbClr val="1A1A1A"/>
                 </a:solidFill>
                 <a:latin typeface="Times New Roman"/>
                 <a:cs typeface="Times New Roman"/>
               </a:rPr>
-              <a:t>Best configuration (HistGB, 3× FA / 5× FBTC): accuracy 0.911, macro-F1 0.612, recall FA 25.0 %, FIA 96.2 %, FBTC 51.4 %.</a:t>
-            </a:r>
-          </a:p>
-          <a:p>
-            <a:pPr marL="571500" indent="-571500">
+              <a:t>[3]	H. Albaqami, G. M. Hassan, and A. Datta, “Wavelet-based multi-class seizure type classification system,” Appl. Sci., vol. 12, no. 11, Art. no. 5702, Jun. 2022.</a:t>
+            </a:r>
+          </a:p>
+          <a:p>
+            <a:pPr marL="914400" indent="-914400" algn="just">
               <a:lnSpc>
-                <a:spcPct val="125000"/>
+                <a:spcPct val="110000"/>
               </a:lnSpc>
               <a:spcAft>
-                <a:spcPts val="600"/>
+                <a:spcPts val="1800"/>
               </a:spcAft>
-              <a:buFont typeface="Arial"/>
-              <a:buChar char="•"/>
+              <a:tabLst>
+                <a:tab pos="914400" algn="l"/>
+              </a:tabLst>
             </a:pPr>
             <a:r>
-              <a:rPr sz="3400" b="0" i="0">
+              <a:rPr sz="2800" b="0" i="0">
                 <a:solidFill>
                   <a:srgbClr val="1A1A1A"/>
                 </a:solidFill>
                 <a:latin typeface="Times New Roman"/>
                 <a:cs typeface="Times New Roman"/>
               </a:rPr>
-              <a:t>Positive control gaps on both minority classes (ΔFA = +0.117, ΔFBTC = +0.069) indicate the model is not merely recognising patients.</a:t>
-            </a:r>
-          </a:p>
-          <a:p>
-            <a:pPr marL="571500" indent="-571500">
+              <a:t>[4]	A. Abdelhameed and M. Bayoumi, “A deep learning approach for automatic seizure detection in children with epilepsy,” Front. Comput. Neurosci., vol. 15, Art. no. 650050, Apr. 2021.</a:t>
+            </a:r>
+          </a:p>
+          <a:p>
+            <a:pPr marL="914400" indent="-914400" algn="just">
               <a:lnSpc>
-                <a:spcPct val="125000"/>
+                <a:spcPct val="110000"/>
               </a:lnSpc>
               <a:spcAft>
-                <a:spcPts val="600"/>
+                <a:spcPts val="1800"/>
               </a:spcAft>
-              <a:buFont typeface="Arial"/>
-              <a:buChar char="•"/>
+              <a:tabLst>
+                <a:tab pos="914400" algn="l"/>
+              </a:tabLst>
             </a:pPr>
             <a:r>
-              <a:rPr sz="3400" b="0" i="0">
+              <a:rPr sz="2800" b="0" i="0">
                 <a:solidFill>
                   <a:srgbClr val="1A1A1A"/>
                 </a:solidFill>
                 <a:latin typeface="Times New Roman"/>
                 <a:cs typeface="Times New Roman"/>
               </a:rPr>
-              <a:t>Macro-F1 improves from 0.315 (1D-CNN baseline) to 0.612 and v4 is the only model that detects all three subtypes.</a:t>
+              <a:t>[5]	M. Guendelman, R. Vekslar, and O. Shriki, “A new perspective in epileptic seizure classification: Applying the taxonomy of seizure dynamotypes to non-invasive EEG and examining dynamical changes across sleep stages,” eNeuro, vol. 12, no. 1, Art. no. ENEURO.0157-24.2024, Jan. 2025.</a:t>
             </a:r>
           </a:p>
         </p:txBody>
@@ -35443,7 +35470,7 @@
                 <a:latin typeface="Times New Roman" panose="02020603050405020304" pitchFamily="18" charset="0"/>
                 <a:cs typeface="Times New Roman" panose="02020603050405020304" pitchFamily="18" charset="0"/>
               </a:rPr>
-              <a:t>26 October 2026</a:t>
+              <a:t>27 October 2026</a:t>
             </a:fld>
             <a:endParaRPr lang="en-US" dirty="0">
               <a:latin typeface="Times New Roman" panose="02020603050405020304" pitchFamily="18" charset="0"/>
@@ -35584,7 +35611,7 @@
                 <a:latin typeface="Times New Roman"/>
                 <a:cs typeface="Times New Roman"/>
               </a:rPr>
-              <a:t>[1]	N. Ilakiyaselvan, A. N. Khan, and A. Shahina, “Deep learning approach to detect seizure using reconstructed phase space images,” J. Biomed. Res., vol. 34, no. 3, p. 240, 2020.</a:t>
+              <a:t>[6]	M. K. Siddiqui, R. Morales-Menendez, X. Huang, and N. Hussain, “A review of epileptic seizure detection using machine learning classifiers,” Brain Inform., vol. 7, no. 1, p. 5, May 2020.</a:t>
             </a:r>
           </a:p>
           <a:p>
@@ -35607,7 +35634,7 @@
                 <a:latin typeface="Times New Roman"/>
                 <a:cs typeface="Times New Roman"/>
               </a:rPr>
-              <a:t>[2]	S. Srinivasan, S. Dayalane, S. K. Mathivanan, H. Rajadurai, P. Jayagopal, and G. T. Dalu, “Detection and classification of adult epilepsy using hybrid deep learning approach,” Sci. Rep., vol. 13, no. 1, Art. no. 17574, Oct. 2023.</a:t>
+              <a:t>[7]	Y. Yuan et al., “A transformer-based framework with data augmentation for robust seizure detection across invasive and non-invasive neural recordings,” CNS Neurosci. Ther., vol. 31, no. 9, Art. no. e70584, Sep. 2025.</a:t>
             </a:r>
           </a:p>
           <a:p>
@@ -35630,7 +35657,7 @@
                 <a:latin typeface="Times New Roman"/>
                 <a:cs typeface="Times New Roman"/>
               </a:rPr>
-              <a:t>[3]	H. Albaqami, G. M. Hassan, and A. Datta, “Wavelet-based multi-class seizure type classification system,” Appl. Sci., vol. 12, no. 11, Art. no. 5702, Jun. 2022.</a:t>
+              <a:t>[8]	P. A. Akor, G. Enemali, U. Muhammad, R. R. Singh, and H. Larijani, “An attention-residual convolutional network for real-time seizure classification on edge devices,” Sensors, vol. 25, no. 22, Art. no. 6855, Nov. 2025.</a:t>
             </a:r>
           </a:p>
           <a:p>
@@ -35653,7 +35680,7 @@
                 <a:latin typeface="Times New Roman"/>
                 <a:cs typeface="Times New Roman"/>
               </a:rPr>
-              <a:t>[4]	A. Abdelhameed and M. Bayoumi, “A deep learning approach for automatic seizure detection in children with epilepsy,” Front. Comput. Neurosci., vol. 15, Art. no. 650050, Apr. 2021.</a:t>
+              <a:t>[9]	A. Ulate-Campos, F. Coughlin, M. Gaínza-Lein, I. S. Fernández, P. L. Pearl, and T. Loddenkemper, “Automated seizure detection systems and their effectiveness for each type of seizure,” Seizure, vol. 40, pp. 88–101, Aug. 2016.</a:t>
             </a:r>
           </a:p>
           <a:p>
@@ -35676,7 +35703,7 @@
                 <a:latin typeface="Times New Roman"/>
                 <a:cs typeface="Times New Roman"/>
               </a:rPr>
-              <a:t>[5]	M. Guendelman, R. Vekslar, and O. Shriki, “A new perspective in epileptic seizure classification: Applying the taxonomy of seizure dynamotypes to non-invasive EEG and examining dynamical changes across sleep stages,” eNeuro, vol. 12, no. 1, Art. no. ENEURO.0157-24.2024, Jan. 2025.</a:t>
+              <a:t>[10]	U. R. Acharya, Y. Hagiwara, and H. Adeli, “Automated seizure prediction,” Epilepsy Behav., vol. 88, pp. 251–261, Nov. 2018.</a:t>
             </a:r>
           </a:p>
         </p:txBody>
@@ -35774,7 +35801,7 @@
                 <a:latin typeface="Times New Roman" panose="02020603050405020304" pitchFamily="18" charset="0"/>
                 <a:cs typeface="Times New Roman" panose="02020603050405020304" pitchFamily="18" charset="0"/>
               </a:rPr>
-              <a:t>26 October 2026</a:t>
+              <a:t>27 October 2026</a:t>
             </a:fld>
             <a:endParaRPr lang="en-US" dirty="0">
               <a:latin typeface="Times New Roman" panose="02020603050405020304" pitchFamily="18" charset="0"/>
@@ -35930,7 +35957,7 @@
                 <a:latin typeface="Times New Roman" panose="02020603050405020304" pitchFamily="18" charset="0"/>
                 <a:cs typeface="Times New Roman" panose="02020603050405020304" pitchFamily="18" charset="0"/>
               </a:rPr>
-              <a:t>26 October 2026</a:t>
+              <a:t>27 October 2026</a:t>
             </a:fld>
             <a:endParaRPr lang="en-US" dirty="0">
               <a:latin typeface="Times New Roman" panose="02020603050405020304" pitchFamily="18" charset="0"/>
@@ -36071,7 +36098,7 @@
                 <a:latin typeface="Times New Roman"/>
                 <a:cs typeface="Times New Roman"/>
               </a:rPr>
-              <a:t>[6]	M. K. Siddiqui, R. Morales-Menendez, X. Huang, and N. Hussain, “A review of epileptic seizure detection using machine learning classifiers,” Brain Inform., vol. 7, no. 1, p. 5, May 2020.</a:t>
+              <a:t>[11]	X. Wei, L. Zhou, Z. Chen, L. Zhang, and Y. Zhou, “Automatic seizure detection using three-dimensional CNN based on multi-channel EEG,” BMC Med. Inform. Decis. Mak., vol. 18, no. S5, Art. no. 111, Dec. 2018.</a:t>
             </a:r>
           </a:p>
           <a:p>
@@ -36094,7 +36121,7 @@
                 <a:latin typeface="Times New Roman"/>
                 <a:cs typeface="Times New Roman"/>
               </a:rPr>
-              <a:t>[7]	Y. Yuan et al., “A transformer-based framework with data augmentation for robust seizure detection across invasive and non-invasive neural recordings,” CNS Neurosci. Ther., vol. 31, no. 9, Art. no. e70584, Sep. 2025.</a:t>
+              <a:t>[12]	R. San-Segundo, M. Gil-Martín, L. F. D’Haro-Enríquez, and J. M. Pardo, “Classification of epileptic EEG recordings using signal transforms and convolutional neural networks,” Comput. Biol. Med., vol. 109, pp. 148–158, Jun. 2019.</a:t>
             </a:r>
           </a:p>
           <a:p>
@@ -36117,7 +36144,7 @@
                 <a:latin typeface="Times New Roman"/>
                 <a:cs typeface="Times New Roman"/>
               </a:rPr>
-              <a:t>[8]	P. A. Akor, G. Enemali, U. Muhammad, R. R. Singh, and H. Larijani, “An attention-residual convolutional network for real-time seizure classification on edge devices,” Sensors, vol. 25, no. 22, Art. no. 6855, Nov. 2025.</a:t>
+              <a:t>[13]	Y. Wang, Y. Shi, Z. He, Z. Chen, and Y. Zhou, “Combining temporal and spatial attention for seizure prediction,” Health Inf. Sci. Syst., vol. 11, no. 1, Art. no. 38, Aug. 2023.</a:t>
             </a:r>
           </a:p>
           <a:p>
@@ -36140,7 +36167,7 @@
                 <a:latin typeface="Times New Roman"/>
                 <a:cs typeface="Times New Roman"/>
               </a:rPr>
-              <a:t>[9]	A. Ulate-Campos, F. Coughlin, M. Gaínza-Lein, I. S. Fernández, P. L. Pearl, and T. Loddenkemper, “Automated seizure detection systems and their effectiveness for each type of seizure,” Seizure, vol. 40, pp. 88–101, Aug. 2016.</a:t>
+              <a:t>[14]	L. Bai, G. Litscher, and X. Li, “Epileptic seizure detection using machine learning: A systematic review and meta-analysis,” Brain Sci., vol. 15, no. 6, Art. no. 634, Jun. 2025.</a:t>
             </a:r>
           </a:p>
           <a:p>
@@ -36163,7 +36190,7 @@
                 <a:latin typeface="Times New Roman"/>
                 <a:cs typeface="Times New Roman"/>
               </a:rPr>
-              <a:t>[10]	U. R. Acharya, Y. Hagiwara, and H. Adeli, “Automated seizure prediction,” Epilepsy Behav., vol. 88, pp. 251–261, Nov. 2018.</a:t>
+              <a:t>[15]	I. Jemal, L. Abou-Abbas, K. Henni, A. Mitiche, and N. Mezghani, “Domain adaptation for EEG-based, cross-subject epileptic seizure prediction,” Front. Neuroinform., vol. 18, Art. no. 1303380, Feb. 2024.</a:t>
             </a:r>
           </a:p>
         </p:txBody>
@@ -36213,7 +36240,7 @@
                 <a:latin typeface="Times New Roman" panose="02020603050405020304" pitchFamily="18" charset="0"/>
                 <a:cs typeface="Times New Roman" panose="02020603050405020304" pitchFamily="18" charset="0"/>
               </a:rPr>
-              <a:t>26 October 2026</a:t>
+              <a:t>27 October 2026</a:t>
             </a:fld>
             <a:endParaRPr lang="en-US" dirty="0">
               <a:latin typeface="Times New Roman" panose="02020603050405020304" pitchFamily="18" charset="0"/>
@@ -36354,7 +36381,7 @@
                 <a:latin typeface="Times New Roman"/>
                 <a:cs typeface="Times New Roman"/>
               </a:rPr>
-              <a:t>[11]	X. Wei, L. Zhou, Z. Chen, L. Zhang, and Y. Zhou, “Automatic seizure detection using three-dimensional CNN based on multi-channel EEG,” BMC Med. Inform. Decis. Mak., vol. 18, no. S5, Art. no. 111, Dec. 2018.</a:t>
+              <a:t>[16]	B. P. Prathaban and R. Balasubramanian, “Dynamic learning framework for epileptic seizure prediction using sparsity based EEG reconstruction with optimized CNN classifier,” Expert Syst. Appl., vol. 170, Art. no. 114533, May 2021.</a:t>
             </a:r>
           </a:p>
           <a:p>
@@ -36377,7 +36404,7 @@
                 <a:latin typeface="Times New Roman"/>
                 <a:cs typeface="Times New Roman"/>
               </a:rPr>
-              <a:t>[12]	R. San-Segundo, M. Gil-Martín, L. F. D’Haro-Enríquez, and J. M. Pardo, “Classification of epileptic EEG recordings using signal transforms and convolutional neural networks,” Comput. Biol. Med., vol. 109, pp. 148–158, Jun. 2019.</a:t>
+              <a:t>[17]	S. Raghu, N. Sriraam, Y. Temel, S. V. Rao, and P. L. Kubben, “EEG based multi-class seizure type classification using convolutional neural network and transfer learning,” Neural Netw., vol. 124, pp. 202–212, Apr. 2020.</a:t>
             </a:r>
           </a:p>
           <a:p>
@@ -36400,7 +36427,7 @@
                 <a:latin typeface="Times New Roman"/>
                 <a:cs typeface="Times New Roman"/>
               </a:rPr>
-              <a:t>[13]	Y. Wang, Y. Shi, Z. He, Z. Chen, and Y. Zhou, “Combining temporal and spatial attention for seizure prediction,” Health Inf. Sci. Syst., vol. 11, no. 1, Art. no. 38, Aug. 2023.</a:t>
+              <a:t>[18]	S. Wong et al., “EEG datasets for seizure detection and prediction—A review,” Epilepsia Open, vol. 8, no. 2, pp. 252–267, Jun. 2023.</a:t>
             </a:r>
           </a:p>
           <a:p>
@@ -36423,7 +36450,7 @@
                 <a:latin typeface="Times New Roman"/>
                 <a:cs typeface="Times New Roman"/>
               </a:rPr>
-              <a:t>[14]	L. Bai, G. Litscher, and X. Li, “Epileptic seizure detection using machine learning: A systematic review and meta-analysis,” Brain Sci., vol. 15, no. 6, Art. no. 634, Jun. 2025.</a:t>
+              <a:t>[19]	A. A. Ein Shoka, M. M. Dessouky, A. El-Sayed, and E. E.-D. Hemdan, “EEG seizure detection: Concepts, techniques, challenges, and future trends,” Multimed. Tools Appl., vol. 82, no. 27, pp. 42021–42051, 2023.</a:t>
             </a:r>
           </a:p>
           <a:p>
@@ -36446,7 +36473,7 @@
                 <a:latin typeface="Times New Roman"/>
                 <a:cs typeface="Times New Roman"/>
               </a:rPr>
-              <a:t>[15]	I. Jemal, L. Abou-Abbas, K. Henni, A. Mitiche, and N. Mezghani, “Domain adaptation for EEG-based, cross-subject epileptic seizure prediction,” Front. Neuroinform., vol. 18, Art. no. 1303380, Feb. 2024.</a:t>
+              <a:t>[20]	W. Cao, Q. Li, A. Zhang, and T. Wang, “Efficient and accurate epilepsy seizure prediction and detection based on multi-teacher knowledge distillation RGF-model,” Brain Sci., vol. 16, no. 1, Art. no. 83, Jan. 2026.</a:t>
             </a:r>
           </a:p>
         </p:txBody>
@@ -36496,7 +36523,7 @@
                 <a:latin typeface="Times New Roman" panose="02020603050405020304" pitchFamily="18" charset="0"/>
                 <a:cs typeface="Times New Roman" panose="02020603050405020304" pitchFamily="18" charset="0"/>
               </a:rPr>
-              <a:t>26 October 2026</a:t>
+              <a:t>27 October 2026</a:t>
             </a:fld>
             <a:endParaRPr lang="en-US" dirty="0">
               <a:latin typeface="Times New Roman" panose="02020603050405020304" pitchFamily="18" charset="0"/>
@@ -36637,7 +36664,7 @@
                 <a:latin typeface="Times New Roman"/>
                 <a:cs typeface="Times New Roman"/>
               </a:rPr>
-              <a:t>[16]	B. P. Prathaban and R. Balasubramanian, “Dynamic learning framework for epileptic seizure prediction using sparsity based EEG reconstruction with optimized CNN classifier,” Expert Syst. Appl., vol. 170, Art. no. 114533, May 2021.</a:t>
+              <a:t>[21]	N. McCallan et al., “Epileptic multi-seizure type classification using electroencephalogram signals from the Temple University Hospital Seizure Corpus: A review,” Expert Syst. Appl., vol. 234, Art. no. 121040, Dec. 2023.</a:t>
             </a:r>
           </a:p>
           <a:p>
@@ -36660,7 +36687,7 @@
                 <a:latin typeface="Times New Roman"/>
                 <a:cs typeface="Times New Roman"/>
               </a:rPr>
-              <a:t>[17]	S. Raghu, N. Sriraam, Y. Temel, S. V. Rao, and P. L. Kubben, “EEG based multi-class seizure type classification using convolutional neural network and transfer learning,” Neural Netw., vol. 124, pp. 202–212, Apr. 2020.</a:t>
+              <a:t>[22]	M. Zhou et al., “Epileptic seizure detection based on EEG signals and CNN,” Front. Neuroinform., vol. 12, Art. no. 95, Dec. 2018.</a:t>
             </a:r>
           </a:p>
           <a:p>
@@ -36683,7 +36710,7 @@
                 <a:latin typeface="Times New Roman"/>
                 <a:cs typeface="Times New Roman"/>
               </a:rPr>
-              <a:t>[18]	S. Wong et al., “EEG datasets for seizure detection and prediction—A review,” Epilepsia Open, vol. 8, no. 2, pp. 252–267, Jun. 2023.</a:t>
+              <a:t>[23]	A. T. Tzallas, M. G. Tsipouras, and D. I. Fotiadis, “Epileptic seizure detection in EEGs using time–frequency analysis,” IEEE Trans. Inf. Technol. Biomed., vol. 13, no. 5, pp. 703–710, Sep. 2009.</a:t>
             </a:r>
           </a:p>
           <a:p>
@@ -36706,7 +36733,7 @@
                 <a:latin typeface="Times New Roman"/>
                 <a:cs typeface="Times New Roman"/>
               </a:rPr>
-              <a:t>[19]	A. A. Ein Shoka, M. M. Dessouky, A. El-Sayed, and E. E.-D. Hemdan, “EEG seizure detection: Concepts, techniques, challenges, and future trends,” Multimed. Tools Appl., vol. 82, no. 27, pp. 42021–42051, 2023.</a:t>
+              <a:t>[24]	A. Subasi, J. Kevric, and M. Abdullah Canbaz, “Epileptic seizure detection using hybrid machine learning methods,” Neural Comput. Appl., vol. 31, no. 1, pp. 317–325, 2019.</a:t>
             </a:r>
           </a:p>
           <a:p>
@@ -36729,7 +36756,7 @@
                 <a:latin typeface="Times New Roman"/>
                 <a:cs typeface="Times New Roman"/>
               </a:rPr>
-              <a:t>[20]	W. Cao, Q. Li, A. Zhang, and T. Wang, “Efficient and accurate epilepsy seizure prediction and detection based on multi-teacher knowledge distillation RGF-model,” Brain Sci., vol. 16, no. 1, Art. no. 83, Jan. 2026.</a:t>
+              <a:t>[25]	M. S. Farooq, A. Zulfiqar, and S. Riaz, “Epileptic seizure detection using machine learning: Taxonomy, opportunities, and challenges,” Diagnostics, vol. 13, no. 6, Art. no. 1058, Mar. 2023.</a:t>
             </a:r>
           </a:p>
         </p:txBody>
@@ -36779,7 +36806,7 @@
                 <a:latin typeface="Times New Roman" panose="02020603050405020304" pitchFamily="18" charset="0"/>
                 <a:cs typeface="Times New Roman" panose="02020603050405020304" pitchFamily="18" charset="0"/>
               </a:rPr>
-              <a:t>26 October 2026</a:t>
+              <a:t>27 October 2026</a:t>
             </a:fld>
             <a:endParaRPr lang="en-US" dirty="0">
               <a:latin typeface="Times New Roman" panose="02020603050405020304" pitchFamily="18" charset="0"/>
@@ -36920,7 +36947,7 @@
                 <a:latin typeface="Times New Roman"/>
                 <a:cs typeface="Times New Roman"/>
               </a:rPr>
-              <a:t>[21]	N. McCallan et al., “Epileptic multi-seizure type classification using electroencephalogram signals from the Temple University Hospital Seizure Corpus: A review,” Expert Syst. Appl., vol. 234, Art. no. 121040, Dec. 2023.</a:t>
+              <a:t>[26]	E. Ali, M. Angelova, and C. Karmakar, “Epileptic seizure detection using CHB-MIT dataset: The overlooked perspectives,” R. Soc. Open Sci., vol. 11, no. 3, 2024.</a:t>
             </a:r>
           </a:p>
           <a:p>
@@ -36943,7 +36970,7 @@
                 <a:latin typeface="Times New Roman"/>
                 <a:cs typeface="Times New Roman"/>
               </a:rPr>
-              <a:t>[22]	M. Zhou et al., “Epileptic seizure detection based on EEG signals and CNN,” Front. Neuroinform., vol. 12, Art. no. 95, Dec. 2018.</a:t>
+              <a:t>[27]	A. Shoeibi et al., “Epileptic seizures detection using deep learning techniques: A review,” Int. J. Environ. Res. Public Health, vol. 18, no. 11, Art. no. 5780, May 2021.</a:t>
             </a:r>
           </a:p>
           <a:p>
@@ -36966,7 +36993,7 @@
                 <a:latin typeface="Times New Roman"/>
                 <a:cs typeface="Times New Roman"/>
               </a:rPr>
-              <a:t>[23]	A. T. Tzallas, M. G. Tsipouras, and D. I. Fotiadis, “Epileptic seizure detection in EEGs using time–frequency analysis,” IEEE Trans. Inf. Technol. Biomed., vol. 13, no. 5, pp. 703–710, Sep. 2009.</a:t>
+              <a:t>[28]	T. K. Murugan and A. Kameswaran, “Employing convolutional neural networks and explainable artificial intelligence for the detection of seizures from electroencephalogram signal,” Results Eng., vol. 24, Art. no. 103378, Dec. 2024.</a:t>
             </a:r>
           </a:p>
           <a:p>
@@ -36989,7 +37016,7 @@
                 <a:latin typeface="Times New Roman"/>
                 <a:cs typeface="Times New Roman"/>
               </a:rPr>
-              <a:t>[24]	A. Subasi, J. Kevric, and M. Abdullah Canbaz, “Epileptic seizure detection using hybrid machine learning methods,” Neural Comput. Appl., vol. 31, no. 1, pp. 317–325, 2019.</a:t>
+              <a:t>[29]	S. Cuyckens, R. Antonio, C. Fang, and M. Verhelst, “iEEG seizure detection with a sparse hyperdimensional computing accelerator,” in Proc. IEEE Int. Symp. Circuits Syst. (ISCAS), 2023.</a:t>
             </a:r>
           </a:p>
           <a:p>
@@ -37012,7 +37039,7 @@
                 <a:latin typeface="Times New Roman"/>
                 <a:cs typeface="Times New Roman"/>
               </a:rPr>
-              <a:t>[25]	M. S. Farooq, A. Zulfiqar, and S. Riaz, “Epileptic seizure detection using machine learning: Taxonomy, opportunities, and challenges,” Diagnostics, vol. 13, no. 6, Art. no. 1058, Mar. 2023.</a:t>
+              <a:t>[30]	P. Thodoroff, J. Pineau, and A. Lim, “Learning robust features using deep learning for automatic seizure detection,” in Proc. Mach. Learn. Healthcare Conf. (MLHC), vol. 56, 2016, pp. 178–190.</a:t>
             </a:r>
           </a:p>
         </p:txBody>
@@ -37062,7 +37089,7 @@
                 <a:latin typeface="Times New Roman" panose="02020603050405020304" pitchFamily="18" charset="0"/>
                 <a:cs typeface="Times New Roman" panose="02020603050405020304" pitchFamily="18" charset="0"/>
               </a:rPr>
-              <a:t>26 October 2026</a:t>
+              <a:t>27 October 2026</a:t>
             </a:fld>
             <a:endParaRPr lang="en-US" dirty="0">
               <a:latin typeface="Times New Roman" panose="02020603050405020304" pitchFamily="18" charset="0"/>
@@ -37203,7 +37230,7 @@
                 <a:latin typeface="Times New Roman"/>
                 <a:cs typeface="Times New Roman"/>
               </a:rPr>
-              <a:t>[26]	E. Ali, M. Angelova, and C. Karmakar, “Epileptic seizure detection using CHB-MIT dataset: The overlooked perspectives,” R. Soc. Open Sci., vol. 11, no. 3, 2024.</a:t>
+              <a:t>[31]	T. Sverrisson and S. Gudmundsson, “LookAroundNet: Extending temporal context with transformers for clinically viable EEG seizure detection,” arXiv preprint, 2025.</a:t>
             </a:r>
           </a:p>
           <a:p>
@@ -37226,7 +37253,7 @@
                 <a:latin typeface="Times New Roman"/>
                 <a:cs typeface="Times New Roman"/>
               </a:rPr>
-              <a:t>[27]	A. Shoeibi et al., “Epileptic seizures detection using deep learning techniques: A review,” Int. J. Environ. Res. Public Health, vol. 18, no. 11, Art. no. 5780, May 2021.</a:t>
+              <a:t>[32]	G. Giannakakis, V. Sakkalis, M. Pediaditis, and M. Tsiknakis, “Methods for seizure detection and prediction: An overview,” in Modern Electroencephalographic Assessment Techniques (Neuromethods, vol. 91). New York, NY, USA: Springer, 2015, pp. 131–157.</a:t>
             </a:r>
           </a:p>
           <a:p>
@@ -37249,7 +37276,7 @@
                 <a:latin typeface="Times New Roman"/>
                 <a:cs typeface="Times New Roman"/>
               </a:rPr>
-              <a:t>[28]	T. K. Murugan and A. Kameswaran, “Employing convolutional neural networks and explainable artificial intelligence for the detection of seizures from electroencephalogram signal,” Results Eng., vol. 24, Art. no. 103378, Dec. 2024.</a:t>
+              <a:t>[33]	Y. Yang, K. Guo, Z. Fang, H. Lin, M. Grosser, and J. Lu, “Multi-model transfer learning and genotypic analysis for seizure type classification,” in Lecture Notes in Computer Science. Springer, 2023, pp. 223–234.</a:t>
             </a:r>
           </a:p>
           <a:p>
@@ -37272,7 +37299,7 @@
                 <a:latin typeface="Times New Roman"/>
                 <a:cs typeface="Times New Roman"/>
               </a:rPr>
-              <a:t>[29]	S. Cuyckens, R. Antonio, C. Fang, and M. Verhelst, “iEEG seizure detection with a sparse hyperdimensional computing accelerator,” in Proc. IEEE Int. Symp. Circuits Syst. (ISCAS), 2023.</a:t>
+              <a:t>[34]	D. Ahmedt-Aristizabal, T. Fernando, S. Denman, L. Petersson, M. J. Aburn, and C. Fookes, “Neural memory networks for seizure type classification,” in Proc. 42nd Annu. Int. Conf. IEEE Eng. Med. Biol. Soc. (EMBC), Jul. 2020, pp. 569–575.</a:t>
             </a:r>
           </a:p>
           <a:p>
@@ -37295,7 +37322,7 @@
                 <a:latin typeface="Times New Roman"/>
                 <a:cs typeface="Times New Roman"/>
               </a:rPr>
-              <a:t>[30]	P. Thodoroff, J. Pineau, and A. Lim, “Learning robust features using deep learning for automatic seizure detection,” in Proc. Mach. Learn. Healthcare Conf. (MLHC), vol. 56, 2016, pp. 178–190.</a:t>
+              <a:t>[35]	S. Ghosh, V. Singh, and O. S. Powar, “Seizure detection using EEG on the CHB-MIT dataset via multi-domain feature engineering and classical machine learning,” Discov. Appl. Sci., vol. 8, no. 3, Art. no. 312, 2026.</a:t>
             </a:r>
           </a:p>
         </p:txBody>
@@ -37345,7 +37372,7 @@
                 <a:latin typeface="Times New Roman" panose="02020603050405020304" pitchFamily="18" charset="0"/>
                 <a:cs typeface="Times New Roman" panose="02020603050405020304" pitchFamily="18" charset="0"/>
               </a:rPr>
-              <a:t>26 October 2026</a:t>
+              <a:t>27 October 2026</a:t>
             </a:fld>
             <a:endParaRPr lang="en-US" dirty="0">
               <a:latin typeface="Times New Roman" panose="02020603050405020304" pitchFamily="18" charset="0"/>
@@ -37486,7 +37513,7 @@
                 <a:latin typeface="Times New Roman"/>
                 <a:cs typeface="Times New Roman"/>
               </a:rPr>
-              <a:t>[31]	T. Sverrisson and S. Gudmundsson, “LookAroundNet: Extending temporal context with transformers for clinically viable EEG seizure detection,” arXiv preprint, 2025.</a:t>
+              <a:t>[36]	M. L. Scheuer, S. B. Wilson, A. Antony, G. Ghearing, A. Urban, and A. I. Bagić, “Seizure detection: Interreader agreement and detection algorithm assessments using a large dataset,” J. Clin. Neurophysiol., vol. 38, no. 5, pp. 439–447, Sep. 2021.</a:t>
             </a:r>
           </a:p>
           <a:p>
@@ -37509,7 +37536,7 @@
                 <a:latin typeface="Times New Roman"/>
                 <a:cs typeface="Times New Roman"/>
               </a:rPr>
-              <a:t>[32]	G. Giannakakis, V. Sakkalis, M. Pediaditis, and M. Tsiknakis, “Methods for seizure detection and prediction: An overview,” in Modern Electroencephalographic Assessment Techniques (Neuromethods, vol. 91). New York, NY, USA: Springer, 2015, pp. 131–157.</a:t>
+              <a:t>[37]	S. Roy, U. Asif, J. Tang, and S. Harrer, “Seizure type classification using EEG signals and machine learning: Setting a benchmark,” in Proc. IEEE Signal Process. Med. Biol. Symp. (SPMB), Dec. 2020, pp. 1–6.</a:t>
             </a:r>
           </a:p>
           <a:p>
@@ -37532,7 +37559,7 @@
                 <a:latin typeface="Times New Roman"/>
                 <a:cs typeface="Times New Roman"/>
               </a:rPr>
-              <a:t>[33]	Y. Yang, K. Guo, Z. Fang, H. Lin, M. Grosser, and J. Lu, “Multi-model transfer learning and genotypic analysis for seizure type classification,” in Lecture Notes in Computer Science. Springer, 2023, pp. 223–234.</a:t>
+              <a:t>[38]	C. Baumgartner and J. P. Koren, “Seizure detection using scalp-EEG,” Epilepsia, vol. 59, no. S1, pp. 14–22, Jun. 2018.</a:t>
             </a:r>
           </a:p>
           <a:p>
@@ -37555,7 +37582,7 @@
                 <a:latin typeface="Times New Roman"/>
                 <a:cs typeface="Times New Roman"/>
               </a:rPr>
-              <a:t>[34]	D. Ahmedt-Aristizabal, T. Fernando, S. Denman, L. Petersson, M. J. Aburn, and C. Fookes, “Neural memory networks for seizure type classification,” in Proc. 42nd Annu. Int. Conf. IEEE Eng. Med. Biol. Soc. (EMBC), Jul. 2020, pp. 569–575.</a:t>
+              <a:t>[39]	U. Asif, S. Roy, J. Tang, and S. Harrer, “SeizureNet: Multi-spectral deep feature learning for seizure type classification,” in Machine Learning in Clinical Neuroimaging and Radiogenomics in Neuro-oncology (Lecture Notes in Computer Science). Springer, 2020, pp. 77–87.</a:t>
             </a:r>
           </a:p>
           <a:p>
@@ -37578,7 +37605,7 @@
                 <a:latin typeface="Times New Roman"/>
                 <a:cs typeface="Times New Roman"/>
               </a:rPr>
-              <a:t>[35]	S. Ghosh, V. Singh, and O. S. Powar, “Seizure detection using EEG on the CHB-MIT dataset via multi-domain feature engineering and classical machine learning,” Discov. Appl. Sci., vol. 8, no. 3, Art. no. 312, 2026.</a:t>
+              <a:t>[40]	K. Wu, Z. Zhao, and B. Yener, “SeizureTransformer: Scaling U-Net with transformer for simultaneous time-step level seizure detection from long EEG recordings,” arXiv:2504.00336, 2025.</a:t>
             </a:r>
           </a:p>
         </p:txBody>
@@ -37628,7 +37655,7 @@
                 <a:latin typeface="Times New Roman" panose="02020603050405020304" pitchFamily="18" charset="0"/>
                 <a:cs typeface="Times New Roman" panose="02020603050405020304" pitchFamily="18" charset="0"/>
               </a:rPr>
-              <a:t>26 October 2026</a:t>
+              <a:t>27 October 2026</a:t>
             </a:fld>
             <a:endParaRPr lang="en-US" dirty="0">
               <a:latin typeface="Times New Roman" panose="02020603050405020304" pitchFamily="18" charset="0"/>
@@ -37769,7 +37796,7 @@
                 <a:latin typeface="Times New Roman"/>
                 <a:cs typeface="Times New Roman"/>
               </a:rPr>
-              <a:t>[36]	M. L. Scheuer, S. B. Wilson, A. Antony, G. Ghearing, A. Urban, and A. I. Bagić, “Seizure detection: Interreader agreement and detection algorithm assessments using a large dataset,” J. Clin. Neurophysiol., vol. 38, no. 5, pp. 439–447, Sep. 2021.</a:t>
+              <a:t>[41]	W. Weng et al., “Self-supervised learning for electroencephalogram: A systematic survey,” ACM Comput. Surv., vol. 57, no. 12, pp. 1–38, 2025.</a:t>
             </a:r>
           </a:p>
           <a:p>
@@ -37792,7 +37819,7 @@
                 <a:latin typeface="Times New Roman"/>
                 <a:cs typeface="Times New Roman"/>
               </a:rPr>
-              <a:t>[37]	S. Roy, U. Asif, J. Tang, and S. Harrer, “Seizure type classification using EEG signals and machine learning: Setting a benchmark,” in Proc. IEEE Signal Process. Med. Biol. Symp. (SPMB), Dec. 2020, pp. 1–6.</a:t>
+              <a:t>[42]	J. J. Falco-Walter, I. E. Scheffer, and R. S. Fisher, “The new definition and classification of seizures and epilepsy,” Epilepsy Res., vol. 139, pp. 73–79, Jan. 2018.</a:t>
             </a:r>
           </a:p>
           <a:p>
@@ -37815,7 +37842,7 @@
                 <a:latin typeface="Times New Roman"/>
                 <a:cs typeface="Times New Roman"/>
               </a:rPr>
-              <a:t>[38]	C. Baumgartner and J. P. Koren, “Seizure detection using scalp-EEG,” Epilepsia, vol. 59, no. S1, pp. 14–22, Jun. 2018.</a:t>
+              <a:t>[43]	L. Wei and C. Mooney, “Transfer learning-based seizure detection on multiple channels of paediatric EEGs,” in Proc. 45th Annu. Int. Conf. IEEE Eng. Med. Biol. Soc. (EMBC), Jul. 2023, pp. 1–4.</a:t>
             </a:r>
           </a:p>
           <a:p>
@@ -37838,7 +37865,7 @@
                 <a:latin typeface="Times New Roman"/>
                 <a:cs typeface="Times New Roman"/>
               </a:rPr>
-              <a:t>[39]	U. Asif, S. Roy, J. Tang, and S. Harrer, “SeizureNet: Multi-spectral deep feature learning for seizure type classification,” in Machine Learning in Clinical Neuroimaging and Radiogenomics in Neuro-oncology (Lecture Notes in Computer Science). Springer, 2020, pp. 77–87.</a:t>
+              <a:t>[44]	H. Banville, O. Chehab, A. Hyvärinen, D.-A. Engemann, and A. Gramfort, “Uncovering the structure of clinical EEG signals with self-supervised learning,” J. Neural Eng., vol. 18, no. 4, Art. no. 046020, 2021.</a:t>
             </a:r>
           </a:p>
           <a:p>
@@ -37861,7 +37888,7 @@
                 <a:latin typeface="Times New Roman"/>
                 <a:cs typeface="Times New Roman"/>
               </a:rPr>
-              <a:t>[40]	K. Wu, Z. Zhao, and B. Yener, “SeizureTransformer: Scaling U-Net with transformer for simultaneous time-step level seizure detection from long EEG recordings,” arXiv:2504.00336, 2025.</a:t>
+              <a:t>[45]	A. Shoeibi et al., “Automatic diagnosis of schizophrenia in EEG signals using CNN-LSTM models,” Front. Neuroinform., vol. 15, Art. no. 777977, Nov. 2021.</a:t>
             </a:r>
           </a:p>
         </p:txBody>
@@ -37911,7 +37938,7 @@
                 <a:latin typeface="Times New Roman" panose="02020603050405020304" pitchFamily="18" charset="0"/>
                 <a:cs typeface="Times New Roman" panose="02020603050405020304" pitchFamily="18" charset="0"/>
               </a:rPr>
-              <a:t>26 October 2026</a:t>
+              <a:t>27 October 2026</a:t>
             </a:fld>
             <a:endParaRPr lang="en-US" dirty="0">
               <a:latin typeface="Times New Roman" panose="02020603050405020304" pitchFamily="18" charset="0"/>
@@ -38052,7 +38079,7 @@
                 <a:latin typeface="Times New Roman"/>
                 <a:cs typeface="Times New Roman"/>
               </a:rPr>
-              <a:t>[41]	W. Weng et al., “Self-supervised learning for electroencephalogram: A systematic survey,” ACM Comput. Surv., vol. 57, no. 12, pp. 1–38, 2025.</a:t>
+              <a:t>[46]	R. S. Fisher et al., “Operational classification of seizure types by the International League Against Epilepsy: Position paper of the ILAE Commission for Classification and Terminology,” Epilepsia, vol. 58, no. 4, pp. 522–530, Apr. 2017.</a:t>
             </a:r>
           </a:p>
           <a:p>
@@ -38075,7 +38102,7 @@
                 <a:latin typeface="Times New Roman"/>
                 <a:cs typeface="Times New Roman"/>
               </a:rPr>
-              <a:t>[42]	J. J. Falco-Walter, I. E. Scheffer, and R. S. Fisher, “The new definition and classification of seizures and epilepsy,” Epilepsy Res., vol. 139, pp. 73–79, Jan. 2018.</a:t>
+              <a:t>[47]	P. Detti et al., “Siena Scalp EEG Database,” PhysioNet, 2020. [Online]. Available: https://doi.org/10.13026/5d4a-j060</a:t>
             </a:r>
           </a:p>
           <a:p>
@@ -38098,7 +38125,7 @@
                 <a:latin typeface="Times New Roman"/>
                 <a:cs typeface="Times New Roman"/>
               </a:rPr>
-              <a:t>[43]	L. Wei and C. Mooney, “Transfer learning-based seizure detection on multiple channels of paediatric EEGs,” in Proc. 45th Annu. Int. Conf. IEEE Eng. Med. Biol. Soc. (EMBC), Jul. 2023, pp. 1–4.</a:t>
+              <a:t>[48]	A. H. Shoeb, “Application of machine learning to epileptic seizure onset detection and treatment,” Ph.D. dissertation, Dept. Elect. Eng. Comput. Sci., Massachusetts Inst. Technol., Cambridge, MA, USA, 2009 (CHB-MIT Scalp EEG Database).</a:t>
             </a:r>
           </a:p>
           <a:p>
@@ -38121,7 +38148,7 @@
                 <a:latin typeface="Times New Roman"/>
                 <a:cs typeface="Times New Roman"/>
               </a:rPr>
-              <a:t>[44]	H. Banville, O. Chehab, A. Hyvärinen, D.-A. Engemann, and A. Gramfort, “Uncovering the structure of clinical EEG signals with self-supervised learning,” J. Neural Eng., vol. 18, no. 4, Art. no. 046020, 2021.</a:t>
+              <a:t>[49]	S. Roy, I. Kiral-Kornek, and S. Harrer, “ChronoNet: A deep recurrent neural network for abnormal EEG identification,” in Proc. Conf. Artif. Intell. Med. (AIME), 2019, pp. 47–56.</a:t>
             </a:r>
           </a:p>
           <a:p>
@@ -38144,7 +38171,7 @@
                 <a:latin typeface="Times New Roman"/>
                 <a:cs typeface="Times New Roman"/>
               </a:rPr>
-              <a:t>[45]	A. Shoeibi et al., “Automatic diagnosis of schizophrenia in EEG signals using CNN-LSTM models,” Front. Neuroinform., vol. 15, Art. no. 777977, Nov. 2021.</a:t>
+              <a:t>[50]	K. Saab, J. Dunnmon, C. Ré, D. Rubin, and C. Lee-Messer, “Weak supervision as an efficient approach for automated seizure detection in electroencephalography,” npj Digit. Med., vol. 3, no. 1, Art. no. 59, Apr. 2020.</a:t>
             </a:r>
           </a:p>
         </p:txBody>
@@ -38158,289 +38185,6 @@
 </file>
 
 <file path=ppt/slides/slide48.xml><?xml version="1.0" encoding="utf-8"?>
-<p:sld xmlns:a="http://schemas.openxmlformats.org/drawingml/2006/main" xmlns:r="http://schemas.openxmlformats.org/officeDocument/2006/relationships" xmlns:p="http://schemas.openxmlformats.org/presentationml/2006/main">
-  <p:cSld>
-    <p:spTree>
-      <p:nvGrpSpPr>
-        <p:cNvPr id="1" name=""/>
-        <p:cNvGrpSpPr/>
-        <p:nvPr/>
-      </p:nvGrpSpPr>
-      <p:grpSpPr>
-        <a:xfrm>
-          <a:off x="0" y="0"/>
-          <a:ext cx="0" cy="0"/>
-          <a:chOff x="0" y="0"/>
-          <a:chExt cx="0" cy="0"/>
-        </a:xfrm>
-      </p:grpSpPr>
-      <p:sp>
-        <p:nvSpPr>
-          <p:cNvPr id="3" name="Date Placeholder 2"/>
-          <p:cNvSpPr>
-            <a:spLocks noGrp="1"/>
-          </p:cNvSpPr>
-          <p:nvPr>
-            <p:ph type="dt" sz="half" idx="10"/>
-          </p:nvPr>
-        </p:nvSpPr>
-        <p:spPr/>
-        <p:txBody>
-          <a:bodyPr/>
-          <a:lstStyle/>
-          <a:p>
-            <a:fld id="{79B7A7E6-0BB5-4562-B4D8-B2D95118667A}" type="datetime3">
-              <a:rPr lang="en-US" smtClean="0">
-                <a:latin typeface="Times New Roman" panose="02020603050405020304" pitchFamily="18" charset="0"/>
-                <a:cs typeface="Times New Roman" panose="02020603050405020304" pitchFamily="18" charset="0"/>
-              </a:rPr>
-              <a:t>26 October 2026</a:t>
-            </a:fld>
-            <a:endParaRPr lang="en-US" dirty="0">
-              <a:latin typeface="Times New Roman" panose="02020603050405020304" pitchFamily="18" charset="0"/>
-              <a:cs typeface="Times New Roman" panose="02020603050405020304" pitchFamily="18" charset="0"/>
-            </a:endParaRPr>
-          </a:p>
-        </p:txBody>
-      </p:sp>
-      <p:sp>
-        <p:nvSpPr>
-          <p:cNvPr id="7" name="Footer Placeholder 6"/>
-          <p:cNvSpPr>
-            <a:spLocks noGrp="1"/>
-          </p:cNvSpPr>
-          <p:nvPr>
-            <p:ph type="ftr" sz="quarter" idx="11"/>
-          </p:nvPr>
-        </p:nvSpPr>
-        <p:spPr/>
-        <p:txBody>
-          <a:bodyPr/>
-          <a:lstStyle/>
-          <a:p>
-            <a:r>
-              <a:rPr lang="en-IN" dirty="0">
-                <a:latin typeface="Times New Roman" panose="02020603050405020304" pitchFamily="18" charset="0"/>
-                <a:cs typeface="Times New Roman" panose="02020603050405020304" pitchFamily="18" charset="0"/>
-              </a:rPr>
-              <a:t>Dept of CSE </a:t>
-            </a:r>
-          </a:p>
-        </p:txBody>
-      </p:sp>
-      <p:sp>
-        <p:nvSpPr>
-          <p:cNvPr id="8" name="Slide Number Placeholder 7"/>
-          <p:cNvSpPr>
-            <a:spLocks noGrp="1"/>
-          </p:cNvSpPr>
-          <p:nvPr>
-            <p:ph type="sldNum" sz="quarter" idx="12"/>
-          </p:nvPr>
-        </p:nvSpPr>
-        <p:spPr/>
-        <p:txBody>
-          <a:bodyPr/>
-          <a:lstStyle/>
-          <a:p>
-            <a:fld id="{B6F15528-21DE-4FAA-801E-634DDDAF4B2B}" type="slidenum">
-              <a:rPr lang="en-IN" smtClean="0">
-                <a:latin typeface="Times New Roman" panose="02020603050405020304" pitchFamily="18" charset="0"/>
-                <a:cs typeface="Times New Roman" panose="02020603050405020304" pitchFamily="18" charset="0"/>
-              </a:rPr>
-              <a:pPr/>
-              <a:t>48</a:t>
-            </a:fld>
-            <a:endParaRPr lang="en-IN" dirty="0">
-              <a:latin typeface="Times New Roman" panose="02020603050405020304" pitchFamily="18" charset="0"/>
-              <a:cs typeface="Times New Roman" panose="02020603050405020304" pitchFamily="18" charset="0"/>
-            </a:endParaRPr>
-          </a:p>
-        </p:txBody>
-      </p:sp>
-      <p:sp>
-        <p:nvSpPr>
-          <p:cNvPr id="9" name="TextBox 8"/>
-          <p:cNvSpPr txBox="1"/>
-          <p:nvPr/>
-        </p:nvSpPr>
-        <p:spPr>
-          <a:xfrm>
-            <a:off x="508000" y="230000"/>
-            <a:ext cx="17272000" cy="1100000"/>
-          </a:xfrm>
-          <a:prstGeom prst="rect">
-            <a:avLst/>
-          </a:prstGeom>
-          <a:noFill/>
-        </p:spPr>
-        <p:txBody>
-          <a:bodyPr wrap="square">
-            <a:spAutoFit/>
-          </a:bodyPr>
-          <a:lstStyle/>
-          <a:p>
-            <a:pPr algn="ctr"/>
-            <a:r>
-              <a:rPr sz="6000" b="1" i="0">
-                <a:solidFill>
-                  <a:srgbClr val="1A1A1A"/>
-                </a:solidFill>
-                <a:latin typeface="Times New Roman"/>
-                <a:cs typeface="Times New Roman"/>
-              </a:rPr>
-              <a:t>References</a:t>
-            </a:r>
-          </a:p>
-        </p:txBody>
-      </p:sp>
-      <p:sp>
-        <p:nvSpPr>
-          <p:cNvPr id="10" name="TextBox 9"/>
-          <p:cNvSpPr txBox="1"/>
-          <p:nvPr/>
-        </p:nvSpPr>
-        <p:spPr>
-          <a:xfrm>
-            <a:off x="1257300" y="1450000"/>
-            <a:ext cx="15773400" cy="7700000"/>
-          </a:xfrm>
-          <a:prstGeom prst="rect">
-            <a:avLst/>
-          </a:prstGeom>
-          <a:noFill/>
-        </p:spPr>
-        <p:txBody>
-          <a:bodyPr wrap="square">
-            <a:spAutoFit/>
-          </a:bodyPr>
-          <a:lstStyle/>
-          <a:p>
-            <a:pPr marL="914400" indent="-914400" algn="just">
-              <a:lnSpc>
-                <a:spcPct val="110000"/>
-              </a:lnSpc>
-              <a:spcAft>
-                <a:spcPts val="1800"/>
-              </a:spcAft>
-              <a:tabLst>
-                <a:tab pos="914400" algn="l"/>
-              </a:tabLst>
-            </a:pPr>
-            <a:r>
-              <a:rPr sz="2800" b="0" i="0">
-                <a:solidFill>
-                  <a:srgbClr val="1A1A1A"/>
-                </a:solidFill>
-                <a:latin typeface="Times New Roman"/>
-                <a:cs typeface="Times New Roman"/>
-              </a:rPr>
-              <a:t>[46]	R. S. Fisher et al., “Operational classification of seizure types by the International League Against Epilepsy: Position paper of the ILAE Commission for Classification and Terminology,” Epilepsia, vol. 58, no. 4, pp. 522–530, Apr. 2017.</a:t>
-            </a:r>
-          </a:p>
-          <a:p>
-            <a:pPr marL="914400" indent="-914400" algn="just">
-              <a:lnSpc>
-                <a:spcPct val="110000"/>
-              </a:lnSpc>
-              <a:spcAft>
-                <a:spcPts val="1800"/>
-              </a:spcAft>
-              <a:tabLst>
-                <a:tab pos="914400" algn="l"/>
-              </a:tabLst>
-            </a:pPr>
-            <a:r>
-              <a:rPr sz="2800" b="0" i="0">
-                <a:solidFill>
-                  <a:srgbClr val="1A1A1A"/>
-                </a:solidFill>
-                <a:latin typeface="Times New Roman"/>
-                <a:cs typeface="Times New Roman"/>
-              </a:rPr>
-              <a:t>[47]	P. Detti et al., “Siena Scalp EEG Database,” PhysioNet, 2020. [Online]. Available: https://doi.org/10.13026/5d4a-j060</a:t>
-            </a:r>
-          </a:p>
-          <a:p>
-            <a:pPr marL="914400" indent="-914400" algn="just">
-              <a:lnSpc>
-                <a:spcPct val="110000"/>
-              </a:lnSpc>
-              <a:spcAft>
-                <a:spcPts val="1800"/>
-              </a:spcAft>
-              <a:tabLst>
-                <a:tab pos="914400" algn="l"/>
-              </a:tabLst>
-            </a:pPr>
-            <a:r>
-              <a:rPr sz="2800" b="0" i="0">
-                <a:solidFill>
-                  <a:srgbClr val="1A1A1A"/>
-                </a:solidFill>
-                <a:latin typeface="Times New Roman"/>
-                <a:cs typeface="Times New Roman"/>
-              </a:rPr>
-              <a:t>[48]	A. H. Shoeb, “Application of machine learning to epileptic seizure onset detection and treatment,” Ph.D. dissertation, Dept. Elect. Eng. Comput. Sci., Massachusetts Inst. Technol., Cambridge, MA, USA, 2009 (CHB-MIT Scalp EEG Database).</a:t>
-            </a:r>
-          </a:p>
-          <a:p>
-            <a:pPr marL="914400" indent="-914400" algn="just">
-              <a:lnSpc>
-                <a:spcPct val="110000"/>
-              </a:lnSpc>
-              <a:spcAft>
-                <a:spcPts val="1800"/>
-              </a:spcAft>
-              <a:tabLst>
-                <a:tab pos="914400" algn="l"/>
-              </a:tabLst>
-            </a:pPr>
-            <a:r>
-              <a:rPr sz="2800" b="0" i="0">
-                <a:solidFill>
-                  <a:srgbClr val="1A1A1A"/>
-                </a:solidFill>
-                <a:latin typeface="Times New Roman"/>
-                <a:cs typeface="Times New Roman"/>
-              </a:rPr>
-              <a:t>[49]	S. Roy, I. Kiral-Kornek, and S. Harrer, “ChronoNet: A deep recurrent neural network for abnormal EEG identification,” in Proc. Conf. Artif. Intell. Med. (AIME), 2019, pp. 47–56.</a:t>
-            </a:r>
-          </a:p>
-          <a:p>
-            <a:pPr marL="914400" indent="-914400" algn="just">
-              <a:lnSpc>
-                <a:spcPct val="110000"/>
-              </a:lnSpc>
-              <a:spcAft>
-                <a:spcPts val="1800"/>
-              </a:spcAft>
-              <a:tabLst>
-                <a:tab pos="914400" algn="l"/>
-              </a:tabLst>
-            </a:pPr>
-            <a:r>
-              <a:rPr sz="2800" b="0" i="0">
-                <a:solidFill>
-                  <a:srgbClr val="1A1A1A"/>
-                </a:solidFill>
-                <a:latin typeface="Times New Roman"/>
-                <a:cs typeface="Times New Roman"/>
-              </a:rPr>
-              <a:t>[50]	K. Saab, J. Dunnmon, C. Ré, D. Rubin, and C. Lee-Messer, “Weak supervision as an efficient approach for automated seizure detection in electroencephalography,” npj Digit. Med., vol. 3, no. 1, Art. no. 59, Apr. 2020.</a:t>
-            </a:r>
-          </a:p>
-        </p:txBody>
-      </p:sp>
-    </p:spTree>
-  </p:cSld>
-  <p:clrMapOvr>
-    <a:masterClrMapping/>
-  </p:clrMapOvr>
-</p:sld>
-</file>
-
-<file path=ppt/slides/slide49.xml><?xml version="1.0" encoding="utf-8"?>
 <p:sld xmlns:a="http://schemas.openxmlformats.org/drawingml/2006/main" xmlns:r="http://schemas.openxmlformats.org/officeDocument/2006/relationships" xmlns:p="http://schemas.openxmlformats.org/presentationml/2006/main" showMasterSp="0">
   <p:cSld>
     <p:spTree>
@@ -38516,10 +38260,16 @@
           <a:lstStyle/>
           <a:p>
             <a:fld id="{09442DFB-37A0-44C9-B8EE-93596F90C7A6}" type="datetime3">
-              <a:rPr lang="en-US" smtClean="0"/>
-              <a:t>26 October 2026</a:t>
+              <a:rPr lang="en-US" smtClean="0">
+                <a:latin typeface="Times New Roman" panose="02020603050405020304" pitchFamily="18" charset="0"/>
+                <a:cs typeface="Times New Roman" panose="02020603050405020304" pitchFamily="18" charset="0"/>
+              </a:rPr>
+              <a:t>27 October 2026</a:t>
             </a:fld>
-            <a:endParaRPr lang="en-US" dirty="0"/>
+            <a:endParaRPr lang="en-US" dirty="0">
+              <a:latin typeface="Times New Roman" panose="02020603050405020304" pitchFamily="18" charset="0"/>
+              <a:cs typeface="Times New Roman" panose="02020603050405020304" pitchFamily="18" charset="0"/>
+            </a:endParaRPr>
           </a:p>
         </p:txBody>
       </p:sp>
@@ -38539,7 +38289,10 @@
           <a:lstStyle/>
           <a:p>
             <a:r>
-              <a:rPr lang="en-IN" dirty="0"/>
+              <a:rPr lang="en-IN" dirty="0">
+                <a:latin typeface="Times New Roman" panose="02020603050405020304" pitchFamily="18" charset="0"/>
+                <a:cs typeface="Times New Roman" panose="02020603050405020304" pitchFamily="18" charset="0"/>
+              </a:rPr>
               <a:t>Dept of CSE </a:t>
             </a:r>
           </a:p>
@@ -38561,11 +38314,17 @@
           <a:lstStyle/>
           <a:p>
             <a:fld id="{B6F15528-21DE-4FAA-801E-634DDDAF4B2B}" type="slidenum">
-              <a:rPr lang="en-IN" smtClean="0"/>
+              <a:rPr lang="en-IN" smtClean="0">
+                <a:latin typeface="Times New Roman" panose="02020603050405020304" pitchFamily="18" charset="0"/>
+                <a:cs typeface="Times New Roman" panose="02020603050405020304" pitchFamily="18" charset="0"/>
+              </a:rPr>
               <a:pPr/>
-              <a:t>49</a:t>
+              <a:t>48</a:t>
             </a:fld>
-            <a:endParaRPr lang="en-IN" dirty="0"/>
+            <a:endParaRPr lang="en-IN" dirty="0">
+              <a:latin typeface="Times New Roman" panose="02020603050405020304" pitchFamily="18" charset="0"/>
+              <a:cs typeface="Times New Roman" panose="02020603050405020304" pitchFamily="18" charset="0"/>
+            </a:endParaRPr>
           </a:p>
         </p:txBody>
       </p:sp>
@@ -38728,7 +38487,7 @@
                 <a:latin typeface="Times New Roman" panose="02020603050405020304" pitchFamily="18" charset="0"/>
                 <a:cs typeface="Times New Roman" panose="02020603050405020304" pitchFamily="18" charset="0"/>
               </a:rPr>
-              <a:t>26 October 2026</a:t>
+              <a:t>27 October 2026</a:t>
             </a:fld>
             <a:endParaRPr lang="en-US" dirty="0">
               <a:latin typeface="Times New Roman" panose="02020603050405020304" pitchFamily="18" charset="0"/>
